--- a/figures/results_ordered/starshape.pptx
+++ b/figures/results_ordered/starshape.pptx
@@ -6,6 +6,8 @@
   </p:sldMasterIdLst>
   <p:sldIdLst>
     <p:sldId id="256" r:id="rId2"/>
+    <p:sldId id="257" r:id="rId3"/>
+    <p:sldId id="258" r:id="rId4"/>
   </p:sldIdLst>
   <p:sldSz cx="12192000" cy="6858000"/>
   <p:notesSz cx="6858000" cy="9144000"/>
@@ -115,7 +117,7 @@
 <file path=ppt/revisionInfo.xml><?xml version="1.0" encoding="utf-8"?>
 <p1510:revInfo xmlns:a="http://schemas.openxmlformats.org/drawingml/2006/main" xmlns:r="http://schemas.openxmlformats.org/officeDocument/2006/relationships" xmlns:p1510="http://schemas.microsoft.com/office/powerpoint/2015/10/main">
   <p1510:revLst>
-    <p1510:client id="{3BDB6656-2E58-4C49-83AC-339DD8F1D5BE}" v="3" dt="2026-05-09T19:10:12.504"/>
+    <p1510:client id="{3BDB6656-2E58-4C49-83AC-339DD8F1D5BE}" v="88" dt="2026-05-15T15:47:06.214"/>
   </p1510:revLst>
 </p1510:revInfo>
 </file>
@@ -124,19 +126,19 @@
 <pc:chgInfo xmlns:a="http://schemas.openxmlformats.org/drawingml/2006/main" xmlns:r="http://schemas.openxmlformats.org/officeDocument/2006/relationships" xmlns:ac="http://schemas.microsoft.com/office/drawing/2013/main/command" xmlns:pc="http://schemas.microsoft.com/office/powerpoint/2013/main/command">
   <pc:docChgLst>
     <pc:chgData name="David Beckwitt" userId="bdca50846bee3b35" providerId="LiveId" clId="{77C57F99-3B40-463A-9855-34DA2A8048A2}"/>
-    <pc:docChg chg="custSel modSld">
-      <pc:chgData name="David Beckwitt" userId="bdca50846bee3b35" providerId="LiveId" clId="{77C57F99-3B40-463A-9855-34DA2A8048A2}" dt="2026-05-09T19:11:27.380" v="31" actId="14100"/>
+    <pc:docChg chg="undo custSel addSld modSld">
+      <pc:chgData name="David Beckwitt" userId="bdca50846bee3b35" providerId="LiveId" clId="{77C57F99-3B40-463A-9855-34DA2A8048A2}" dt="2026-05-15T15:47:20.372" v="355" actId="1076"/>
       <pc:docMkLst>
         <pc:docMk/>
       </pc:docMkLst>
       <pc:sldChg chg="addSp delSp modSp mod">
-        <pc:chgData name="David Beckwitt" userId="bdca50846bee3b35" providerId="LiveId" clId="{77C57F99-3B40-463A-9855-34DA2A8048A2}" dt="2026-05-09T19:11:27.380" v="31" actId="14100"/>
+        <pc:chgData name="David Beckwitt" userId="bdca50846bee3b35" providerId="LiveId" clId="{77C57F99-3B40-463A-9855-34DA2A8048A2}" dt="2026-05-15T15:17:34.715" v="44" actId="931"/>
         <pc:sldMkLst>
           <pc:docMk/>
           <pc:sldMk cId="2316372449" sldId="256"/>
         </pc:sldMkLst>
         <pc:spChg chg="add mod">
-          <ac:chgData name="David Beckwitt" userId="bdca50846bee3b35" providerId="LiveId" clId="{77C57F99-3B40-463A-9855-34DA2A8048A2}" dt="2026-05-09T19:10:24.347" v="28" actId="1038"/>
+          <ac:chgData name="David Beckwitt" userId="bdca50846bee3b35" providerId="LiveId" clId="{77C57F99-3B40-463A-9855-34DA2A8048A2}" dt="2026-05-15T15:17:32.498" v="41" actId="1076"/>
           <ac:spMkLst>
             <pc:docMk/>
             <pc:sldMk cId="2316372449" sldId="256"/>
@@ -144,29 +146,69 @@
           </ac:spMkLst>
         </pc:spChg>
         <pc:spChg chg="mod">
-          <ac:chgData name="David Beckwitt" userId="bdca50846bee3b35" providerId="LiveId" clId="{77C57F99-3B40-463A-9855-34DA2A8048A2}" dt="2026-05-09T19:11:27.380" v="31" actId="14100"/>
+          <ac:chgData name="David Beckwitt" userId="bdca50846bee3b35" providerId="LiveId" clId="{77C57F99-3B40-463A-9855-34DA2A8048A2}" dt="2026-05-15T15:17:32.498" v="41" actId="1076"/>
           <ac:spMkLst>
             <pc:docMk/>
             <pc:sldMk cId="2316372449" sldId="256"/>
             <ac:spMk id="10" creationId="{8618C7CB-B30B-949A-AA4F-6C1CE713FFCA}"/>
           </ac:spMkLst>
         </pc:spChg>
-        <pc:spChg chg="del">
-          <ac:chgData name="David Beckwitt" userId="bdca50846bee3b35" providerId="LiveId" clId="{77C57F99-3B40-463A-9855-34DA2A8048A2}" dt="2026-05-09T19:09:44.125" v="1" actId="478"/>
+        <pc:spChg chg="mod">
+          <ac:chgData name="David Beckwitt" userId="bdca50846bee3b35" providerId="LiveId" clId="{77C57F99-3B40-463A-9855-34DA2A8048A2}" dt="2026-05-15T15:17:32.498" v="41" actId="1076"/>
           <ac:spMkLst>
             <pc:docMk/>
             <pc:sldMk cId="2316372449" sldId="256"/>
-            <ac:spMk id="42" creationId="{27BF5AF8-8E7B-3EFB-E327-8F42799669A1}"/>
+            <ac:spMk id="11" creationId="{B76C0F0F-EA28-FE99-B01C-051336B89243}"/>
           </ac:spMkLst>
         </pc:spChg>
-        <pc:spChg chg="del">
-          <ac:chgData name="David Beckwitt" userId="bdca50846bee3b35" providerId="LiveId" clId="{77C57F99-3B40-463A-9855-34DA2A8048A2}" dt="2026-05-09T19:09:36.776" v="0" actId="21"/>
+        <pc:spChg chg="mod">
+          <ac:chgData name="David Beckwitt" userId="bdca50846bee3b35" providerId="LiveId" clId="{77C57F99-3B40-463A-9855-34DA2A8048A2}" dt="2026-05-15T15:17:32.498" v="41" actId="1076"/>
           <ac:spMkLst>
             <pc:docMk/>
             <pc:sldMk cId="2316372449" sldId="256"/>
-            <ac:spMk id="73" creationId="{837BD0EC-45C4-CF78-7655-8569945B6392}"/>
+            <ac:spMk id="12" creationId="{A4088FB5-8429-9387-AE1B-16BB52B9B2E4}"/>
           </ac:spMkLst>
         </pc:spChg>
+        <pc:spChg chg="mod">
+          <ac:chgData name="David Beckwitt" userId="bdca50846bee3b35" providerId="LiveId" clId="{77C57F99-3B40-463A-9855-34DA2A8048A2}" dt="2026-05-15T15:17:32.498" v="41" actId="1076"/>
+          <ac:spMkLst>
+            <pc:docMk/>
+            <pc:sldMk cId="2316372449" sldId="256"/>
+            <ac:spMk id="16" creationId="{9B45FA36-06E6-AF3C-C424-DEDE05823927}"/>
+          </ac:spMkLst>
+        </pc:spChg>
+        <pc:spChg chg="mod">
+          <ac:chgData name="David Beckwitt" userId="bdca50846bee3b35" providerId="LiveId" clId="{77C57F99-3B40-463A-9855-34DA2A8048A2}" dt="2026-05-15T15:17:32.498" v="41" actId="1076"/>
+          <ac:spMkLst>
+            <pc:docMk/>
+            <pc:sldMk cId="2316372449" sldId="256"/>
+            <ac:spMk id="33" creationId="{0B6E10FB-2E56-5380-BBCE-0420BD769738}"/>
+          </ac:spMkLst>
+        </pc:spChg>
+        <pc:grpChg chg="add mod">
+          <ac:chgData name="David Beckwitt" userId="bdca50846bee3b35" providerId="LiveId" clId="{77C57F99-3B40-463A-9855-34DA2A8048A2}" dt="2026-05-15T15:17:32.116" v="40" actId="164"/>
+          <ac:grpSpMkLst>
+            <pc:docMk/>
+            <pc:sldMk cId="2316372449" sldId="256"/>
+            <ac:grpSpMk id="9" creationId="{8315C882-9E86-6121-036C-40BD64BE3D52}"/>
+          </ac:grpSpMkLst>
+        </pc:grpChg>
+        <pc:picChg chg="mod">
+          <ac:chgData name="David Beckwitt" userId="bdca50846bee3b35" providerId="LiveId" clId="{77C57F99-3B40-463A-9855-34DA2A8048A2}" dt="2026-05-15T15:17:32.498" v="41" actId="1076"/>
+          <ac:picMkLst>
+            <pc:docMk/>
+            <pc:sldMk cId="2316372449" sldId="256"/>
+            <ac:picMk id="5" creationId="{AE8BFCDB-8BDF-E5FD-7CEE-3B77F6FA0F27}"/>
+          </ac:picMkLst>
+        </pc:picChg>
+        <pc:picChg chg="add del mod ord">
+          <ac:chgData name="David Beckwitt" userId="bdca50846bee3b35" providerId="LiveId" clId="{77C57F99-3B40-463A-9855-34DA2A8048A2}" dt="2026-05-15T15:17:34.715" v="44" actId="931"/>
+          <ac:picMkLst>
+            <pc:docMk/>
+            <pc:sldMk cId="2316372449" sldId="256"/>
+            <ac:picMk id="6" creationId="{005B06C3-4CB0-1372-EF98-689C9AE40770}"/>
+          </ac:picMkLst>
+        </pc:picChg>
         <pc:cxnChg chg="add mod">
           <ac:chgData name="David Beckwitt" userId="bdca50846bee3b35" providerId="LiveId" clId="{77C57F99-3B40-463A-9855-34DA2A8048A2}" dt="2026-05-09T19:10:10.305" v="13" actId="14100"/>
           <ac:cxnSpMkLst>
@@ -176,21 +218,251 @@
           </ac:cxnSpMkLst>
         </pc:cxnChg>
         <pc:cxnChg chg="add mod">
-          <ac:chgData name="David Beckwitt" userId="bdca50846bee3b35" providerId="LiveId" clId="{77C57F99-3B40-463A-9855-34DA2A8048A2}" dt="2026-05-09T19:10:31.513" v="29" actId="14100"/>
+          <ac:chgData name="David Beckwitt" userId="bdca50846bee3b35" providerId="LiveId" clId="{77C57F99-3B40-463A-9855-34DA2A8048A2}" dt="2026-05-15T15:17:32.498" v="41" actId="1076"/>
           <ac:cxnSpMkLst>
             <pc:docMk/>
             <pc:sldMk cId="2316372449" sldId="256"/>
             <ac:cxnSpMk id="13" creationId="{64AA8985-AF08-05D6-F26F-9981B60D3DDE}"/>
           </ac:cxnSpMkLst>
         </pc:cxnChg>
-        <pc:cxnChg chg="del">
-          <ac:chgData name="David Beckwitt" userId="bdca50846bee3b35" providerId="LiveId" clId="{77C57F99-3B40-463A-9855-34DA2A8048A2}" dt="2026-05-09T19:09:45.770" v="2" actId="478"/>
+        <pc:cxnChg chg="mod">
+          <ac:chgData name="David Beckwitt" userId="bdca50846bee3b35" providerId="LiveId" clId="{77C57F99-3B40-463A-9855-34DA2A8048A2}" dt="2026-05-15T15:17:32.498" v="41" actId="1076"/>
           <ac:cxnSpMkLst>
             <pc:docMk/>
             <pc:sldMk cId="2316372449" sldId="256"/>
-            <ac:cxnSpMk id="40" creationId="{1C96D8C8-95B6-C790-6267-E8ACBC349C94}"/>
+            <ac:cxnSpMk id="47" creationId="{C3C29276-9F90-DB1E-78F6-E0BD2A605DF5}"/>
           </ac:cxnSpMkLst>
         </pc:cxnChg>
+        <pc:cxnChg chg="mod">
+          <ac:chgData name="David Beckwitt" userId="bdca50846bee3b35" providerId="LiveId" clId="{77C57F99-3B40-463A-9855-34DA2A8048A2}" dt="2026-05-15T15:17:32.498" v="41" actId="1076"/>
+          <ac:cxnSpMkLst>
+            <pc:docMk/>
+            <pc:sldMk cId="2316372449" sldId="256"/>
+            <ac:cxnSpMk id="74" creationId="{4B13C3A9-BC74-0F07-D1D8-32F93984EC56}"/>
+          </ac:cxnSpMkLst>
+        </pc:cxnChg>
+      </pc:sldChg>
+      <pc:sldChg chg="addSp delSp modSp new mod">
+        <pc:chgData name="David Beckwitt" userId="bdca50846bee3b35" providerId="LiveId" clId="{77C57F99-3B40-463A-9855-34DA2A8048A2}" dt="2026-05-15T15:26:18.941" v="175" actId="14100"/>
+        <pc:sldMkLst>
+          <pc:docMk/>
+          <pc:sldMk cId="1470611967" sldId="257"/>
+        </pc:sldMkLst>
+        <pc:spChg chg="del">
+          <ac:chgData name="David Beckwitt" userId="bdca50846bee3b35" providerId="LiveId" clId="{77C57F99-3B40-463A-9855-34DA2A8048A2}" dt="2026-05-15T15:17:41.726" v="46" actId="478"/>
+          <ac:spMkLst>
+            <pc:docMk/>
+            <pc:sldMk cId="1470611967" sldId="257"/>
+            <ac:spMk id="2" creationId="{AB614635-F92C-3965-CC0E-8BEFC64EB12A}"/>
+          </ac:spMkLst>
+        </pc:spChg>
+        <pc:spChg chg="del">
+          <ac:chgData name="David Beckwitt" userId="bdca50846bee3b35" providerId="LiveId" clId="{77C57F99-3B40-463A-9855-34DA2A8048A2}" dt="2026-05-15T15:17:41.726" v="46" actId="478"/>
+          <ac:spMkLst>
+            <pc:docMk/>
+            <pc:sldMk cId="1470611967" sldId="257"/>
+            <ac:spMk id="3" creationId="{FC69A770-ACCD-B975-BC72-BD514B097803}"/>
+          </ac:spMkLst>
+        </pc:spChg>
+        <pc:spChg chg="add mod ord">
+          <ac:chgData name="David Beckwitt" userId="bdca50846bee3b35" providerId="LiveId" clId="{77C57F99-3B40-463A-9855-34DA2A8048A2}" dt="2026-05-15T15:20:31.236" v="148" actId="164"/>
+          <ac:spMkLst>
+            <pc:docMk/>
+            <pc:sldMk cId="1470611967" sldId="257"/>
+            <ac:spMk id="8" creationId="{8D252627-EFFF-2191-2497-7F94E37DF607}"/>
+          </ac:spMkLst>
+        </pc:spChg>
+        <pc:spChg chg="add mod">
+          <ac:chgData name="David Beckwitt" userId="bdca50846bee3b35" providerId="LiveId" clId="{77C57F99-3B40-463A-9855-34DA2A8048A2}" dt="2026-05-15T15:21:00.082" v="152" actId="1076"/>
+          <ac:spMkLst>
+            <pc:docMk/>
+            <pc:sldMk cId="1470611967" sldId="257"/>
+            <ac:spMk id="9" creationId="{6EAE7541-62BB-C79F-C357-4E8276F636C0}"/>
+          </ac:spMkLst>
+        </pc:spChg>
+        <pc:spChg chg="add mod">
+          <ac:chgData name="David Beckwitt" userId="bdca50846bee3b35" providerId="LiveId" clId="{77C57F99-3B40-463A-9855-34DA2A8048A2}" dt="2026-05-15T15:26:16.729" v="174" actId="1076"/>
+          <ac:spMkLst>
+            <pc:docMk/>
+            <pc:sldMk cId="1470611967" sldId="257"/>
+            <ac:spMk id="21" creationId="{EFF3E8ED-2FD2-ED54-B1CD-DD81B1515211}"/>
+          </ac:spMkLst>
+        </pc:spChg>
+        <pc:grpChg chg="add mod">
+          <ac:chgData name="David Beckwitt" userId="bdca50846bee3b35" providerId="LiveId" clId="{77C57F99-3B40-463A-9855-34DA2A8048A2}" dt="2026-05-15T15:21:00.082" v="152" actId="1076"/>
+          <ac:grpSpMkLst>
+            <pc:docMk/>
+            <pc:sldMk cId="1470611967" sldId="257"/>
+            <ac:grpSpMk id="16" creationId="{E0C9380D-0E01-195E-9440-9F0DFCE6F64F}"/>
+          </ac:grpSpMkLst>
+        </pc:grpChg>
+        <pc:picChg chg="add mod">
+          <ac:chgData name="David Beckwitt" userId="bdca50846bee3b35" providerId="LiveId" clId="{77C57F99-3B40-463A-9855-34DA2A8048A2}" dt="2026-05-15T15:21:00.082" v="152" actId="1076"/>
+          <ac:picMkLst>
+            <pc:docMk/>
+            <pc:sldMk cId="1470611967" sldId="257"/>
+            <ac:picMk id="5" creationId="{649CBBC7-4B62-6664-7F06-CE2B66D6E535}"/>
+          </ac:picMkLst>
+        </pc:picChg>
+        <pc:picChg chg="add mod">
+          <ac:chgData name="David Beckwitt" userId="bdca50846bee3b35" providerId="LiveId" clId="{77C57F99-3B40-463A-9855-34DA2A8048A2}" dt="2026-05-15T15:20:31.236" v="148" actId="164"/>
+          <ac:picMkLst>
+            <pc:docMk/>
+            <pc:sldMk cId="1470611967" sldId="257"/>
+            <ac:picMk id="7" creationId="{858B602E-9B5F-403E-C961-E66D4BB1345B}"/>
+          </ac:picMkLst>
+        </pc:picChg>
+        <pc:cxnChg chg="add mod">
+          <ac:chgData name="David Beckwitt" userId="bdca50846bee3b35" providerId="LiveId" clId="{77C57F99-3B40-463A-9855-34DA2A8048A2}" dt="2026-05-15T15:21:00.082" v="152" actId="1076"/>
+          <ac:cxnSpMkLst>
+            <pc:docMk/>
+            <pc:sldMk cId="1470611967" sldId="257"/>
+            <ac:cxnSpMk id="11" creationId="{E5D9F8DF-2E37-9B67-FD38-BDA29FC2FA15}"/>
+          </ac:cxnSpMkLst>
+        </pc:cxnChg>
+        <pc:cxnChg chg="add mod">
+          <ac:chgData name="David Beckwitt" userId="bdca50846bee3b35" providerId="LiveId" clId="{77C57F99-3B40-463A-9855-34DA2A8048A2}" dt="2026-05-15T15:21:00.082" v="152" actId="1076"/>
+          <ac:cxnSpMkLst>
+            <pc:docMk/>
+            <pc:sldMk cId="1470611967" sldId="257"/>
+            <ac:cxnSpMk id="12" creationId="{6F209843-1515-0494-0185-FE63EAD07790}"/>
+          </ac:cxnSpMkLst>
+        </pc:cxnChg>
+        <pc:cxnChg chg="add mod">
+          <ac:chgData name="David Beckwitt" userId="bdca50846bee3b35" providerId="LiveId" clId="{77C57F99-3B40-463A-9855-34DA2A8048A2}" dt="2026-05-15T15:26:18.941" v="175" actId="14100"/>
+          <ac:cxnSpMkLst>
+            <pc:docMk/>
+            <pc:sldMk cId="1470611967" sldId="257"/>
+            <ac:cxnSpMk id="20" creationId="{843DBBF2-6050-6B72-040B-B4E9197DF06B}"/>
+          </ac:cxnSpMkLst>
+        </pc:cxnChg>
+      </pc:sldChg>
+      <pc:sldChg chg="addSp delSp modSp new mod">
+        <pc:chgData name="David Beckwitt" userId="bdca50846bee3b35" providerId="LiveId" clId="{77C57F99-3B40-463A-9855-34DA2A8048A2}" dt="2026-05-15T15:47:20.372" v="355" actId="1076"/>
+        <pc:sldMkLst>
+          <pc:docMk/>
+          <pc:sldMk cId="4122454811" sldId="258"/>
+        </pc:sldMkLst>
+        <pc:spChg chg="del">
+          <ac:chgData name="David Beckwitt" userId="bdca50846bee3b35" providerId="LiveId" clId="{77C57F99-3B40-463A-9855-34DA2A8048A2}" dt="2026-05-15T15:41:38.085" v="177" actId="478"/>
+          <ac:spMkLst>
+            <pc:docMk/>
+            <pc:sldMk cId="4122454811" sldId="258"/>
+            <ac:spMk id="2" creationId="{6BC4DB3B-175B-0963-9844-802CEB1FB15A}"/>
+          </ac:spMkLst>
+        </pc:spChg>
+        <pc:spChg chg="del">
+          <ac:chgData name="David Beckwitt" userId="bdca50846bee3b35" providerId="LiveId" clId="{77C57F99-3B40-463A-9855-34DA2A8048A2}" dt="2026-05-15T15:41:38.085" v="177" actId="478"/>
+          <ac:spMkLst>
+            <pc:docMk/>
+            <pc:sldMk cId="4122454811" sldId="258"/>
+            <ac:spMk id="3" creationId="{DBFCC3F5-3A89-80FB-A915-CDFE20C5DBB9}"/>
+          </ac:spMkLst>
+        </pc:spChg>
+        <pc:spChg chg="add mod">
+          <ac:chgData name="David Beckwitt" userId="bdca50846bee3b35" providerId="LiveId" clId="{77C57F99-3B40-463A-9855-34DA2A8048A2}" dt="2026-05-15T15:45:33.080" v="248" actId="20577"/>
+          <ac:spMkLst>
+            <pc:docMk/>
+            <pc:sldMk cId="4122454811" sldId="258"/>
+            <ac:spMk id="12" creationId="{10BBAC0C-2515-E1A2-15B6-A8D750FBA93E}"/>
+          </ac:spMkLst>
+        </pc:spChg>
+        <pc:spChg chg="add mod">
+          <ac:chgData name="David Beckwitt" userId="bdca50846bee3b35" providerId="LiveId" clId="{77C57F99-3B40-463A-9855-34DA2A8048A2}" dt="2026-05-15T15:45:40.642" v="253" actId="20577"/>
+          <ac:spMkLst>
+            <pc:docMk/>
+            <pc:sldMk cId="4122454811" sldId="258"/>
+            <ac:spMk id="13" creationId="{AC60D419-119A-74FF-CFE7-155DBA94AE96}"/>
+          </ac:spMkLst>
+        </pc:spChg>
+        <pc:spChg chg="add mod">
+          <ac:chgData name="David Beckwitt" userId="bdca50846bee3b35" providerId="LiveId" clId="{77C57F99-3B40-463A-9855-34DA2A8048A2}" dt="2026-05-15T15:45:45.516" v="258" actId="20577"/>
+          <ac:spMkLst>
+            <pc:docMk/>
+            <pc:sldMk cId="4122454811" sldId="258"/>
+            <ac:spMk id="14" creationId="{8B85F688-41B1-C91F-2241-15C2D25AE7D1}"/>
+          </ac:spMkLst>
+        </pc:spChg>
+        <pc:spChg chg="add mod">
+          <ac:chgData name="David Beckwitt" userId="bdca50846bee3b35" providerId="LiveId" clId="{77C57F99-3B40-463A-9855-34DA2A8048A2}" dt="2026-05-15T15:46:12.046" v="279" actId="1076"/>
+          <ac:spMkLst>
+            <pc:docMk/>
+            <pc:sldMk cId="4122454811" sldId="258"/>
+            <ac:spMk id="15" creationId="{56106F5D-3BBF-2E3A-66BF-7E315900FCB2}"/>
+          </ac:spMkLst>
+        </pc:spChg>
+        <pc:spChg chg="add mod">
+          <ac:chgData name="David Beckwitt" userId="bdca50846bee3b35" providerId="LiveId" clId="{77C57F99-3B40-463A-9855-34DA2A8048A2}" dt="2026-05-15T15:46:17.308" v="283" actId="20577"/>
+          <ac:spMkLst>
+            <pc:docMk/>
+            <pc:sldMk cId="4122454811" sldId="258"/>
+            <ac:spMk id="16" creationId="{413C3997-E886-F5DE-0CB7-11C8F52C7989}"/>
+          </ac:spMkLst>
+        </pc:spChg>
+        <pc:spChg chg="add mod">
+          <ac:chgData name="David Beckwitt" userId="bdca50846bee3b35" providerId="LiveId" clId="{77C57F99-3B40-463A-9855-34DA2A8048A2}" dt="2026-05-15T15:46:22.575" v="287" actId="20577"/>
+          <ac:spMkLst>
+            <pc:docMk/>
+            <pc:sldMk cId="4122454811" sldId="258"/>
+            <ac:spMk id="17" creationId="{1111174F-6AFB-1679-9190-B3B73D0B517C}"/>
+          </ac:spMkLst>
+        </pc:spChg>
+        <pc:spChg chg="add mod">
+          <ac:chgData name="David Beckwitt" userId="bdca50846bee3b35" providerId="LiveId" clId="{77C57F99-3B40-463A-9855-34DA2A8048A2}" dt="2026-05-15T15:46:47.791" v="322" actId="1076"/>
+          <ac:spMkLst>
+            <pc:docMk/>
+            <pc:sldMk cId="4122454811" sldId="258"/>
+            <ac:spMk id="18" creationId="{2641EE65-D261-4425-E893-18FDAE1BCD06}"/>
+          </ac:spMkLst>
+        </pc:spChg>
+        <pc:spChg chg="add del mod">
+          <ac:chgData name="David Beckwitt" userId="bdca50846bee3b35" providerId="LiveId" clId="{77C57F99-3B40-463A-9855-34DA2A8048A2}" dt="2026-05-15T15:46:56.624" v="336"/>
+          <ac:spMkLst>
+            <pc:docMk/>
+            <pc:sldMk cId="4122454811" sldId="258"/>
+            <ac:spMk id="19" creationId="{800ADFF3-BAFE-750F-15CB-958BB742F467}"/>
+          </ac:spMkLst>
+        </pc:spChg>
+        <pc:spChg chg="add mod">
+          <ac:chgData name="David Beckwitt" userId="bdca50846bee3b35" providerId="LiveId" clId="{77C57F99-3B40-463A-9855-34DA2A8048A2}" dt="2026-05-15T15:47:20.372" v="355" actId="1076"/>
+          <ac:spMkLst>
+            <pc:docMk/>
+            <pc:sldMk cId="4122454811" sldId="258"/>
+            <ac:spMk id="20" creationId="{28681DF7-8CAD-8125-257A-5D3A37E06F37}"/>
+          </ac:spMkLst>
+        </pc:spChg>
+        <pc:picChg chg="add mod modCrop">
+          <ac:chgData name="David Beckwitt" userId="bdca50846bee3b35" providerId="LiveId" clId="{77C57F99-3B40-463A-9855-34DA2A8048A2}" dt="2026-05-15T15:44:53.564" v="204" actId="732"/>
+          <ac:picMkLst>
+            <pc:docMk/>
+            <pc:sldMk cId="4122454811" sldId="258"/>
+            <ac:picMk id="5" creationId="{195A7A65-4328-F6EB-91E5-1708D8CB540F}"/>
+          </ac:picMkLst>
+        </pc:picChg>
+        <pc:picChg chg="add del mod">
+          <ac:chgData name="David Beckwitt" userId="bdca50846bee3b35" providerId="LiveId" clId="{77C57F99-3B40-463A-9855-34DA2A8048A2}" dt="2026-05-15T15:43:45.239" v="191" actId="478"/>
+          <ac:picMkLst>
+            <pc:docMk/>
+            <pc:sldMk cId="4122454811" sldId="258"/>
+            <ac:picMk id="7" creationId="{91B320CC-1837-A2BD-E42E-634D51D7056C}"/>
+          </ac:picMkLst>
+        </pc:picChg>
+        <pc:picChg chg="add del mod">
+          <ac:chgData name="David Beckwitt" userId="bdca50846bee3b35" providerId="LiveId" clId="{77C57F99-3B40-463A-9855-34DA2A8048A2}" dt="2026-05-15T15:44:05.075" v="197" actId="478"/>
+          <ac:picMkLst>
+            <pc:docMk/>
+            <pc:sldMk cId="4122454811" sldId="258"/>
+            <ac:picMk id="9" creationId="{9DDA8884-59C5-4EC3-93C6-6136E36A8B65}"/>
+          </ac:picMkLst>
+        </pc:picChg>
+        <pc:picChg chg="add mod">
+          <ac:chgData name="David Beckwitt" userId="bdca50846bee3b35" providerId="LiveId" clId="{77C57F99-3B40-463A-9855-34DA2A8048A2}" dt="2026-05-15T15:46:10.701" v="278" actId="1076"/>
+          <ac:picMkLst>
+            <pc:docMk/>
+            <pc:sldMk cId="4122454811" sldId="258"/>
+            <ac:picMk id="11" creationId="{AD8D15DD-01E6-5EEE-81DA-415EAB3C27B5}"/>
+          </ac:picMkLst>
+        </pc:picChg>
       </pc:sldChg>
     </pc:docChg>
   </pc:docChgLst>
@@ -344,7 +616,7 @@
           <a:p>
             <a:fld id="{D7BDDC53-94E9-4C2F-ADFC-AF3EDE6B1DDE}" type="datetimeFigureOut">
               <a:rPr lang="en-US" smtClean="0"/>
-              <a:t>5/9/2026</a:t>
+              <a:t>5/15/2026</a:t>
             </a:fld>
             <a:endParaRPr lang="en-US"/>
           </a:p>
@@ -542,7 +814,7 @@
           <a:p>
             <a:fld id="{D7BDDC53-94E9-4C2F-ADFC-AF3EDE6B1DDE}" type="datetimeFigureOut">
               <a:rPr lang="en-US" smtClean="0"/>
-              <a:t>5/9/2026</a:t>
+              <a:t>5/15/2026</a:t>
             </a:fld>
             <a:endParaRPr lang="en-US"/>
           </a:p>
@@ -750,7 +1022,7 @@
           <a:p>
             <a:fld id="{D7BDDC53-94E9-4C2F-ADFC-AF3EDE6B1DDE}" type="datetimeFigureOut">
               <a:rPr lang="en-US" smtClean="0"/>
-              <a:t>5/9/2026</a:t>
+              <a:t>5/15/2026</a:t>
             </a:fld>
             <a:endParaRPr lang="en-US"/>
           </a:p>
@@ -948,7 +1220,7 @@
           <a:p>
             <a:fld id="{D7BDDC53-94E9-4C2F-ADFC-AF3EDE6B1DDE}" type="datetimeFigureOut">
               <a:rPr lang="en-US" smtClean="0"/>
-              <a:t>5/9/2026</a:t>
+              <a:t>5/15/2026</a:t>
             </a:fld>
             <a:endParaRPr lang="en-US"/>
           </a:p>
@@ -1223,7 +1495,7 @@
           <a:p>
             <a:fld id="{D7BDDC53-94E9-4C2F-ADFC-AF3EDE6B1DDE}" type="datetimeFigureOut">
               <a:rPr lang="en-US" smtClean="0"/>
-              <a:t>5/9/2026</a:t>
+              <a:t>5/15/2026</a:t>
             </a:fld>
             <a:endParaRPr lang="en-US"/>
           </a:p>
@@ -1488,7 +1760,7 @@
           <a:p>
             <a:fld id="{D7BDDC53-94E9-4C2F-ADFC-AF3EDE6B1DDE}" type="datetimeFigureOut">
               <a:rPr lang="en-US" smtClean="0"/>
-              <a:t>5/9/2026</a:t>
+              <a:t>5/15/2026</a:t>
             </a:fld>
             <a:endParaRPr lang="en-US"/>
           </a:p>
@@ -1900,7 +2172,7 @@
           <a:p>
             <a:fld id="{D7BDDC53-94E9-4C2F-ADFC-AF3EDE6B1DDE}" type="datetimeFigureOut">
               <a:rPr lang="en-US" smtClean="0"/>
-              <a:t>5/9/2026</a:t>
+              <a:t>5/15/2026</a:t>
             </a:fld>
             <a:endParaRPr lang="en-US"/>
           </a:p>
@@ -2041,7 +2313,7 @@
           <a:p>
             <a:fld id="{D7BDDC53-94E9-4C2F-ADFC-AF3EDE6B1DDE}" type="datetimeFigureOut">
               <a:rPr lang="en-US" smtClean="0"/>
-              <a:t>5/9/2026</a:t>
+              <a:t>5/15/2026</a:t>
             </a:fld>
             <a:endParaRPr lang="en-US"/>
           </a:p>
@@ -2154,7 +2426,7 @@
           <a:p>
             <a:fld id="{D7BDDC53-94E9-4C2F-ADFC-AF3EDE6B1DDE}" type="datetimeFigureOut">
               <a:rPr lang="en-US" smtClean="0"/>
-              <a:t>5/9/2026</a:t>
+              <a:t>5/15/2026</a:t>
             </a:fld>
             <a:endParaRPr lang="en-US"/>
           </a:p>
@@ -2465,7 +2737,7 @@
           <a:p>
             <a:fld id="{D7BDDC53-94E9-4C2F-ADFC-AF3EDE6B1DDE}" type="datetimeFigureOut">
               <a:rPr lang="en-US" smtClean="0"/>
-              <a:t>5/9/2026</a:t>
+              <a:t>5/15/2026</a:t>
             </a:fld>
             <a:endParaRPr lang="en-US"/>
           </a:p>
@@ -2753,7 +3025,7 @@
           <a:p>
             <a:fld id="{D7BDDC53-94E9-4C2F-ADFC-AF3EDE6B1DDE}" type="datetimeFigureOut">
               <a:rPr lang="en-US" smtClean="0"/>
-              <a:t>5/9/2026</a:t>
+              <a:t>5/15/2026</a:t>
             </a:fld>
             <a:endParaRPr lang="en-US"/>
           </a:p>
@@ -2994,7 +3266,7 @@
           <a:p>
             <a:fld id="{D7BDDC53-94E9-4C2F-ADFC-AF3EDE6B1DDE}" type="datetimeFigureOut">
               <a:rPr lang="en-US" smtClean="0"/>
-              <a:t>5/9/2026</a:t>
+              <a:t>5/15/2026</a:t>
             </a:fld>
             <a:endParaRPr lang="en-US"/>
           </a:p>
@@ -3666,8 +3938,8 @@
           </a:p>
         </p:txBody>
       </p:sp>
-      <mc:AlternateContent xmlns:mc="http://schemas.openxmlformats.org/markup-compatibility/2006" xmlns:a14="http://schemas.microsoft.com/office/drawing/2010/main">
-        <mc:Choice Requires="a14">
+      <mc:AlternateContent xmlns:mc="http://schemas.openxmlformats.org/markup-compatibility/2006">
+        <mc:Choice xmlns:a14="http://schemas.microsoft.com/office/drawing/2010/main" Requires="a14">
           <p:sp>
             <p:nvSpPr>
               <p:cNvPr id="16" name="TextBox 15">
@@ -3762,7 +4034,7 @@
             </p:txBody>
           </p:sp>
         </mc:Choice>
-        <mc:Fallback xmlns="">
+        <mc:Fallback>
           <p:sp>
             <p:nvSpPr>
               <p:cNvPr id="16" name="TextBox 15">
@@ -3851,8 +4123,8 @@
           </a:fontRef>
         </p:style>
       </p:cxnSp>
-      <mc:AlternateContent xmlns:mc="http://schemas.openxmlformats.org/markup-compatibility/2006" xmlns:a14="http://schemas.microsoft.com/office/drawing/2010/main">
-        <mc:Choice Requires="a14">
+      <mc:AlternateContent xmlns:mc="http://schemas.openxmlformats.org/markup-compatibility/2006">
+        <mc:Choice xmlns:a14="http://schemas.microsoft.com/office/drawing/2010/main" Requires="a14">
           <p:sp>
             <p:nvSpPr>
               <p:cNvPr id="33" name="TextBox 32">
@@ -3908,7 +4180,7 @@
             </p:txBody>
           </p:sp>
         </mc:Choice>
-        <mc:Fallback xmlns="">
+        <mc:Fallback>
           <p:sp>
             <p:nvSpPr>
               <p:cNvPr id="33" name="TextBox 32">
@@ -4073,8 +4345,8 @@
           </a:fontRef>
         </p:style>
       </p:cxnSp>
-      <mc:AlternateContent xmlns:mc="http://schemas.openxmlformats.org/markup-compatibility/2006" xmlns:a14="http://schemas.microsoft.com/office/drawing/2010/main">
-        <mc:Choice Requires="a14">
+      <mc:AlternateContent xmlns:mc="http://schemas.openxmlformats.org/markup-compatibility/2006">
+        <mc:Choice xmlns:a14="http://schemas.microsoft.com/office/drawing/2010/main" Requires="a14">
           <p:sp>
             <p:nvSpPr>
               <p:cNvPr id="2" name="TextBox 1">
@@ -4130,7 +4402,7 @@
             </p:txBody>
           </p:sp>
         </mc:Choice>
-        <mc:Fallback xmlns="">
+        <mc:Fallback>
           <p:sp>
             <p:nvSpPr>
               <p:cNvPr id="2" name="TextBox 1">
@@ -4267,6 +4539,1115 @@
     <p:extLst>
       <p:ext uri="{BB962C8B-B14F-4D97-AF65-F5344CB8AC3E}">
         <p14:creationId xmlns:p14="http://schemas.microsoft.com/office/powerpoint/2010/main" val="2316372449"/>
+      </p:ext>
+    </p:extLst>
+  </p:cSld>
+  <p:clrMapOvr>
+    <a:masterClrMapping/>
+  </p:clrMapOvr>
+</p:sld>
+</file>
+
+<file path=ppt/slides/slide2.xml><?xml version="1.0" encoding="utf-8"?>
+<p:sld xmlns:a="http://schemas.openxmlformats.org/drawingml/2006/main" xmlns:r="http://schemas.openxmlformats.org/officeDocument/2006/relationships" xmlns:p="http://schemas.openxmlformats.org/presentationml/2006/main">
+  <p:cSld>
+    <p:spTree>
+      <p:nvGrpSpPr>
+        <p:cNvPr id="1" name=""/>
+        <p:cNvGrpSpPr/>
+        <p:nvPr/>
+      </p:nvGrpSpPr>
+      <p:grpSpPr>
+        <a:xfrm>
+          <a:off x="0" y="0"/>
+          <a:ext cx="0" cy="0"/>
+          <a:chOff x="0" y="0"/>
+          <a:chExt cx="0" cy="0"/>
+        </a:xfrm>
+      </p:grpSpPr>
+      <p:pic>
+        <p:nvPicPr>
+          <p:cNvPr id="5" name="Picture 4">
+            <a:extLst>
+              <a:ext uri="{FF2B5EF4-FFF2-40B4-BE49-F238E27FC236}">
+                <a16:creationId xmlns:a16="http://schemas.microsoft.com/office/drawing/2014/main" id="{649CBBC7-4B62-6664-7F06-CE2B66D6E535}"/>
+              </a:ext>
+            </a:extLst>
+          </p:cNvPr>
+          <p:cNvPicPr>
+            <a:picLocks noChangeAspect="1"/>
+          </p:cNvPicPr>
+          <p:nvPr/>
+        </p:nvPicPr>
+        <p:blipFill>
+          <a:blip r:embed="rId2">
+            <a:extLst>
+              <a:ext uri="{28A0092B-C50C-407E-A947-70E740481C1C}">
+                <a14:useLocalDpi xmlns:a14="http://schemas.microsoft.com/office/drawing/2010/main" val="0"/>
+              </a:ext>
+            </a:extLst>
+          </a:blip>
+          <a:stretch>
+            <a:fillRect/>
+          </a:stretch>
+        </p:blipFill>
+        <p:spPr>
+          <a:xfrm>
+            <a:off x="1386476" y="838524"/>
+            <a:ext cx="9419048" cy="5180952"/>
+          </a:xfrm>
+          <a:prstGeom prst="rect">
+            <a:avLst/>
+          </a:prstGeom>
+        </p:spPr>
+      </p:pic>
+      <p:grpSp>
+        <p:nvGrpSpPr>
+          <p:cNvPr id="16" name="Group 15">
+            <a:extLst>
+              <a:ext uri="{FF2B5EF4-FFF2-40B4-BE49-F238E27FC236}">
+                <a16:creationId xmlns:a16="http://schemas.microsoft.com/office/drawing/2014/main" id="{E0C9380D-0E01-195E-9440-9F0DFCE6F64F}"/>
+              </a:ext>
+            </a:extLst>
+          </p:cNvPr>
+          <p:cNvGrpSpPr/>
+          <p:nvPr/>
+        </p:nvGrpSpPr>
+        <p:grpSpPr>
+          <a:xfrm>
+            <a:off x="2661396" y="838524"/>
+            <a:ext cx="6869208" cy="2516684"/>
+            <a:chOff x="1197428" y="912316"/>
+            <a:chExt cx="6869208" cy="2516684"/>
+          </a:xfrm>
+        </p:grpSpPr>
+        <p:sp>
+          <p:nvSpPr>
+            <p:cNvPr id="8" name="Rectangle 7">
+              <a:extLst>
+                <a:ext uri="{FF2B5EF4-FFF2-40B4-BE49-F238E27FC236}">
+                  <a16:creationId xmlns:a16="http://schemas.microsoft.com/office/drawing/2014/main" id="{8D252627-EFFF-2191-2497-7F94E37DF607}"/>
+                </a:ext>
+              </a:extLst>
+            </p:cNvPr>
+            <p:cNvSpPr/>
+            <p:nvPr/>
+          </p:nvSpPr>
+          <p:spPr>
+            <a:xfrm>
+              <a:off x="1260928" y="1014958"/>
+              <a:ext cx="6742208" cy="2311400"/>
+            </a:xfrm>
+            <a:prstGeom prst="rect">
+              <a:avLst/>
+            </a:prstGeom>
+            <a:solidFill>
+              <a:schemeClr val="bg1"/>
+            </a:solidFill>
+            <a:ln>
+              <a:solidFill>
+                <a:schemeClr val="bg1"/>
+              </a:solidFill>
+            </a:ln>
+          </p:spPr>
+          <p:style>
+            <a:lnRef idx="2">
+              <a:schemeClr val="accent1">
+                <a:shade val="15000"/>
+              </a:schemeClr>
+            </a:lnRef>
+            <a:fillRef idx="1">
+              <a:schemeClr val="accent1"/>
+            </a:fillRef>
+            <a:effectRef idx="0">
+              <a:schemeClr val="accent1"/>
+            </a:effectRef>
+            <a:fontRef idx="minor">
+              <a:schemeClr val="lt1"/>
+            </a:fontRef>
+          </p:style>
+          <p:txBody>
+            <a:bodyPr rtlCol="0" anchor="ctr"/>
+            <a:lstStyle/>
+            <a:p>
+              <a:pPr algn="ctr"/>
+              <a:endParaRPr lang="en-US"/>
+            </a:p>
+          </p:txBody>
+        </p:sp>
+        <p:pic>
+          <p:nvPicPr>
+            <p:cNvPr id="7" name="Picture 6">
+              <a:extLst>
+                <a:ext uri="{FF2B5EF4-FFF2-40B4-BE49-F238E27FC236}">
+                  <a16:creationId xmlns:a16="http://schemas.microsoft.com/office/drawing/2014/main" id="{858B602E-9B5F-403E-C961-E66D4BB1345B}"/>
+                </a:ext>
+              </a:extLst>
+            </p:cNvPr>
+            <p:cNvPicPr>
+              <a:picLocks noChangeAspect="1"/>
+            </p:cNvPicPr>
+            <p:nvPr/>
+          </p:nvPicPr>
+          <p:blipFill>
+            <a:blip r:embed="rId3">
+              <a:extLst>
+                <a:ext uri="{28A0092B-C50C-407E-A947-70E740481C1C}">
+                  <a14:useLocalDpi xmlns:a14="http://schemas.microsoft.com/office/drawing/2010/main" val="0"/>
+                </a:ext>
+              </a:extLst>
+            </a:blip>
+            <a:stretch>
+              <a:fillRect/>
+            </a:stretch>
+          </p:blipFill>
+          <p:spPr>
+            <a:xfrm>
+              <a:off x="1197428" y="912316"/>
+              <a:ext cx="6869208" cy="2516684"/>
+            </a:xfrm>
+            <a:prstGeom prst="rect">
+              <a:avLst/>
+            </a:prstGeom>
+          </p:spPr>
+        </p:pic>
+      </p:grpSp>
+      <p:sp>
+        <p:nvSpPr>
+          <p:cNvPr id="9" name="Rectangle 8">
+            <a:extLst>
+              <a:ext uri="{FF2B5EF4-FFF2-40B4-BE49-F238E27FC236}">
+                <a16:creationId xmlns:a16="http://schemas.microsoft.com/office/drawing/2014/main" id="{6EAE7541-62BB-C79F-C357-4E8276F636C0}"/>
+              </a:ext>
+            </a:extLst>
+          </p:cNvPr>
+          <p:cNvSpPr/>
+          <p:nvPr/>
+        </p:nvSpPr>
+        <p:spPr>
+          <a:xfrm>
+            <a:off x="5920674" y="4761992"/>
+            <a:ext cx="594166" cy="1193790"/>
+          </a:xfrm>
+          <a:prstGeom prst="rect">
+            <a:avLst/>
+          </a:prstGeom>
+          <a:solidFill>
+            <a:srgbClr val="FFFF00">
+              <a:alpha val="6000"/>
+            </a:srgbClr>
+          </a:solidFill>
+          <a:ln w="38100">
+            <a:solidFill>
+              <a:schemeClr val="bg1"/>
+            </a:solidFill>
+          </a:ln>
+        </p:spPr>
+        <p:style>
+          <a:lnRef idx="2">
+            <a:schemeClr val="accent1">
+              <a:shade val="15000"/>
+            </a:schemeClr>
+          </a:lnRef>
+          <a:fillRef idx="1">
+            <a:schemeClr val="accent1"/>
+          </a:fillRef>
+          <a:effectRef idx="0">
+            <a:schemeClr val="accent1"/>
+          </a:effectRef>
+          <a:fontRef idx="minor">
+            <a:schemeClr val="lt1"/>
+          </a:fontRef>
+        </p:style>
+        <p:txBody>
+          <a:bodyPr rtlCol="0" anchor="ctr"/>
+          <a:lstStyle/>
+          <a:p>
+            <a:pPr algn="ctr"/>
+            <a:endParaRPr lang="en-US"/>
+          </a:p>
+        </p:txBody>
+      </p:sp>
+      <p:cxnSp>
+        <p:nvCxnSpPr>
+          <p:cNvPr id="11" name="Straight Connector 10">
+            <a:extLst>
+              <a:ext uri="{FF2B5EF4-FFF2-40B4-BE49-F238E27FC236}">
+                <a16:creationId xmlns:a16="http://schemas.microsoft.com/office/drawing/2014/main" id="{E5D9F8DF-2E37-9B67-FD38-BDA29FC2FA15}"/>
+              </a:ext>
+            </a:extLst>
+          </p:cNvPr>
+          <p:cNvCxnSpPr>
+            <a:cxnSpLocks/>
+            <a:stCxn id="9" idx="0"/>
+          </p:cNvCxnSpPr>
+          <p:nvPr/>
+        </p:nvCxnSpPr>
+        <p:spPr>
+          <a:xfrm flipH="1" flipV="1">
+            <a:off x="2724896" y="3252566"/>
+            <a:ext cx="3492861" cy="1509426"/>
+          </a:xfrm>
+          <a:prstGeom prst="line">
+            <a:avLst/>
+          </a:prstGeom>
+          <a:ln>
+            <a:solidFill>
+              <a:schemeClr val="bg1"/>
+            </a:solidFill>
+          </a:ln>
+        </p:spPr>
+        <p:style>
+          <a:lnRef idx="2">
+            <a:schemeClr val="accent1"/>
+          </a:lnRef>
+          <a:fillRef idx="0">
+            <a:schemeClr val="accent1"/>
+          </a:fillRef>
+          <a:effectRef idx="1">
+            <a:schemeClr val="accent1"/>
+          </a:effectRef>
+          <a:fontRef idx="minor">
+            <a:schemeClr val="tx1"/>
+          </a:fontRef>
+        </p:style>
+      </p:cxnSp>
+      <p:cxnSp>
+        <p:nvCxnSpPr>
+          <p:cNvPr id="12" name="Straight Connector 11">
+            <a:extLst>
+              <a:ext uri="{FF2B5EF4-FFF2-40B4-BE49-F238E27FC236}">
+                <a16:creationId xmlns:a16="http://schemas.microsoft.com/office/drawing/2014/main" id="{6F209843-1515-0494-0185-FE63EAD07790}"/>
+              </a:ext>
+            </a:extLst>
+          </p:cNvPr>
+          <p:cNvCxnSpPr>
+            <a:cxnSpLocks/>
+          </p:cNvCxnSpPr>
+          <p:nvPr/>
+        </p:nvCxnSpPr>
+        <p:spPr>
+          <a:xfrm flipV="1">
+            <a:off x="6217757" y="3263900"/>
+            <a:ext cx="3249347" cy="1498092"/>
+          </a:xfrm>
+          <a:prstGeom prst="line">
+            <a:avLst/>
+          </a:prstGeom>
+          <a:ln>
+            <a:solidFill>
+              <a:schemeClr val="bg1"/>
+            </a:solidFill>
+          </a:ln>
+        </p:spPr>
+        <p:style>
+          <a:lnRef idx="2">
+            <a:schemeClr val="accent1"/>
+          </a:lnRef>
+          <a:fillRef idx="0">
+            <a:schemeClr val="accent1"/>
+          </a:fillRef>
+          <a:effectRef idx="1">
+            <a:schemeClr val="accent1"/>
+          </a:effectRef>
+          <a:fontRef idx="minor">
+            <a:schemeClr val="tx1"/>
+          </a:fontRef>
+        </p:style>
+      </p:cxnSp>
+      <p:cxnSp>
+        <p:nvCxnSpPr>
+          <p:cNvPr id="20" name="Straight Arrow Connector 19">
+            <a:extLst>
+              <a:ext uri="{FF2B5EF4-FFF2-40B4-BE49-F238E27FC236}">
+                <a16:creationId xmlns:a16="http://schemas.microsoft.com/office/drawing/2014/main" id="{843DBBF2-6050-6B72-040B-B4E9197DF06B}"/>
+              </a:ext>
+            </a:extLst>
+          </p:cNvPr>
+          <p:cNvCxnSpPr>
+            <a:cxnSpLocks/>
+          </p:cNvCxnSpPr>
+          <p:nvPr/>
+        </p:nvCxnSpPr>
+        <p:spPr>
+          <a:xfrm>
+            <a:off x="3904343" y="5504571"/>
+            <a:ext cx="2016331" cy="483058"/>
+          </a:xfrm>
+          <a:prstGeom prst="straightConnector1">
+            <a:avLst/>
+          </a:prstGeom>
+          <a:ln w="38100">
+            <a:solidFill>
+              <a:schemeClr val="bg1"/>
+            </a:solidFill>
+            <a:tailEnd type="triangle"/>
+          </a:ln>
+        </p:spPr>
+        <p:style>
+          <a:lnRef idx="2">
+            <a:schemeClr val="accent1"/>
+          </a:lnRef>
+          <a:fillRef idx="0">
+            <a:schemeClr val="accent1"/>
+          </a:fillRef>
+          <a:effectRef idx="1">
+            <a:schemeClr val="accent1"/>
+          </a:effectRef>
+          <a:fontRef idx="minor">
+            <a:schemeClr val="tx1"/>
+          </a:fontRef>
+        </p:style>
+      </p:cxnSp>
+      <p:sp>
+        <p:nvSpPr>
+          <p:cNvPr id="21" name="TextBox 20">
+            <a:extLst>
+              <a:ext uri="{FF2B5EF4-FFF2-40B4-BE49-F238E27FC236}">
+                <a16:creationId xmlns:a16="http://schemas.microsoft.com/office/drawing/2014/main" id="{EFF3E8ED-2FD2-ED54-B1CD-DD81B1515211}"/>
+              </a:ext>
+            </a:extLst>
+          </p:cNvPr>
+          <p:cNvSpPr txBox="1"/>
+          <p:nvPr/>
+        </p:nvSpPr>
+        <p:spPr>
+          <a:xfrm>
+            <a:off x="2619695" y="5135239"/>
+            <a:ext cx="1494768" cy="369332"/>
+          </a:xfrm>
+          <a:prstGeom prst="rect">
+            <a:avLst/>
+          </a:prstGeom>
+          <a:noFill/>
+        </p:spPr>
+        <p:txBody>
+          <a:bodyPr wrap="none" rtlCol="0">
+            <a:spAutoFit/>
+          </a:bodyPr>
+          <a:lstStyle/>
+          <a:p>
+            <a:r>
+              <a:rPr lang="en-US" dirty="0">
+                <a:solidFill>
+                  <a:schemeClr val="bg1"/>
+                </a:solidFill>
+              </a:rPr>
+              <a:t>Beam Center</a:t>
+            </a:r>
+          </a:p>
+        </p:txBody>
+      </p:sp>
+    </p:spTree>
+    <p:extLst>
+      <p:ext uri="{BB962C8B-B14F-4D97-AF65-F5344CB8AC3E}">
+        <p14:creationId xmlns:p14="http://schemas.microsoft.com/office/powerpoint/2010/main" val="1470611967"/>
+      </p:ext>
+    </p:extLst>
+  </p:cSld>
+  <p:clrMapOvr>
+    <a:masterClrMapping/>
+  </p:clrMapOvr>
+</p:sld>
+</file>
+
+<file path=ppt/slides/slide3.xml><?xml version="1.0" encoding="utf-8"?>
+<p:sld xmlns:a="http://schemas.openxmlformats.org/drawingml/2006/main" xmlns:r="http://schemas.openxmlformats.org/officeDocument/2006/relationships" xmlns:p="http://schemas.openxmlformats.org/presentationml/2006/main">
+  <p:cSld>
+    <p:spTree>
+      <p:nvGrpSpPr>
+        <p:cNvPr id="1" name=""/>
+        <p:cNvGrpSpPr/>
+        <p:nvPr/>
+      </p:nvGrpSpPr>
+      <p:grpSpPr>
+        <a:xfrm>
+          <a:off x="0" y="0"/>
+          <a:ext cx="0" cy="0"/>
+          <a:chOff x="0" y="0"/>
+          <a:chExt cx="0" cy="0"/>
+        </a:xfrm>
+      </p:grpSpPr>
+      <p:pic>
+        <p:nvPicPr>
+          <p:cNvPr id="5" name="Picture 4">
+            <a:extLst>
+              <a:ext uri="{FF2B5EF4-FFF2-40B4-BE49-F238E27FC236}">
+                <a16:creationId xmlns:a16="http://schemas.microsoft.com/office/drawing/2014/main" id="{195A7A65-4328-F6EB-91E5-1708D8CB540F}"/>
+              </a:ext>
+            </a:extLst>
+          </p:cNvPr>
+          <p:cNvPicPr>
+            <a:picLocks noChangeAspect="1"/>
+          </p:cNvPicPr>
+          <p:nvPr/>
+        </p:nvPicPr>
+        <p:blipFill>
+          <a:blip r:embed="rId2">
+            <a:extLst>
+              <a:ext uri="{28A0092B-C50C-407E-A947-70E740481C1C}">
+                <a14:useLocalDpi xmlns:a14="http://schemas.microsoft.com/office/drawing/2010/main" val="0"/>
+              </a:ext>
+            </a:extLst>
+          </a:blip>
+          <a:srcRect l="4233" t="5630"/>
+          <a:stretch>
+            <a:fillRect/>
+          </a:stretch>
+        </p:blipFill>
+        <p:spPr>
+          <a:xfrm>
+            <a:off x="3286125" y="704850"/>
+            <a:ext cx="5879646" cy="5793921"/>
+          </a:xfrm>
+          <a:prstGeom prst="rect">
+            <a:avLst/>
+          </a:prstGeom>
+        </p:spPr>
+      </p:pic>
+      <p:pic>
+        <p:nvPicPr>
+          <p:cNvPr id="11" name="Picture 10">
+            <a:extLst>
+              <a:ext uri="{FF2B5EF4-FFF2-40B4-BE49-F238E27FC236}">
+                <a16:creationId xmlns:a16="http://schemas.microsoft.com/office/drawing/2014/main" id="{AD8D15DD-01E6-5EEE-81DA-415EAB3C27B5}"/>
+              </a:ext>
+            </a:extLst>
+          </p:cNvPr>
+          <p:cNvPicPr>
+            <a:picLocks noChangeAspect="1"/>
+          </p:cNvPicPr>
+          <p:nvPr/>
+        </p:nvPicPr>
+        <p:blipFill>
+          <a:blip r:embed="rId3"/>
+          <a:stretch>
+            <a:fillRect/>
+          </a:stretch>
+        </p:blipFill>
+        <p:spPr>
+          <a:xfrm>
+            <a:off x="3733460" y="811239"/>
+            <a:ext cx="1912960" cy="1629005"/>
+          </a:xfrm>
+          <a:prstGeom prst="rect">
+            <a:avLst/>
+          </a:prstGeom>
+        </p:spPr>
+      </p:pic>
+      <mc:AlternateContent xmlns:mc="http://schemas.openxmlformats.org/markup-compatibility/2006">
+        <mc:Choice xmlns:a14="http://schemas.microsoft.com/office/drawing/2010/main" Requires="a14">
+          <p:sp>
+            <p:nvSpPr>
+              <p:cNvPr id="12" name="TextBox 11">
+                <a:extLst>
+                  <a:ext uri="{FF2B5EF4-FFF2-40B4-BE49-F238E27FC236}">
+                    <a16:creationId xmlns:a16="http://schemas.microsoft.com/office/drawing/2014/main" id="{10BBAC0C-2515-E1A2-15B6-A8D750FBA93E}"/>
+                  </a:ext>
+                </a:extLst>
+              </p:cNvPr>
+              <p:cNvSpPr txBox="1"/>
+              <p:nvPr/>
+            </p:nvSpPr>
+            <p:spPr>
+              <a:xfrm>
+                <a:off x="4105275" y="600075"/>
+                <a:ext cx="444289" cy="369332"/>
+              </a:xfrm>
+              <a:prstGeom prst="rect">
+                <a:avLst/>
+              </a:prstGeom>
+              <a:noFill/>
+            </p:spPr>
+            <p:txBody>
+              <a:bodyPr wrap="none" rtlCol="0">
+                <a:spAutoFit/>
+              </a:bodyPr>
+              <a:lstStyle/>
+              <a:p>
+                <a14:m>
+                  <m:oMathPara xmlns:m="http://schemas.openxmlformats.org/officeDocument/2006/math">
+                    <m:oMathParaPr>
+                      <m:jc m:val="centerGroup"/>
+                    </m:oMathParaPr>
+                    <m:oMath xmlns:m="http://schemas.openxmlformats.org/officeDocument/2006/math">
+                      <m:sSup>
+                        <m:sSupPr>
+                          <m:ctrlPr>
+                            <a:rPr lang="en-US" b="0" i="1" smtClean="0">
+                              <a:latin typeface="Cambria Math" panose="02040503050406030204" pitchFamily="18" charset="0"/>
+                            </a:rPr>
+                          </m:ctrlPr>
+                        </m:sSupPr>
+                        <m:e>
+                          <m:r>
+                            <a:rPr lang="en-US" b="0" i="1" smtClean="0">
+                              <a:latin typeface="Cambria Math" panose="02040503050406030204" pitchFamily="18" charset="0"/>
+                            </a:rPr>
+                            <m:t>5</m:t>
+                          </m:r>
+                        </m:e>
+                        <m:sup>
+                          <m:r>
+                            <a:rPr lang="en-US" b="0" i="1" smtClean="0">
+                              <a:latin typeface="Cambria Math" panose="02040503050406030204" pitchFamily="18" charset="0"/>
+                            </a:rPr>
+                            <m:t>∘</m:t>
+                          </m:r>
+                        </m:sup>
+                      </m:sSup>
+                    </m:oMath>
+                  </m:oMathPara>
+                </a14:m>
+                <a:endParaRPr lang="en-US" dirty="0"/>
+              </a:p>
+            </p:txBody>
+          </p:sp>
+        </mc:Choice>
+        <mc:Fallback>
+          <p:sp>
+            <p:nvSpPr>
+              <p:cNvPr id="12" name="TextBox 11">
+                <a:extLst>
+                  <a:ext uri="{FF2B5EF4-FFF2-40B4-BE49-F238E27FC236}">
+                    <a16:creationId xmlns:a16="http://schemas.microsoft.com/office/drawing/2014/main" id="{10BBAC0C-2515-E1A2-15B6-A8D750FBA93E}"/>
+                  </a:ext>
+                </a:extLst>
+              </p:cNvPr>
+              <p:cNvSpPr txBox="1">
+                <a:spLocks noRot="1" noChangeAspect="1" noMove="1" noResize="1" noEditPoints="1" noAdjustHandles="1" noChangeArrowheads="1" noChangeShapeType="1" noTextEdit="1"/>
+              </p:cNvSpPr>
+              <p:nvPr/>
+            </p:nvSpPr>
+            <p:spPr>
+              <a:xfrm>
+                <a:off x="4105275" y="600075"/>
+                <a:ext cx="444289" cy="369332"/>
+              </a:xfrm>
+              <a:prstGeom prst="rect">
+                <a:avLst/>
+              </a:prstGeom>
+              <a:blipFill>
+                <a:blip r:embed="rId4"/>
+                <a:stretch>
+                  <a:fillRect/>
+                </a:stretch>
+              </a:blipFill>
+            </p:spPr>
+            <p:txBody>
+              <a:bodyPr/>
+              <a:lstStyle/>
+              <a:p>
+                <a:r>
+                  <a:rPr lang="en-US">
+                    <a:noFill/>
+                  </a:rPr>
+                  <a:t> </a:t>
+                </a:r>
+              </a:p>
+            </p:txBody>
+          </p:sp>
+        </mc:Fallback>
+      </mc:AlternateContent>
+      <mc:AlternateContent xmlns:mc="http://schemas.openxmlformats.org/markup-compatibility/2006">
+        <mc:Choice xmlns:a14="http://schemas.microsoft.com/office/drawing/2010/main" Requires="a14">
+          <p:sp>
+            <p:nvSpPr>
+              <p:cNvPr id="13" name="TextBox 12">
+                <a:extLst>
+                  <a:ext uri="{FF2B5EF4-FFF2-40B4-BE49-F238E27FC236}">
+                    <a16:creationId xmlns:a16="http://schemas.microsoft.com/office/drawing/2014/main" id="{AC60D419-119A-74FF-CFE7-155DBA94AE96}"/>
+                  </a:ext>
+                </a:extLst>
+              </p:cNvPr>
+              <p:cNvSpPr txBox="1"/>
+              <p:nvPr/>
+            </p:nvSpPr>
+            <p:spPr>
+              <a:xfrm>
+                <a:off x="5871610" y="520184"/>
+                <a:ext cx="572529" cy="369332"/>
+              </a:xfrm>
+              <a:prstGeom prst="rect">
+                <a:avLst/>
+              </a:prstGeom>
+              <a:noFill/>
+            </p:spPr>
+            <p:txBody>
+              <a:bodyPr wrap="none" rtlCol="0">
+                <a:spAutoFit/>
+              </a:bodyPr>
+              <a:lstStyle/>
+              <a:p>
+                <a14:m>
+                  <m:oMathPara xmlns:m="http://schemas.openxmlformats.org/officeDocument/2006/math">
+                    <m:oMathParaPr>
+                      <m:jc m:val="centerGroup"/>
+                    </m:oMathParaPr>
+                    <m:oMath xmlns:m="http://schemas.openxmlformats.org/officeDocument/2006/math">
+                      <m:sSup>
+                        <m:sSupPr>
+                          <m:ctrlPr>
+                            <a:rPr lang="en-US" b="0" i="1" smtClean="0">
+                              <a:latin typeface="Cambria Math" panose="02040503050406030204" pitchFamily="18" charset="0"/>
+                            </a:rPr>
+                          </m:ctrlPr>
+                        </m:sSupPr>
+                        <m:e>
+                          <m:r>
+                            <a:rPr lang="en-US" b="0" i="1" smtClean="0">
+                              <a:latin typeface="Cambria Math" panose="02040503050406030204" pitchFamily="18" charset="0"/>
+                            </a:rPr>
+                            <m:t>10</m:t>
+                          </m:r>
+                        </m:e>
+                        <m:sup>
+                          <m:r>
+                            <a:rPr lang="en-US" b="0" i="1" smtClean="0">
+                              <a:latin typeface="Cambria Math" panose="02040503050406030204" pitchFamily="18" charset="0"/>
+                            </a:rPr>
+                            <m:t>∘</m:t>
+                          </m:r>
+                        </m:sup>
+                      </m:sSup>
+                    </m:oMath>
+                  </m:oMathPara>
+                </a14:m>
+                <a:endParaRPr lang="en-US" dirty="0"/>
+              </a:p>
+            </p:txBody>
+          </p:sp>
+        </mc:Choice>
+        <mc:Fallback>
+          <p:sp>
+            <p:nvSpPr>
+              <p:cNvPr id="13" name="TextBox 12">
+                <a:extLst>
+                  <a:ext uri="{FF2B5EF4-FFF2-40B4-BE49-F238E27FC236}">
+                    <a16:creationId xmlns:a16="http://schemas.microsoft.com/office/drawing/2014/main" id="{AC60D419-119A-74FF-CFE7-155DBA94AE96}"/>
+                  </a:ext>
+                </a:extLst>
+              </p:cNvPr>
+              <p:cNvSpPr txBox="1">
+                <a:spLocks noRot="1" noChangeAspect="1" noMove="1" noResize="1" noEditPoints="1" noAdjustHandles="1" noChangeArrowheads="1" noChangeShapeType="1" noTextEdit="1"/>
+              </p:cNvSpPr>
+              <p:nvPr/>
+            </p:nvSpPr>
+            <p:spPr>
+              <a:xfrm>
+                <a:off x="5871610" y="520184"/>
+                <a:ext cx="572529" cy="369332"/>
+              </a:xfrm>
+              <a:prstGeom prst="rect">
+                <a:avLst/>
+              </a:prstGeom>
+              <a:blipFill>
+                <a:blip r:embed="rId5"/>
+                <a:stretch>
+                  <a:fillRect/>
+                </a:stretch>
+              </a:blipFill>
+            </p:spPr>
+            <p:txBody>
+              <a:bodyPr/>
+              <a:lstStyle/>
+              <a:p>
+                <a:r>
+                  <a:rPr lang="en-US">
+                    <a:noFill/>
+                  </a:rPr>
+                  <a:t> </a:t>
+                </a:r>
+              </a:p>
+            </p:txBody>
+          </p:sp>
+        </mc:Fallback>
+      </mc:AlternateContent>
+      <mc:AlternateContent xmlns:mc="http://schemas.openxmlformats.org/markup-compatibility/2006">
+        <mc:Choice xmlns:a14="http://schemas.microsoft.com/office/drawing/2010/main" Requires="a14">
+          <p:sp>
+            <p:nvSpPr>
+              <p:cNvPr id="14" name="TextBox 13">
+                <a:extLst>
+                  <a:ext uri="{FF2B5EF4-FFF2-40B4-BE49-F238E27FC236}">
+                    <a16:creationId xmlns:a16="http://schemas.microsoft.com/office/drawing/2014/main" id="{8B85F688-41B1-C91F-2241-15C2D25AE7D1}"/>
+                  </a:ext>
+                </a:extLst>
+              </p:cNvPr>
+              <p:cNvSpPr txBox="1"/>
+              <p:nvPr/>
+            </p:nvSpPr>
+            <p:spPr>
+              <a:xfrm>
+                <a:off x="7579424" y="520184"/>
+                <a:ext cx="572529" cy="369332"/>
+              </a:xfrm>
+              <a:prstGeom prst="rect">
+                <a:avLst/>
+              </a:prstGeom>
+              <a:noFill/>
+            </p:spPr>
+            <p:txBody>
+              <a:bodyPr wrap="none" rtlCol="0">
+                <a:spAutoFit/>
+              </a:bodyPr>
+              <a:lstStyle/>
+              <a:p>
+                <a14:m>
+                  <m:oMathPara xmlns:m="http://schemas.openxmlformats.org/officeDocument/2006/math">
+                    <m:oMathParaPr>
+                      <m:jc m:val="centerGroup"/>
+                    </m:oMathParaPr>
+                    <m:oMath xmlns:m="http://schemas.openxmlformats.org/officeDocument/2006/math">
+                      <m:sSup>
+                        <m:sSupPr>
+                          <m:ctrlPr>
+                            <a:rPr lang="en-US" b="0" i="1" smtClean="0">
+                              <a:latin typeface="Cambria Math" panose="02040503050406030204" pitchFamily="18" charset="0"/>
+                            </a:rPr>
+                          </m:ctrlPr>
+                        </m:sSupPr>
+                        <m:e>
+                          <m:r>
+                            <a:rPr lang="en-US" b="0" i="1" smtClean="0">
+                              <a:latin typeface="Cambria Math" panose="02040503050406030204" pitchFamily="18" charset="0"/>
+                            </a:rPr>
+                            <m:t>15</m:t>
+                          </m:r>
+                        </m:e>
+                        <m:sup>
+                          <m:r>
+                            <a:rPr lang="en-US" b="0" i="1" smtClean="0">
+                              <a:latin typeface="Cambria Math" panose="02040503050406030204" pitchFamily="18" charset="0"/>
+                            </a:rPr>
+                            <m:t>∘</m:t>
+                          </m:r>
+                        </m:sup>
+                      </m:sSup>
+                    </m:oMath>
+                  </m:oMathPara>
+                </a14:m>
+                <a:endParaRPr lang="en-US" dirty="0"/>
+              </a:p>
+            </p:txBody>
+          </p:sp>
+        </mc:Choice>
+        <mc:Fallback>
+          <p:sp>
+            <p:nvSpPr>
+              <p:cNvPr id="14" name="TextBox 13">
+                <a:extLst>
+                  <a:ext uri="{FF2B5EF4-FFF2-40B4-BE49-F238E27FC236}">
+                    <a16:creationId xmlns:a16="http://schemas.microsoft.com/office/drawing/2014/main" id="{8B85F688-41B1-C91F-2241-15C2D25AE7D1}"/>
+                  </a:ext>
+                </a:extLst>
+              </p:cNvPr>
+              <p:cNvSpPr txBox="1">
+                <a:spLocks noRot="1" noChangeAspect="1" noMove="1" noResize="1" noEditPoints="1" noAdjustHandles="1" noChangeArrowheads="1" noChangeShapeType="1" noTextEdit="1"/>
+              </p:cNvSpPr>
+              <p:nvPr/>
+            </p:nvSpPr>
+            <p:spPr>
+              <a:xfrm>
+                <a:off x="7579424" y="520184"/>
+                <a:ext cx="572529" cy="369332"/>
+              </a:xfrm>
+              <a:prstGeom prst="rect">
+                <a:avLst/>
+              </a:prstGeom>
+              <a:blipFill>
+                <a:blip r:embed="rId6"/>
+                <a:stretch>
+                  <a:fillRect/>
+                </a:stretch>
+              </a:blipFill>
+            </p:spPr>
+            <p:txBody>
+              <a:bodyPr/>
+              <a:lstStyle/>
+              <a:p>
+                <a:r>
+                  <a:rPr lang="en-US">
+                    <a:noFill/>
+                  </a:rPr>
+                  <a:t> </a:t>
+                </a:r>
+              </a:p>
+            </p:txBody>
+          </p:sp>
+        </mc:Fallback>
+      </mc:AlternateContent>
+      <p:sp>
+        <p:nvSpPr>
+          <p:cNvPr id="15" name="TextBox 14">
+            <a:extLst>
+              <a:ext uri="{FF2B5EF4-FFF2-40B4-BE49-F238E27FC236}">
+                <a16:creationId xmlns:a16="http://schemas.microsoft.com/office/drawing/2014/main" id="{56106F5D-3BBF-2E3A-66BF-7E315900FCB2}"/>
+              </a:ext>
+            </a:extLst>
+          </p:cNvPr>
+          <p:cNvSpPr txBox="1"/>
+          <p:nvPr/>
+        </p:nvSpPr>
+        <p:spPr>
+          <a:xfrm>
+            <a:off x="3186515" y="1625741"/>
+            <a:ext cx="546945" cy="369332"/>
+          </a:xfrm>
+          <a:prstGeom prst="rect">
+            <a:avLst/>
+          </a:prstGeom>
+          <a:noFill/>
+        </p:spPr>
+        <p:txBody>
+          <a:bodyPr wrap="none" rtlCol="0">
+            <a:spAutoFit/>
+          </a:bodyPr>
+          <a:lstStyle/>
+          <a:p>
+            <a:r>
+              <a:rPr lang="en-US" dirty="0"/>
+              <a:t>L=3</a:t>
+            </a:r>
+          </a:p>
+        </p:txBody>
+      </p:sp>
+      <p:sp>
+        <p:nvSpPr>
+          <p:cNvPr id="16" name="TextBox 15">
+            <a:extLst>
+              <a:ext uri="{FF2B5EF4-FFF2-40B4-BE49-F238E27FC236}">
+                <a16:creationId xmlns:a16="http://schemas.microsoft.com/office/drawing/2014/main" id="{413C3997-E886-F5DE-0CB7-11C8F52C7989}"/>
+              </a:ext>
+            </a:extLst>
+          </p:cNvPr>
+          <p:cNvSpPr txBox="1"/>
+          <p:nvPr/>
+        </p:nvSpPr>
+        <p:spPr>
+          <a:xfrm>
+            <a:off x="3160352" y="3349766"/>
+            <a:ext cx="546945" cy="369332"/>
+          </a:xfrm>
+          <a:prstGeom prst="rect">
+            <a:avLst/>
+          </a:prstGeom>
+          <a:noFill/>
+        </p:spPr>
+        <p:txBody>
+          <a:bodyPr wrap="none" rtlCol="0">
+            <a:spAutoFit/>
+          </a:bodyPr>
+          <a:lstStyle/>
+          <a:p>
+            <a:r>
+              <a:rPr lang="en-US" dirty="0"/>
+              <a:t>L=6</a:t>
+            </a:r>
+          </a:p>
+        </p:txBody>
+      </p:sp>
+      <p:sp>
+        <p:nvSpPr>
+          <p:cNvPr id="17" name="TextBox 16">
+            <a:extLst>
+              <a:ext uri="{FF2B5EF4-FFF2-40B4-BE49-F238E27FC236}">
+                <a16:creationId xmlns:a16="http://schemas.microsoft.com/office/drawing/2014/main" id="{1111174F-6AFB-1679-9190-B3B73D0B517C}"/>
+              </a:ext>
+            </a:extLst>
+          </p:cNvPr>
+          <p:cNvSpPr txBox="1"/>
+          <p:nvPr/>
+        </p:nvSpPr>
+        <p:spPr>
+          <a:xfrm>
+            <a:off x="3140962" y="5350016"/>
+            <a:ext cx="546945" cy="369332"/>
+          </a:xfrm>
+          <a:prstGeom prst="rect">
+            <a:avLst/>
+          </a:prstGeom>
+          <a:noFill/>
+        </p:spPr>
+        <p:txBody>
+          <a:bodyPr wrap="none" rtlCol="0">
+            <a:spAutoFit/>
+          </a:bodyPr>
+          <a:lstStyle/>
+          <a:p>
+            <a:r>
+              <a:rPr lang="en-US" dirty="0"/>
+              <a:t>L=9</a:t>
+            </a:r>
+          </a:p>
+        </p:txBody>
+      </p:sp>
+      <mc:AlternateContent xmlns:mc="http://schemas.openxmlformats.org/markup-compatibility/2006">
+        <mc:Choice xmlns:a14="http://schemas.microsoft.com/office/drawing/2010/main" Requires="a14">
+          <p:sp>
+            <p:nvSpPr>
+              <p:cNvPr id="18" name="TextBox 17">
+                <a:extLst>
+                  <a:ext uri="{FF2B5EF4-FFF2-40B4-BE49-F238E27FC236}">
+                    <a16:creationId xmlns:a16="http://schemas.microsoft.com/office/drawing/2014/main" id="{2641EE65-D261-4425-E893-18FDAE1BCD06}"/>
+                  </a:ext>
+                </a:extLst>
+              </p:cNvPr>
+              <p:cNvSpPr txBox="1"/>
+              <p:nvPr/>
+            </p:nvSpPr>
+            <p:spPr>
+              <a:xfrm>
+                <a:off x="4900719" y="204047"/>
+                <a:ext cx="2505429" cy="369332"/>
+              </a:xfrm>
+              <a:prstGeom prst="rect">
+                <a:avLst/>
+              </a:prstGeom>
+              <a:noFill/>
+            </p:spPr>
+            <p:txBody>
+              <a:bodyPr wrap="none" rtlCol="0">
+                <a:spAutoFit/>
+              </a:bodyPr>
+              <a:lstStyle/>
+              <a:p>
+                <a:r>
+                  <a:rPr lang="en-US" dirty="0"/>
+                  <a:t>Angle of Incidence </a:t>
+                </a:r>
+                <a14:m>
+                  <m:oMath xmlns:m="http://schemas.openxmlformats.org/officeDocument/2006/math">
+                    <m:d>
+                      <m:dPr>
+                        <m:ctrlPr>
+                          <a:rPr lang="en-US" b="0" i="1" smtClean="0">
+                            <a:latin typeface="Cambria Math" panose="02040503050406030204" pitchFamily="18" charset="0"/>
+                          </a:rPr>
+                        </m:ctrlPr>
+                      </m:dPr>
+                      <m:e>
+                        <m:sSub>
+                          <m:sSubPr>
+                            <m:ctrlPr>
+                              <a:rPr lang="en-US" b="0" i="1" smtClean="0">
+                                <a:latin typeface="Cambria Math" panose="02040503050406030204" pitchFamily="18" charset="0"/>
+                              </a:rPr>
+                            </m:ctrlPr>
+                          </m:sSubPr>
+                          <m:e>
+                            <m:r>
+                              <a:rPr lang="en-US" b="0" i="1" smtClean="0">
+                                <a:latin typeface="Cambria Math" panose="02040503050406030204" pitchFamily="18" charset="0"/>
+                              </a:rPr>
+                              <m:t>𝜃</m:t>
+                            </m:r>
+                          </m:e>
+                          <m:sub>
+                            <m:r>
+                              <a:rPr lang="en-US" b="0" i="1" smtClean="0">
+                                <a:latin typeface="Cambria Math" panose="02040503050406030204" pitchFamily="18" charset="0"/>
+                              </a:rPr>
+                              <m:t>𝑖</m:t>
+                            </m:r>
+                          </m:sub>
+                        </m:sSub>
+                      </m:e>
+                    </m:d>
+                  </m:oMath>
+                </a14:m>
+                <a:r>
+                  <a:rPr lang="en-US" dirty="0"/>
+                  <a:t> </a:t>
+                </a:r>
+              </a:p>
+            </p:txBody>
+          </p:sp>
+        </mc:Choice>
+        <mc:Fallback>
+          <p:sp>
+            <p:nvSpPr>
+              <p:cNvPr id="18" name="TextBox 17">
+                <a:extLst>
+                  <a:ext uri="{FF2B5EF4-FFF2-40B4-BE49-F238E27FC236}">
+                    <a16:creationId xmlns:a16="http://schemas.microsoft.com/office/drawing/2014/main" id="{2641EE65-D261-4425-E893-18FDAE1BCD06}"/>
+                  </a:ext>
+                </a:extLst>
+              </p:cNvPr>
+              <p:cNvSpPr txBox="1">
+                <a:spLocks noRot="1" noChangeAspect="1" noMove="1" noResize="1" noEditPoints="1" noAdjustHandles="1" noChangeArrowheads="1" noChangeShapeType="1" noTextEdit="1"/>
+              </p:cNvSpPr>
+              <p:nvPr/>
+            </p:nvSpPr>
+            <p:spPr>
+              <a:xfrm>
+                <a:off x="4900719" y="204047"/>
+                <a:ext cx="2505429" cy="369332"/>
+              </a:xfrm>
+              <a:prstGeom prst="rect">
+                <a:avLst/>
+              </a:prstGeom>
+              <a:blipFill>
+                <a:blip r:embed="rId7"/>
+                <a:stretch>
+                  <a:fillRect l="-2190" t="-6557" b="-26230"/>
+                </a:stretch>
+              </a:blipFill>
+            </p:spPr>
+            <p:txBody>
+              <a:bodyPr/>
+              <a:lstStyle/>
+              <a:p>
+                <a:r>
+                  <a:rPr lang="en-US">
+                    <a:noFill/>
+                  </a:rPr>
+                  <a:t> </a:t>
+                </a:r>
+              </a:p>
+            </p:txBody>
+          </p:sp>
+        </mc:Fallback>
+      </mc:AlternateContent>
+      <p:sp>
+        <p:nvSpPr>
+          <p:cNvPr id="20" name="TextBox 19">
+            <a:extLst>
+              <a:ext uri="{FF2B5EF4-FFF2-40B4-BE49-F238E27FC236}">
+                <a16:creationId xmlns:a16="http://schemas.microsoft.com/office/drawing/2014/main" id="{28681DF7-8CAD-8125-257A-5D3A37E06F37}"/>
+              </a:ext>
+            </a:extLst>
+          </p:cNvPr>
+          <p:cNvSpPr txBox="1"/>
+          <p:nvPr/>
+        </p:nvSpPr>
+        <p:spPr>
+          <a:xfrm rot="16200000">
+            <a:off x="2535348" y="3417143"/>
+            <a:ext cx="841897" cy="369332"/>
+          </a:xfrm>
+          <a:prstGeom prst="rect">
+            <a:avLst/>
+          </a:prstGeom>
+          <a:noFill/>
+        </p:spPr>
+        <p:txBody>
+          <a:bodyPr wrap="none" rtlCol="0">
+            <a:spAutoFit/>
+          </a:bodyPr>
+          <a:lstStyle/>
+          <a:p>
+            <a:r>
+              <a:rPr lang="en-US" dirty="0"/>
+              <a:t>M=0, L</a:t>
+            </a:r>
+          </a:p>
+        </p:txBody>
+      </p:sp>
+    </p:spTree>
+    <p:extLst>
+      <p:ext uri="{BB962C8B-B14F-4D97-AF65-F5344CB8AC3E}">
+        <p14:creationId xmlns:p14="http://schemas.microsoft.com/office/powerpoint/2010/main" val="4122454811"/>
       </p:ext>
     </p:extLst>
   </p:cSld>

--- a/figures/results_ordered/starshape.pptx
+++ b/figures/results_ordered/starshape.pptx
@@ -5,9 +5,7 @@
     <p:sldMasterId id="2147483648" r:id="rId1"/>
   </p:sldMasterIdLst>
   <p:sldIdLst>
-    <p:sldId id="256" r:id="rId2"/>
-    <p:sldId id="257" r:id="rId3"/>
-    <p:sldId id="258" r:id="rId4"/>
+    <p:sldId id="257" r:id="rId2"/>
   </p:sldIdLst>
   <p:sldSz cx="12192000" cy="6858000"/>
   <p:notesSz cx="6858000" cy="9144000"/>
@@ -117,7 +115,7 @@
 <file path=ppt/revisionInfo.xml><?xml version="1.0" encoding="utf-8"?>
 <p1510:revInfo xmlns:a="http://schemas.openxmlformats.org/drawingml/2006/main" xmlns:r="http://schemas.openxmlformats.org/officeDocument/2006/relationships" xmlns:p1510="http://schemas.microsoft.com/office/powerpoint/2015/10/main">
   <p1510:revLst>
-    <p1510:client id="{3BDB6656-2E58-4C49-83AC-339DD8F1D5BE}" v="88" dt="2026-05-15T15:47:06.214"/>
+    <p1510:client id="{3BDB6656-2E58-4C49-83AC-339DD8F1D5BE}" v="126" dt="2026-05-22T14:55:00.389"/>
   </p1510:revLst>
 </p1510:revInfo>
 </file>
@@ -126,13 +124,13 @@
 <pc:chgInfo xmlns:a="http://schemas.openxmlformats.org/drawingml/2006/main" xmlns:r="http://schemas.openxmlformats.org/officeDocument/2006/relationships" xmlns:ac="http://schemas.microsoft.com/office/drawing/2013/main/command" xmlns:pc="http://schemas.microsoft.com/office/powerpoint/2013/main/command">
   <pc:docChgLst>
     <pc:chgData name="David Beckwitt" userId="bdca50846bee3b35" providerId="LiveId" clId="{77C57F99-3B40-463A-9855-34DA2A8048A2}"/>
-    <pc:docChg chg="undo custSel addSld modSld">
-      <pc:chgData name="David Beckwitt" userId="bdca50846bee3b35" providerId="LiveId" clId="{77C57F99-3B40-463A-9855-34DA2A8048A2}" dt="2026-05-15T15:47:20.372" v="355" actId="1076"/>
+    <pc:docChg chg="undo custSel addSld delSld modSld">
+      <pc:chgData name="David Beckwitt" userId="bdca50846bee3b35" providerId="LiveId" clId="{77C57F99-3B40-463A-9855-34DA2A8048A2}" dt="2026-05-22T14:58:10.049" v="516" actId="47"/>
       <pc:docMkLst>
         <pc:docMk/>
       </pc:docMkLst>
-      <pc:sldChg chg="addSp delSp modSp mod">
-        <pc:chgData name="David Beckwitt" userId="bdca50846bee3b35" providerId="LiveId" clId="{77C57F99-3B40-463A-9855-34DA2A8048A2}" dt="2026-05-15T15:17:34.715" v="44" actId="931"/>
+      <pc:sldChg chg="addSp delSp modSp del mod">
+        <pc:chgData name="David Beckwitt" userId="bdca50846bee3b35" providerId="LiveId" clId="{77C57F99-3B40-463A-9855-34DA2A8048A2}" dt="2026-05-22T14:58:10.049" v="516" actId="47"/>
         <pc:sldMkLst>
           <pc:docMk/>
           <pc:sldMk cId="2316372449" sldId="256"/>
@@ -145,6 +143,14 @@
             <ac:spMk id="2" creationId="{837BD0EC-45C4-CF78-7655-8569945B6392}"/>
           </ac:spMkLst>
         </pc:spChg>
+        <pc:spChg chg="add mod">
+          <ac:chgData name="David Beckwitt" userId="bdca50846bee3b35" providerId="LiveId" clId="{77C57F99-3B40-463A-9855-34DA2A8048A2}" dt="2026-05-22T14:51:03.933" v="388" actId="20577"/>
+          <ac:spMkLst>
+            <pc:docMk/>
+            <pc:sldMk cId="2316372449" sldId="256"/>
+            <ac:spMk id="4" creationId="{AFCA8086-2622-10CA-5D95-417674A50EEA}"/>
+          </ac:spMkLst>
+        </pc:spChg>
         <pc:spChg chg="mod">
           <ac:chgData name="David Beckwitt" userId="bdca50846bee3b35" providerId="LiveId" clId="{77C57F99-3B40-463A-9855-34DA2A8048A2}" dt="2026-05-15T15:17:32.498" v="41" actId="1076"/>
           <ac:spMkLst>
@@ -154,7 +160,7 @@
           </ac:spMkLst>
         </pc:spChg>
         <pc:spChg chg="mod">
-          <ac:chgData name="David Beckwitt" userId="bdca50846bee3b35" providerId="LiveId" clId="{77C57F99-3B40-463A-9855-34DA2A8048A2}" dt="2026-05-15T15:17:32.498" v="41" actId="1076"/>
+          <ac:chgData name="David Beckwitt" userId="bdca50846bee3b35" providerId="LiveId" clId="{77C57F99-3B40-463A-9855-34DA2A8048A2}" dt="2026-05-22T14:51:10.522" v="391" actId="20577"/>
           <ac:spMkLst>
             <pc:docMk/>
             <pc:sldMk cId="2316372449" sldId="256"/>
@@ -162,15 +168,15 @@
           </ac:spMkLst>
         </pc:spChg>
         <pc:spChg chg="mod">
-          <ac:chgData name="David Beckwitt" userId="bdca50846bee3b35" providerId="LiveId" clId="{77C57F99-3B40-463A-9855-34DA2A8048A2}" dt="2026-05-15T15:17:32.498" v="41" actId="1076"/>
+          <ac:chgData name="David Beckwitt" userId="bdca50846bee3b35" providerId="LiveId" clId="{77C57F99-3B40-463A-9855-34DA2A8048A2}" dt="2026-05-22T14:51:25.373" v="398" actId="1076"/>
           <ac:spMkLst>
             <pc:docMk/>
             <pc:sldMk cId="2316372449" sldId="256"/>
             <ac:spMk id="12" creationId="{A4088FB5-8429-9387-AE1B-16BB52B9B2E4}"/>
           </ac:spMkLst>
         </pc:spChg>
-        <pc:spChg chg="mod">
-          <ac:chgData name="David Beckwitt" userId="bdca50846bee3b35" providerId="LiveId" clId="{77C57F99-3B40-463A-9855-34DA2A8048A2}" dt="2026-05-15T15:17:32.498" v="41" actId="1076"/>
+        <pc:spChg chg="del mod">
+          <ac:chgData name="David Beckwitt" userId="bdca50846bee3b35" providerId="LiveId" clId="{77C57F99-3B40-463A-9855-34DA2A8048A2}" dt="2026-05-22T14:49:34.228" v="359" actId="478"/>
           <ac:spMkLst>
             <pc:docMk/>
             <pc:sldMk cId="2316372449" sldId="256"/>
@@ -185,28 +191,12 @@
             <ac:spMk id="33" creationId="{0B6E10FB-2E56-5380-BBCE-0420BD769738}"/>
           </ac:spMkLst>
         </pc:spChg>
-        <pc:grpChg chg="add mod">
-          <ac:chgData name="David Beckwitt" userId="bdca50846bee3b35" providerId="LiveId" clId="{77C57F99-3B40-463A-9855-34DA2A8048A2}" dt="2026-05-15T15:17:32.116" v="40" actId="164"/>
-          <ac:grpSpMkLst>
-            <pc:docMk/>
-            <pc:sldMk cId="2316372449" sldId="256"/>
-            <ac:grpSpMk id="9" creationId="{8315C882-9E86-6121-036C-40BD64BE3D52}"/>
-          </ac:grpSpMkLst>
-        </pc:grpChg>
         <pc:picChg chg="mod">
           <ac:chgData name="David Beckwitt" userId="bdca50846bee3b35" providerId="LiveId" clId="{77C57F99-3B40-463A-9855-34DA2A8048A2}" dt="2026-05-15T15:17:32.498" v="41" actId="1076"/>
           <ac:picMkLst>
             <pc:docMk/>
             <pc:sldMk cId="2316372449" sldId="256"/>
             <ac:picMk id="5" creationId="{AE8BFCDB-8BDF-E5FD-7CEE-3B77F6FA0F27}"/>
-          </ac:picMkLst>
-        </pc:picChg>
-        <pc:picChg chg="add del mod ord">
-          <ac:chgData name="David Beckwitt" userId="bdca50846bee3b35" providerId="LiveId" clId="{77C57F99-3B40-463A-9855-34DA2A8048A2}" dt="2026-05-15T15:17:34.715" v="44" actId="931"/>
-          <ac:picMkLst>
-            <pc:docMk/>
-            <pc:sldMk cId="2316372449" sldId="256"/>
-            <ac:picMk id="6" creationId="{005B06C3-4CB0-1372-EF98-689C9AE40770}"/>
           </ac:picMkLst>
         </pc:picChg>
         <pc:cxnChg chg="add mod">
@@ -217,12 +207,52 @@
             <ac:cxnSpMk id="3" creationId="{E6EA08B8-9557-85A5-7CB2-8B53B766AF89}"/>
           </ac:cxnSpMkLst>
         </pc:cxnChg>
+        <pc:cxnChg chg="del">
+          <ac:chgData name="David Beckwitt" userId="bdca50846bee3b35" providerId="LiveId" clId="{77C57F99-3B40-463A-9855-34DA2A8048A2}" dt="2026-05-22T14:49:35.140" v="360" actId="478"/>
+          <ac:cxnSpMkLst>
+            <pc:docMk/>
+            <pc:sldMk cId="2316372449" sldId="256"/>
+            <ac:cxnSpMk id="7" creationId="{C9731943-CCF6-746A-FB90-A028B784C0F4}"/>
+          </ac:cxnSpMkLst>
+        </pc:cxnChg>
+        <pc:cxnChg chg="del">
+          <ac:chgData name="David Beckwitt" userId="bdca50846bee3b35" providerId="LiveId" clId="{77C57F99-3B40-463A-9855-34DA2A8048A2}" dt="2026-05-22T14:49:32.639" v="358" actId="478"/>
+          <ac:cxnSpMkLst>
+            <pc:docMk/>
+            <pc:sldMk cId="2316372449" sldId="256"/>
+            <ac:cxnSpMk id="8" creationId="{138FE7A0-0D96-E7C5-7242-61C80C5B816E}"/>
+          </ac:cxnSpMkLst>
+        </pc:cxnChg>
         <pc:cxnChg chg="add mod">
           <ac:chgData name="David Beckwitt" userId="bdca50846bee3b35" providerId="LiveId" clId="{77C57F99-3B40-463A-9855-34DA2A8048A2}" dt="2026-05-15T15:17:32.498" v="41" actId="1076"/>
           <ac:cxnSpMkLst>
             <pc:docMk/>
             <pc:sldMk cId="2316372449" sldId="256"/>
             <ac:cxnSpMk id="13" creationId="{64AA8985-AF08-05D6-F26F-9981B60D3DDE}"/>
+          </ac:cxnSpMkLst>
+        </pc:cxnChg>
+        <pc:cxnChg chg="add mod">
+          <ac:chgData name="David Beckwitt" userId="bdca50846bee3b35" providerId="LiveId" clId="{77C57F99-3B40-463A-9855-34DA2A8048A2}" dt="2026-05-22T14:50:53.628" v="379" actId="14100"/>
+          <ac:cxnSpMkLst>
+            <pc:docMk/>
+            <pc:sldMk cId="2316372449" sldId="256"/>
+            <ac:cxnSpMk id="15" creationId="{A4DF171F-1C4A-582F-ABDB-6992998C1923}"/>
+          </ac:cxnSpMkLst>
+        </pc:cxnChg>
+        <pc:cxnChg chg="add mod">
+          <ac:chgData name="David Beckwitt" userId="bdca50846bee3b35" providerId="LiveId" clId="{77C57F99-3B40-463A-9855-34DA2A8048A2}" dt="2026-05-22T14:51:27.508" v="399" actId="1076"/>
+          <ac:cxnSpMkLst>
+            <pc:docMk/>
+            <pc:sldMk cId="2316372449" sldId="256"/>
+            <ac:cxnSpMk id="18" creationId="{CDE9D576-5410-00CD-6B9F-C408485FA7AA}"/>
+          </ac:cxnSpMkLst>
+        </pc:cxnChg>
+        <pc:cxnChg chg="add del mod">
+          <ac:chgData name="David Beckwitt" userId="bdca50846bee3b35" providerId="LiveId" clId="{77C57F99-3B40-463A-9855-34DA2A8048A2}" dt="2026-05-22T14:50:26.182" v="372" actId="478"/>
+          <ac:cxnSpMkLst>
+            <pc:docMk/>
+            <pc:sldMk cId="2316372449" sldId="256"/>
+            <ac:cxnSpMk id="20" creationId="{843DBBF2-6050-6B72-040B-B4E9197DF06B}"/>
           </ac:cxnSpMkLst>
         </pc:cxnChg>
         <pc:cxnChg chg="mod">
@@ -243,29 +273,13 @@
         </pc:cxnChg>
       </pc:sldChg>
       <pc:sldChg chg="addSp delSp modSp new mod">
-        <pc:chgData name="David Beckwitt" userId="bdca50846bee3b35" providerId="LiveId" clId="{77C57F99-3B40-463A-9855-34DA2A8048A2}" dt="2026-05-15T15:26:18.941" v="175" actId="14100"/>
+        <pc:chgData name="David Beckwitt" userId="bdca50846bee3b35" providerId="LiveId" clId="{77C57F99-3B40-463A-9855-34DA2A8048A2}" dt="2026-05-22T14:57:29.886" v="515" actId="478"/>
         <pc:sldMkLst>
           <pc:docMk/>
           <pc:sldMk cId="1470611967" sldId="257"/>
         </pc:sldMkLst>
-        <pc:spChg chg="del">
-          <ac:chgData name="David Beckwitt" userId="bdca50846bee3b35" providerId="LiveId" clId="{77C57F99-3B40-463A-9855-34DA2A8048A2}" dt="2026-05-15T15:17:41.726" v="46" actId="478"/>
-          <ac:spMkLst>
-            <pc:docMk/>
-            <pc:sldMk cId="1470611967" sldId="257"/>
-            <ac:spMk id="2" creationId="{AB614635-F92C-3965-CC0E-8BEFC64EB12A}"/>
-          </ac:spMkLst>
-        </pc:spChg>
-        <pc:spChg chg="del">
-          <ac:chgData name="David Beckwitt" userId="bdca50846bee3b35" providerId="LiveId" clId="{77C57F99-3B40-463A-9855-34DA2A8048A2}" dt="2026-05-15T15:17:41.726" v="46" actId="478"/>
-          <ac:spMkLst>
-            <pc:docMk/>
-            <pc:sldMk cId="1470611967" sldId="257"/>
-            <ac:spMk id="3" creationId="{FC69A770-ACCD-B975-BC72-BD514B097803}"/>
-          </ac:spMkLst>
-        </pc:spChg>
-        <pc:spChg chg="add mod ord">
-          <ac:chgData name="David Beckwitt" userId="bdca50846bee3b35" providerId="LiveId" clId="{77C57F99-3B40-463A-9855-34DA2A8048A2}" dt="2026-05-15T15:20:31.236" v="148" actId="164"/>
+        <pc:spChg chg="add mod ord topLvl">
+          <ac:chgData name="David Beckwitt" userId="bdca50846bee3b35" providerId="LiveId" clId="{77C57F99-3B40-463A-9855-34DA2A8048A2}" dt="2026-05-22T14:53:09.318" v="429" actId="1076"/>
           <ac:spMkLst>
             <pc:docMk/>
             <pc:sldMk cId="1470611967" sldId="257"/>
@@ -281,35 +295,251 @@
           </ac:spMkLst>
         </pc:spChg>
         <pc:spChg chg="add mod">
-          <ac:chgData name="David Beckwitt" userId="bdca50846bee3b35" providerId="LiveId" clId="{77C57F99-3B40-463A-9855-34DA2A8048A2}" dt="2026-05-15T15:26:16.729" v="174" actId="1076"/>
+          <ac:chgData name="David Beckwitt" userId="bdca50846bee3b35" providerId="LiveId" clId="{77C57F99-3B40-463A-9855-34DA2A8048A2}" dt="2026-05-22T14:52:33.454" v="417" actId="1076"/>
+          <ac:spMkLst>
+            <pc:docMk/>
+            <pc:sldMk cId="1470611967" sldId="257"/>
+            <ac:spMk id="15" creationId="{788B673D-157E-9B2A-8614-C8E79795BD7B}"/>
+          </ac:spMkLst>
+        </pc:spChg>
+        <pc:spChg chg="add mod">
+          <ac:chgData name="David Beckwitt" userId="bdca50846bee3b35" providerId="LiveId" clId="{77C57F99-3B40-463A-9855-34DA2A8048A2}" dt="2026-05-22T14:52:33.454" v="417" actId="1076"/>
+          <ac:spMkLst>
+            <pc:docMk/>
+            <pc:sldMk cId="1470611967" sldId="257"/>
+            <ac:spMk id="17" creationId="{350A3AF6-2E9C-C6BA-4F88-2F8B1B287D13}"/>
+          </ac:spMkLst>
+        </pc:spChg>
+        <pc:spChg chg="add mod">
+          <ac:chgData name="David Beckwitt" userId="bdca50846bee3b35" providerId="LiveId" clId="{77C57F99-3B40-463A-9855-34DA2A8048A2}" dt="2026-05-22T14:52:33.454" v="417" actId="1076"/>
+          <ac:spMkLst>
+            <pc:docMk/>
+            <pc:sldMk cId="1470611967" sldId="257"/>
+            <ac:spMk id="18" creationId="{70734D3D-338B-7AF2-88BE-7CB14D64A42C}"/>
+          </ac:spMkLst>
+        </pc:spChg>
+        <pc:spChg chg="add del mod ord">
+          <ac:chgData name="David Beckwitt" userId="bdca50846bee3b35" providerId="LiveId" clId="{77C57F99-3B40-463A-9855-34DA2A8048A2}" dt="2026-05-22T14:57:29.886" v="515" actId="478"/>
           <ac:spMkLst>
             <pc:docMk/>
             <pc:sldMk cId="1470611967" sldId="257"/>
             <ac:spMk id="21" creationId="{EFF3E8ED-2FD2-ED54-B1CD-DD81B1515211}"/>
           </ac:spMkLst>
         </pc:spChg>
-        <pc:grpChg chg="add mod">
-          <ac:chgData name="David Beckwitt" userId="bdca50846bee3b35" providerId="LiveId" clId="{77C57F99-3B40-463A-9855-34DA2A8048A2}" dt="2026-05-15T15:21:00.082" v="152" actId="1076"/>
+        <pc:spChg chg="add mod">
+          <ac:chgData name="David Beckwitt" userId="bdca50846bee3b35" providerId="LiveId" clId="{77C57F99-3B40-463A-9855-34DA2A8048A2}" dt="2026-05-22T14:52:33.454" v="417" actId="1076"/>
+          <ac:spMkLst>
+            <pc:docMk/>
+            <pc:sldMk cId="1470611967" sldId="257"/>
+            <ac:spMk id="22" creationId="{DF2AA07B-3199-8FAF-51E8-4E4D9CE6748D}"/>
+          </ac:spMkLst>
+        </pc:spChg>
+        <pc:spChg chg="add mod">
+          <ac:chgData name="David Beckwitt" userId="bdca50846bee3b35" providerId="LiveId" clId="{77C57F99-3B40-463A-9855-34DA2A8048A2}" dt="2026-05-22T14:52:33.454" v="417" actId="1076"/>
+          <ac:spMkLst>
+            <pc:docMk/>
+            <pc:sldMk cId="1470611967" sldId="257"/>
+            <ac:spMk id="26" creationId="{F660A513-932D-4092-D144-F1B4A3484174}"/>
+          </ac:spMkLst>
+        </pc:spChg>
+        <pc:spChg chg="add mod">
+          <ac:chgData name="David Beckwitt" userId="bdca50846bee3b35" providerId="LiveId" clId="{77C57F99-3B40-463A-9855-34DA2A8048A2}" dt="2026-05-22T14:52:33.454" v="417" actId="1076"/>
+          <ac:spMkLst>
+            <pc:docMk/>
+            <pc:sldMk cId="1470611967" sldId="257"/>
+            <ac:spMk id="29" creationId="{A97A570E-1238-0450-ECD6-1A04E64BD89E}"/>
+          </ac:spMkLst>
+        </pc:spChg>
+        <pc:spChg chg="add mod">
+          <ac:chgData name="David Beckwitt" userId="bdca50846bee3b35" providerId="LiveId" clId="{77C57F99-3B40-463A-9855-34DA2A8048A2}" dt="2026-05-22T14:53:15.840" v="434" actId="1076"/>
+          <ac:spMkLst>
+            <pc:docMk/>
+            <pc:sldMk cId="1470611967" sldId="257"/>
+            <ac:spMk id="35" creationId="{174376D8-2555-1A8C-C3DF-CE45E8EF728E}"/>
+          </ac:spMkLst>
+        </pc:spChg>
+        <pc:spChg chg="add mod">
+          <ac:chgData name="David Beckwitt" userId="bdca50846bee3b35" providerId="LiveId" clId="{77C57F99-3B40-463A-9855-34DA2A8048A2}" dt="2026-05-22T14:53:15.840" v="434" actId="1076"/>
+          <ac:spMkLst>
+            <pc:docMk/>
+            <pc:sldMk cId="1470611967" sldId="257"/>
+            <ac:spMk id="36" creationId="{665B6091-0FCB-51C4-CCBF-7985F591DC7B}"/>
+          </ac:spMkLst>
+        </pc:spChg>
+        <pc:spChg chg="add mod">
+          <ac:chgData name="David Beckwitt" userId="bdca50846bee3b35" providerId="LiveId" clId="{77C57F99-3B40-463A-9855-34DA2A8048A2}" dt="2026-05-22T14:53:15.840" v="434" actId="1076"/>
+          <ac:spMkLst>
+            <pc:docMk/>
+            <pc:sldMk cId="1470611967" sldId="257"/>
+            <ac:spMk id="37" creationId="{A5ACA414-8BE1-4F04-D545-2DAC43BB07C8}"/>
+          </ac:spMkLst>
+        </pc:spChg>
+        <pc:spChg chg="add mod">
+          <ac:chgData name="David Beckwitt" userId="bdca50846bee3b35" providerId="LiveId" clId="{77C57F99-3B40-463A-9855-34DA2A8048A2}" dt="2026-05-22T14:53:15.840" v="434" actId="1076"/>
+          <ac:spMkLst>
+            <pc:docMk/>
+            <pc:sldMk cId="1470611967" sldId="257"/>
+            <ac:spMk id="39" creationId="{F4815883-62EB-1DCE-9B91-FEC1651C271E}"/>
+          </ac:spMkLst>
+        </pc:spChg>
+        <pc:spChg chg="add mod">
+          <ac:chgData name="David Beckwitt" userId="bdca50846bee3b35" providerId="LiveId" clId="{77C57F99-3B40-463A-9855-34DA2A8048A2}" dt="2026-05-22T14:53:15.840" v="434" actId="1076"/>
+          <ac:spMkLst>
+            <pc:docMk/>
+            <pc:sldMk cId="1470611967" sldId="257"/>
+            <ac:spMk id="43" creationId="{1D60B34B-D232-D96E-8A10-C0D51F856FDF}"/>
+          </ac:spMkLst>
+        </pc:spChg>
+        <pc:spChg chg="add mod">
+          <ac:chgData name="David Beckwitt" userId="bdca50846bee3b35" providerId="LiveId" clId="{77C57F99-3B40-463A-9855-34DA2A8048A2}" dt="2026-05-22T14:53:15.840" v="434" actId="1076"/>
+          <ac:spMkLst>
+            <pc:docMk/>
+            <pc:sldMk cId="1470611967" sldId="257"/>
+            <ac:spMk id="46" creationId="{91304BB0-FDE1-6FC2-FFF0-22C57E621B5E}"/>
+          </ac:spMkLst>
+        </pc:spChg>
+        <pc:spChg chg="add mod topLvl">
+          <ac:chgData name="David Beckwitt" userId="bdca50846bee3b35" providerId="LiveId" clId="{77C57F99-3B40-463A-9855-34DA2A8048A2}" dt="2026-05-22T14:54:49.669" v="484" actId="165"/>
+          <ac:spMkLst>
+            <pc:docMk/>
+            <pc:sldMk cId="1470611967" sldId="257"/>
+            <ac:spMk id="50" creationId="{1FF5C6C6-7FF3-5C0D-EAED-F5606B2DEE5D}"/>
+          </ac:spMkLst>
+        </pc:spChg>
+        <pc:spChg chg="add mod topLvl">
+          <ac:chgData name="David Beckwitt" userId="bdca50846bee3b35" providerId="LiveId" clId="{77C57F99-3B40-463A-9855-34DA2A8048A2}" dt="2026-05-22T14:54:49.669" v="484" actId="165"/>
+          <ac:spMkLst>
+            <pc:docMk/>
+            <pc:sldMk cId="1470611967" sldId="257"/>
+            <ac:spMk id="51" creationId="{63303539-9FF0-38F2-21A0-D29965DBB502}"/>
+          </ac:spMkLst>
+        </pc:spChg>
+        <pc:spChg chg="add mod topLvl">
+          <ac:chgData name="David Beckwitt" userId="bdca50846bee3b35" providerId="LiveId" clId="{77C57F99-3B40-463A-9855-34DA2A8048A2}" dt="2026-05-22T14:54:49.669" v="484" actId="165"/>
+          <ac:spMkLst>
+            <pc:docMk/>
+            <pc:sldMk cId="1470611967" sldId="257"/>
+            <ac:spMk id="52" creationId="{31154761-C0EC-B8CE-49BF-DB3BBC00AA20}"/>
+          </ac:spMkLst>
+        </pc:spChg>
+        <pc:spChg chg="add mod topLvl">
+          <ac:chgData name="David Beckwitt" userId="bdca50846bee3b35" providerId="LiveId" clId="{77C57F99-3B40-463A-9855-34DA2A8048A2}" dt="2026-05-22T14:55:03.992" v="501" actId="1076"/>
+          <ac:spMkLst>
+            <pc:docMk/>
+            <pc:sldMk cId="1470611967" sldId="257"/>
+            <ac:spMk id="54" creationId="{25228D84-3A0B-851E-A60E-55F766BFB156}"/>
+          </ac:spMkLst>
+        </pc:spChg>
+        <pc:spChg chg="add mod topLvl">
+          <ac:chgData name="David Beckwitt" userId="bdca50846bee3b35" providerId="LiveId" clId="{77C57F99-3B40-463A-9855-34DA2A8048A2}" dt="2026-05-22T14:55:24.717" v="510" actId="1035"/>
+          <ac:spMkLst>
+            <pc:docMk/>
+            <pc:sldMk cId="1470611967" sldId="257"/>
+            <ac:spMk id="58" creationId="{5BBD1742-D2FD-DF2D-AEEB-B877EC725E02}"/>
+          </ac:spMkLst>
+        </pc:spChg>
+        <pc:spChg chg="add mod topLvl">
+          <ac:chgData name="David Beckwitt" userId="bdca50846bee3b35" providerId="LiveId" clId="{77C57F99-3B40-463A-9855-34DA2A8048A2}" dt="2026-05-22T14:54:49.669" v="484" actId="165"/>
+          <ac:spMkLst>
+            <pc:docMk/>
+            <pc:sldMk cId="1470611967" sldId="257"/>
+            <ac:spMk id="61" creationId="{31DEB88D-1B15-FB24-CC53-B3A13E53E073}"/>
+          </ac:spMkLst>
+        </pc:spChg>
+        <pc:grpChg chg="add del mod">
+          <ac:chgData name="David Beckwitt" userId="bdca50846bee3b35" providerId="LiveId" clId="{77C57F99-3B40-463A-9855-34DA2A8048A2}" dt="2026-05-22T14:52:00.298" v="407" actId="21"/>
           <ac:grpSpMkLst>
             <pc:docMk/>
             <pc:sldMk cId="1470611967" sldId="257"/>
             <ac:grpSpMk id="16" creationId="{E0C9380D-0E01-195E-9440-9F0DFCE6F64F}"/>
           </ac:grpSpMkLst>
         </pc:grpChg>
+        <pc:grpChg chg="add del mod">
+          <ac:chgData name="David Beckwitt" userId="bdca50846bee3b35" providerId="LiveId" clId="{77C57F99-3B40-463A-9855-34DA2A8048A2}" dt="2026-05-22T14:54:49.669" v="484" actId="165"/>
+          <ac:grpSpMkLst>
+            <pc:docMk/>
+            <pc:sldMk cId="1470611967" sldId="257"/>
+            <ac:grpSpMk id="64" creationId="{92E3E2F4-96E3-6CC4-946A-8589CAE64363}"/>
+          </ac:grpSpMkLst>
+        </pc:grpChg>
+        <pc:picChg chg="add del mod">
+          <ac:chgData name="David Beckwitt" userId="bdca50846bee3b35" providerId="LiveId" clId="{77C57F99-3B40-463A-9855-34DA2A8048A2}" dt="2026-05-22T14:51:55.152" v="403" actId="21"/>
+          <ac:picMkLst>
+            <pc:docMk/>
+            <pc:sldMk cId="1470611967" sldId="257"/>
+            <ac:picMk id="3" creationId="{CB8B2378-5F13-8F5B-9DCB-0D135D82EC61}"/>
+          </ac:picMkLst>
+        </pc:picChg>
         <pc:picChg chg="add mod">
-          <ac:chgData name="David Beckwitt" userId="bdca50846bee3b35" providerId="LiveId" clId="{77C57F99-3B40-463A-9855-34DA2A8048A2}" dt="2026-05-15T15:21:00.082" v="152" actId="1076"/>
+          <ac:chgData name="David Beckwitt" userId="bdca50846bee3b35" providerId="LiveId" clId="{77C57F99-3B40-463A-9855-34DA2A8048A2}" dt="2026-05-22T14:51:56.381" v="405"/>
+          <ac:picMkLst>
+            <pc:docMk/>
+            <pc:sldMk cId="1470611967" sldId="257"/>
+            <ac:picMk id="4" creationId="{CB8B2378-5F13-8F5B-9DCB-0D135D82EC61}"/>
+          </ac:picMkLst>
+        </pc:picChg>
+        <pc:picChg chg="add mod ord">
+          <ac:chgData name="David Beckwitt" userId="bdca50846bee3b35" providerId="LiveId" clId="{77C57F99-3B40-463A-9855-34DA2A8048A2}" dt="2026-05-22T14:55:38.350" v="513" actId="166"/>
           <ac:picMkLst>
             <pc:docMk/>
             <pc:sldMk cId="1470611967" sldId="257"/>
             <ac:picMk id="5" creationId="{649CBBC7-4B62-6664-7F06-CE2B66D6E535}"/>
           </ac:picMkLst>
         </pc:picChg>
-        <pc:picChg chg="add mod">
-          <ac:chgData name="David Beckwitt" userId="bdca50846bee3b35" providerId="LiveId" clId="{77C57F99-3B40-463A-9855-34DA2A8048A2}" dt="2026-05-15T15:20:31.236" v="148" actId="164"/>
+        <pc:picChg chg="add del mod">
+          <ac:chgData name="David Beckwitt" userId="bdca50846bee3b35" providerId="LiveId" clId="{77C57F99-3B40-463A-9855-34DA2A8048A2}" dt="2026-05-22T14:52:09.458" v="409" actId="478"/>
+          <ac:picMkLst>
+            <pc:docMk/>
+            <pc:sldMk cId="1470611967" sldId="257"/>
+            <ac:picMk id="6" creationId="{858B602E-9B5F-403E-C961-E66D4BB1345B}"/>
+          </ac:picMkLst>
+        </pc:picChg>
+        <pc:picChg chg="add del mod topLvl">
+          <ac:chgData name="David Beckwitt" userId="bdca50846bee3b35" providerId="LiveId" clId="{77C57F99-3B40-463A-9855-34DA2A8048A2}" dt="2026-05-22T14:52:00.298" v="407" actId="21"/>
           <ac:picMkLst>
             <pc:docMk/>
             <pc:sldMk cId="1470611967" sldId="257"/>
             <ac:picMk id="7" creationId="{858B602E-9B5F-403E-C961-E66D4BB1345B}"/>
+          </ac:picMkLst>
+        </pc:picChg>
+        <pc:picChg chg="add del mod">
+          <ac:chgData name="David Beckwitt" userId="bdca50846bee3b35" providerId="LiveId" clId="{77C57F99-3B40-463A-9855-34DA2A8048A2}" dt="2026-05-22T14:52:26.099" v="414" actId="478"/>
+          <ac:picMkLst>
+            <pc:docMk/>
+            <pc:sldMk cId="1470611967" sldId="257"/>
+            <ac:picMk id="13" creationId="{470D3FFD-5152-D0CA-7557-993647D9B7FB}"/>
+          </ac:picMkLst>
+        </pc:picChg>
+        <pc:picChg chg="add mod">
+          <ac:chgData name="David Beckwitt" userId="bdca50846bee3b35" providerId="LiveId" clId="{77C57F99-3B40-463A-9855-34DA2A8048A2}" dt="2026-05-22T14:52:33.454" v="417" actId="1076"/>
+          <ac:picMkLst>
+            <pc:docMk/>
+            <pc:sldMk cId="1470611967" sldId="257"/>
+            <ac:picMk id="14" creationId="{8672F86D-933E-CF59-414C-538798F6D459}"/>
+          </ac:picMkLst>
+        </pc:picChg>
+        <pc:picChg chg="add del mod">
+          <ac:chgData name="David Beckwitt" userId="bdca50846bee3b35" providerId="LiveId" clId="{77C57F99-3B40-463A-9855-34DA2A8048A2}" dt="2026-05-22T14:52:41.239" v="421" actId="478"/>
+          <ac:picMkLst>
+            <pc:docMk/>
+            <pc:sldMk cId="1470611967" sldId="257"/>
+            <ac:picMk id="33" creationId="{E0185388-49E5-6FF5-A9C7-BF08646FE190}"/>
+          </ac:picMkLst>
+        </pc:picChg>
+        <pc:picChg chg="add mod">
+          <ac:chgData name="David Beckwitt" userId="bdca50846bee3b35" providerId="LiveId" clId="{77C57F99-3B40-463A-9855-34DA2A8048A2}" dt="2026-05-22T14:53:15.840" v="434" actId="1076"/>
+          <ac:picMkLst>
+            <pc:docMk/>
+            <pc:sldMk cId="1470611967" sldId="257"/>
+            <ac:picMk id="34" creationId="{67BBDB1E-4844-EE4C-CEC3-2F6AF374DB9D}"/>
+          </ac:picMkLst>
+        </pc:picChg>
+        <pc:picChg chg="add mod topLvl">
+          <ac:chgData name="David Beckwitt" userId="bdca50846bee3b35" providerId="LiveId" clId="{77C57F99-3B40-463A-9855-34DA2A8048A2}" dt="2026-05-22T14:54:49.669" v="484" actId="165"/>
+          <ac:picMkLst>
+            <pc:docMk/>
+            <pc:sldMk cId="1470611967" sldId="257"/>
+            <ac:picMk id="49" creationId="{4ABD46B1-8DEC-6BEA-8FFF-8596BBF1EE6C}"/>
           </ac:picMkLst>
         </pc:picChg>
         <pc:cxnChg chg="add mod">
@@ -329,140 +559,148 @@
           </ac:cxnSpMkLst>
         </pc:cxnChg>
         <pc:cxnChg chg="add mod">
-          <ac:chgData name="David Beckwitt" userId="bdca50846bee3b35" providerId="LiveId" clId="{77C57F99-3B40-463A-9855-34DA2A8048A2}" dt="2026-05-15T15:26:18.941" v="175" actId="14100"/>
+          <ac:chgData name="David Beckwitt" userId="bdca50846bee3b35" providerId="LiveId" clId="{77C57F99-3B40-463A-9855-34DA2A8048A2}" dt="2026-05-22T14:52:29.819" v="416" actId="1076"/>
+          <ac:cxnSpMkLst>
+            <pc:docMk/>
+            <pc:sldMk cId="1470611967" sldId="257"/>
+            <ac:cxnSpMk id="19" creationId="{AE768B5C-03D5-E676-4F4C-56DF9DB2C294}"/>
+          </ac:cxnSpMkLst>
+        </pc:cxnChg>
+        <pc:cxnChg chg="add del mod">
+          <ac:chgData name="David Beckwitt" userId="bdca50846bee3b35" providerId="LiveId" clId="{77C57F99-3B40-463A-9855-34DA2A8048A2}" dt="2026-05-22T14:49:52.871" v="365" actId="21"/>
           <ac:cxnSpMkLst>
             <pc:docMk/>
             <pc:sldMk cId="1470611967" sldId="257"/>
             <ac:cxnSpMk id="20" creationId="{843DBBF2-6050-6B72-040B-B4E9197DF06B}"/>
           </ac:cxnSpMkLst>
         </pc:cxnChg>
+        <pc:cxnChg chg="add mod">
+          <ac:chgData name="David Beckwitt" userId="bdca50846bee3b35" providerId="LiveId" clId="{77C57F99-3B40-463A-9855-34DA2A8048A2}" dt="2026-05-22T14:52:33.454" v="417" actId="1076"/>
+          <ac:cxnSpMkLst>
+            <pc:docMk/>
+            <pc:sldMk cId="1470611967" sldId="257"/>
+            <ac:cxnSpMk id="28" creationId="{8E2B0809-4E48-12AB-16BB-6FB352BB2E02}"/>
+          </ac:cxnSpMkLst>
+        </pc:cxnChg>
+        <pc:cxnChg chg="add mod">
+          <ac:chgData name="David Beckwitt" userId="bdca50846bee3b35" providerId="LiveId" clId="{77C57F99-3B40-463A-9855-34DA2A8048A2}" dt="2026-05-22T14:52:33.454" v="417" actId="1076"/>
+          <ac:cxnSpMkLst>
+            <pc:docMk/>
+            <pc:sldMk cId="1470611967" sldId="257"/>
+            <ac:cxnSpMk id="30" creationId="{3F2AC2D7-2223-7AAB-62DC-0CA7D27A0D0D}"/>
+          </ac:cxnSpMkLst>
+        </pc:cxnChg>
+        <pc:cxnChg chg="mod">
+          <ac:chgData name="David Beckwitt" userId="bdca50846bee3b35" providerId="LiveId" clId="{77C57F99-3B40-463A-9855-34DA2A8048A2}" dt="2026-05-22T14:52:33.454" v="417" actId="1076"/>
+          <ac:cxnSpMkLst>
+            <pc:docMk/>
+            <pc:sldMk cId="1470611967" sldId="257"/>
+            <ac:cxnSpMk id="31" creationId="{F3E0EB53-605E-72F4-77D6-7FE21D089649}"/>
+          </ac:cxnSpMkLst>
+        </pc:cxnChg>
+        <pc:cxnChg chg="mod">
+          <ac:chgData name="David Beckwitt" userId="bdca50846bee3b35" providerId="LiveId" clId="{77C57F99-3B40-463A-9855-34DA2A8048A2}" dt="2026-05-22T14:53:15.429" v="433" actId="1076"/>
+          <ac:cxnSpMkLst>
+            <pc:docMk/>
+            <pc:sldMk cId="1470611967" sldId="257"/>
+            <ac:cxnSpMk id="38" creationId="{D614CC95-0CC1-FD42-3FD5-537C9A9B871E}"/>
+          </ac:cxnSpMkLst>
+        </pc:cxnChg>
+        <pc:cxnChg chg="add mod">
+          <ac:chgData name="David Beckwitt" userId="bdca50846bee3b35" providerId="LiveId" clId="{77C57F99-3B40-463A-9855-34DA2A8048A2}" dt="2026-05-22T14:53:15.840" v="434" actId="1076"/>
+          <ac:cxnSpMkLst>
+            <pc:docMk/>
+            <pc:sldMk cId="1470611967" sldId="257"/>
+            <ac:cxnSpMk id="42" creationId="{5A5A0923-08DD-0292-C7D9-273AC4D16996}"/>
+          </ac:cxnSpMkLst>
+        </pc:cxnChg>
+        <pc:cxnChg chg="mod">
+          <ac:chgData name="David Beckwitt" userId="bdca50846bee3b35" providerId="LiveId" clId="{77C57F99-3B40-463A-9855-34DA2A8048A2}" dt="2026-05-22T14:53:15.138" v="432" actId="1076"/>
+          <ac:cxnSpMkLst>
+            <pc:docMk/>
+            <pc:sldMk cId="1470611967" sldId="257"/>
+            <ac:cxnSpMk id="44" creationId="{327A877F-7461-FE88-0F68-B5A591EDE529}"/>
+          </ac:cxnSpMkLst>
+        </pc:cxnChg>
+        <pc:cxnChg chg="add mod">
+          <ac:chgData name="David Beckwitt" userId="bdca50846bee3b35" providerId="LiveId" clId="{77C57F99-3B40-463A-9855-34DA2A8048A2}" dt="2026-05-22T14:53:15.840" v="434" actId="1076"/>
+          <ac:cxnSpMkLst>
+            <pc:docMk/>
+            <pc:sldMk cId="1470611967" sldId="257"/>
+            <ac:cxnSpMk id="45" creationId="{F05AD7C0-C662-0FFA-F680-CF1747B6BA58}"/>
+          </ac:cxnSpMkLst>
+        </pc:cxnChg>
+        <pc:cxnChg chg="add mod">
+          <ac:chgData name="David Beckwitt" userId="bdca50846bee3b35" providerId="LiveId" clId="{77C57F99-3B40-463A-9855-34DA2A8048A2}" dt="2026-05-22T14:53:15.840" v="434" actId="1076"/>
+          <ac:cxnSpMkLst>
+            <pc:docMk/>
+            <pc:sldMk cId="1470611967" sldId="257"/>
+            <ac:cxnSpMk id="47" creationId="{3EEDE358-257C-7324-1A83-6DAF8EA71354}"/>
+          </ac:cxnSpMkLst>
+        </pc:cxnChg>
+        <pc:cxnChg chg="mod">
+          <ac:chgData name="David Beckwitt" userId="bdca50846bee3b35" providerId="LiveId" clId="{77C57F99-3B40-463A-9855-34DA2A8048A2}" dt="2026-05-22T14:55:09.771" v="502" actId="1582"/>
+          <ac:cxnSpMkLst>
+            <pc:docMk/>
+            <pc:sldMk cId="1470611967" sldId="257"/>
+            <ac:cxnSpMk id="53" creationId="{648CC883-0AD7-9ED3-D116-807E348CCB0F}"/>
+          </ac:cxnSpMkLst>
+        </pc:cxnChg>
+        <pc:cxnChg chg="mod">
+          <ac:chgData name="David Beckwitt" userId="bdca50846bee3b35" providerId="LiveId" clId="{77C57F99-3B40-463A-9855-34DA2A8048A2}" dt="2026-05-22T14:54:33.620" v="472" actId="1582"/>
+          <ac:cxnSpMkLst>
+            <pc:docMk/>
+            <pc:sldMk cId="1470611967" sldId="257"/>
+            <ac:cxnSpMk id="56" creationId="{7A624D92-6CBA-D6EE-4AF2-C9E86A66854B}"/>
+          </ac:cxnSpMkLst>
+        </pc:cxnChg>
+        <pc:cxnChg chg="add mod topLvl">
+          <ac:chgData name="David Beckwitt" userId="bdca50846bee3b35" providerId="LiveId" clId="{77C57F99-3B40-463A-9855-34DA2A8048A2}" dt="2026-05-22T14:54:49.669" v="484" actId="165"/>
+          <ac:cxnSpMkLst>
+            <pc:docMk/>
+            <pc:sldMk cId="1470611967" sldId="257"/>
+            <ac:cxnSpMk id="57" creationId="{C4500A6C-7D53-8E69-2EB7-64AD2E81FAB2}"/>
+          </ac:cxnSpMkLst>
+        </pc:cxnChg>
+        <pc:cxnChg chg="mod">
+          <ac:chgData name="David Beckwitt" userId="bdca50846bee3b35" providerId="LiveId" clId="{77C57F99-3B40-463A-9855-34DA2A8048A2}" dt="2026-05-22T14:55:17.173" v="503" actId="1582"/>
+          <ac:cxnSpMkLst>
+            <pc:docMk/>
+            <pc:sldMk cId="1470611967" sldId="257"/>
+            <ac:cxnSpMk id="59" creationId="{DD6BBAB8-EC1A-94CA-62EF-A6F1AA4A3B89}"/>
+          </ac:cxnSpMkLst>
+        </pc:cxnChg>
+        <pc:cxnChg chg="add mod">
+          <ac:chgData name="David Beckwitt" userId="bdca50846bee3b35" providerId="LiveId" clId="{77C57F99-3B40-463A-9855-34DA2A8048A2}" dt="2026-05-22T14:55:20.849" v="505" actId="1076"/>
+          <ac:cxnSpMkLst>
+            <pc:docMk/>
+            <pc:sldMk cId="1470611967" sldId="257"/>
+            <ac:cxnSpMk id="60" creationId="{D06DB336-B349-6C47-809D-34EF8DEDCBA9}"/>
+          </ac:cxnSpMkLst>
+        </pc:cxnChg>
+        <pc:cxnChg chg="add mod topLvl">
+          <ac:chgData name="David Beckwitt" userId="bdca50846bee3b35" providerId="LiveId" clId="{77C57F99-3B40-463A-9855-34DA2A8048A2}" dt="2026-05-22T14:54:49.669" v="484" actId="165"/>
+          <ac:cxnSpMkLst>
+            <pc:docMk/>
+            <pc:sldMk cId="1470611967" sldId="257"/>
+            <ac:cxnSpMk id="62" creationId="{6A9113A7-7851-D6C0-B1C4-9EB7E9EC158F}"/>
+          </ac:cxnSpMkLst>
+        </pc:cxnChg>
+        <pc:cxnChg chg="mod">
+          <ac:chgData name="David Beckwitt" userId="bdca50846bee3b35" providerId="LiveId" clId="{77C57F99-3B40-463A-9855-34DA2A8048A2}" dt="2026-05-22T14:54:01.813" v="450" actId="1582"/>
+          <ac:cxnSpMkLst>
+            <pc:docMk/>
+            <pc:sldMk cId="1470611967" sldId="257"/>
+            <ac:cxnSpMk id="63" creationId="{67A9D898-7517-56A5-58AE-9279C2BBF57D}"/>
+          </ac:cxnSpMkLst>
+        </pc:cxnChg>
       </pc:sldChg>
-      <pc:sldChg chg="addSp delSp modSp new mod">
-        <pc:chgData name="David Beckwitt" userId="bdca50846bee3b35" providerId="LiveId" clId="{77C57F99-3B40-463A-9855-34DA2A8048A2}" dt="2026-05-15T15:47:20.372" v="355" actId="1076"/>
+      <pc:sldChg chg="addSp delSp modSp new del mod">
+        <pc:chgData name="David Beckwitt" userId="bdca50846bee3b35" providerId="LiveId" clId="{77C57F99-3B40-463A-9855-34DA2A8048A2}" dt="2026-05-22T14:49:21.268" v="356" actId="47"/>
         <pc:sldMkLst>
           <pc:docMk/>
           <pc:sldMk cId="4122454811" sldId="258"/>
         </pc:sldMkLst>
-        <pc:spChg chg="del">
-          <ac:chgData name="David Beckwitt" userId="bdca50846bee3b35" providerId="LiveId" clId="{77C57F99-3B40-463A-9855-34DA2A8048A2}" dt="2026-05-15T15:41:38.085" v="177" actId="478"/>
-          <ac:spMkLst>
-            <pc:docMk/>
-            <pc:sldMk cId="4122454811" sldId="258"/>
-            <ac:spMk id="2" creationId="{6BC4DB3B-175B-0963-9844-802CEB1FB15A}"/>
-          </ac:spMkLst>
-        </pc:spChg>
-        <pc:spChg chg="del">
-          <ac:chgData name="David Beckwitt" userId="bdca50846bee3b35" providerId="LiveId" clId="{77C57F99-3B40-463A-9855-34DA2A8048A2}" dt="2026-05-15T15:41:38.085" v="177" actId="478"/>
-          <ac:spMkLst>
-            <pc:docMk/>
-            <pc:sldMk cId="4122454811" sldId="258"/>
-            <ac:spMk id="3" creationId="{DBFCC3F5-3A89-80FB-A915-CDFE20C5DBB9}"/>
-          </ac:spMkLst>
-        </pc:spChg>
-        <pc:spChg chg="add mod">
-          <ac:chgData name="David Beckwitt" userId="bdca50846bee3b35" providerId="LiveId" clId="{77C57F99-3B40-463A-9855-34DA2A8048A2}" dt="2026-05-15T15:45:33.080" v="248" actId="20577"/>
-          <ac:spMkLst>
-            <pc:docMk/>
-            <pc:sldMk cId="4122454811" sldId="258"/>
-            <ac:spMk id="12" creationId="{10BBAC0C-2515-E1A2-15B6-A8D750FBA93E}"/>
-          </ac:spMkLst>
-        </pc:spChg>
-        <pc:spChg chg="add mod">
-          <ac:chgData name="David Beckwitt" userId="bdca50846bee3b35" providerId="LiveId" clId="{77C57F99-3B40-463A-9855-34DA2A8048A2}" dt="2026-05-15T15:45:40.642" v="253" actId="20577"/>
-          <ac:spMkLst>
-            <pc:docMk/>
-            <pc:sldMk cId="4122454811" sldId="258"/>
-            <ac:spMk id="13" creationId="{AC60D419-119A-74FF-CFE7-155DBA94AE96}"/>
-          </ac:spMkLst>
-        </pc:spChg>
-        <pc:spChg chg="add mod">
-          <ac:chgData name="David Beckwitt" userId="bdca50846bee3b35" providerId="LiveId" clId="{77C57F99-3B40-463A-9855-34DA2A8048A2}" dt="2026-05-15T15:45:45.516" v="258" actId="20577"/>
-          <ac:spMkLst>
-            <pc:docMk/>
-            <pc:sldMk cId="4122454811" sldId="258"/>
-            <ac:spMk id="14" creationId="{8B85F688-41B1-C91F-2241-15C2D25AE7D1}"/>
-          </ac:spMkLst>
-        </pc:spChg>
-        <pc:spChg chg="add mod">
-          <ac:chgData name="David Beckwitt" userId="bdca50846bee3b35" providerId="LiveId" clId="{77C57F99-3B40-463A-9855-34DA2A8048A2}" dt="2026-05-15T15:46:12.046" v="279" actId="1076"/>
-          <ac:spMkLst>
-            <pc:docMk/>
-            <pc:sldMk cId="4122454811" sldId="258"/>
-            <ac:spMk id="15" creationId="{56106F5D-3BBF-2E3A-66BF-7E315900FCB2}"/>
-          </ac:spMkLst>
-        </pc:spChg>
-        <pc:spChg chg="add mod">
-          <ac:chgData name="David Beckwitt" userId="bdca50846bee3b35" providerId="LiveId" clId="{77C57F99-3B40-463A-9855-34DA2A8048A2}" dt="2026-05-15T15:46:17.308" v="283" actId="20577"/>
-          <ac:spMkLst>
-            <pc:docMk/>
-            <pc:sldMk cId="4122454811" sldId="258"/>
-            <ac:spMk id="16" creationId="{413C3997-E886-F5DE-0CB7-11C8F52C7989}"/>
-          </ac:spMkLst>
-        </pc:spChg>
-        <pc:spChg chg="add mod">
-          <ac:chgData name="David Beckwitt" userId="bdca50846bee3b35" providerId="LiveId" clId="{77C57F99-3B40-463A-9855-34DA2A8048A2}" dt="2026-05-15T15:46:22.575" v="287" actId="20577"/>
-          <ac:spMkLst>
-            <pc:docMk/>
-            <pc:sldMk cId="4122454811" sldId="258"/>
-            <ac:spMk id="17" creationId="{1111174F-6AFB-1679-9190-B3B73D0B517C}"/>
-          </ac:spMkLst>
-        </pc:spChg>
-        <pc:spChg chg="add mod">
-          <ac:chgData name="David Beckwitt" userId="bdca50846bee3b35" providerId="LiveId" clId="{77C57F99-3B40-463A-9855-34DA2A8048A2}" dt="2026-05-15T15:46:47.791" v="322" actId="1076"/>
-          <ac:spMkLst>
-            <pc:docMk/>
-            <pc:sldMk cId="4122454811" sldId="258"/>
-            <ac:spMk id="18" creationId="{2641EE65-D261-4425-E893-18FDAE1BCD06}"/>
-          </ac:spMkLst>
-        </pc:spChg>
-        <pc:spChg chg="add del mod">
-          <ac:chgData name="David Beckwitt" userId="bdca50846bee3b35" providerId="LiveId" clId="{77C57F99-3B40-463A-9855-34DA2A8048A2}" dt="2026-05-15T15:46:56.624" v="336"/>
-          <ac:spMkLst>
-            <pc:docMk/>
-            <pc:sldMk cId="4122454811" sldId="258"/>
-            <ac:spMk id="19" creationId="{800ADFF3-BAFE-750F-15CB-958BB742F467}"/>
-          </ac:spMkLst>
-        </pc:spChg>
-        <pc:spChg chg="add mod">
-          <ac:chgData name="David Beckwitt" userId="bdca50846bee3b35" providerId="LiveId" clId="{77C57F99-3B40-463A-9855-34DA2A8048A2}" dt="2026-05-15T15:47:20.372" v="355" actId="1076"/>
-          <ac:spMkLst>
-            <pc:docMk/>
-            <pc:sldMk cId="4122454811" sldId="258"/>
-            <ac:spMk id="20" creationId="{28681DF7-8CAD-8125-257A-5D3A37E06F37}"/>
-          </ac:spMkLst>
-        </pc:spChg>
-        <pc:picChg chg="add mod modCrop">
-          <ac:chgData name="David Beckwitt" userId="bdca50846bee3b35" providerId="LiveId" clId="{77C57F99-3B40-463A-9855-34DA2A8048A2}" dt="2026-05-15T15:44:53.564" v="204" actId="732"/>
-          <ac:picMkLst>
-            <pc:docMk/>
-            <pc:sldMk cId="4122454811" sldId="258"/>
-            <ac:picMk id="5" creationId="{195A7A65-4328-F6EB-91E5-1708D8CB540F}"/>
-          </ac:picMkLst>
-        </pc:picChg>
-        <pc:picChg chg="add del mod">
-          <ac:chgData name="David Beckwitt" userId="bdca50846bee3b35" providerId="LiveId" clId="{77C57F99-3B40-463A-9855-34DA2A8048A2}" dt="2026-05-15T15:43:45.239" v="191" actId="478"/>
-          <ac:picMkLst>
-            <pc:docMk/>
-            <pc:sldMk cId="4122454811" sldId="258"/>
-            <ac:picMk id="7" creationId="{91B320CC-1837-A2BD-E42E-634D51D7056C}"/>
-          </ac:picMkLst>
-        </pc:picChg>
-        <pc:picChg chg="add del mod">
-          <ac:chgData name="David Beckwitt" userId="bdca50846bee3b35" providerId="LiveId" clId="{77C57F99-3B40-463A-9855-34DA2A8048A2}" dt="2026-05-15T15:44:05.075" v="197" actId="478"/>
-          <ac:picMkLst>
-            <pc:docMk/>
-            <pc:sldMk cId="4122454811" sldId="258"/>
-            <ac:picMk id="9" creationId="{9DDA8884-59C5-4EC3-93C6-6136E36A8B65}"/>
-          </ac:picMkLst>
-        </pc:picChg>
-        <pc:picChg chg="add mod">
-          <ac:chgData name="David Beckwitt" userId="bdca50846bee3b35" providerId="LiveId" clId="{77C57F99-3B40-463A-9855-34DA2A8048A2}" dt="2026-05-15T15:46:10.701" v="278" actId="1076"/>
-          <ac:picMkLst>
-            <pc:docMk/>
-            <pc:sldMk cId="4122454811" sldId="258"/>
-            <ac:picMk id="11" creationId="{AD8D15DD-01E6-5EEE-81DA-415EAB3C27B5}"/>
-          </ac:picMkLst>
-        </pc:picChg>
       </pc:sldChg>
     </pc:docChg>
   </pc:docChgLst>
@@ -616,7 +854,7 @@
           <a:p>
             <a:fld id="{D7BDDC53-94E9-4C2F-ADFC-AF3EDE6B1DDE}" type="datetimeFigureOut">
               <a:rPr lang="en-US" smtClean="0"/>
-              <a:t>5/15/2026</a:t>
+              <a:t>5/22/2026</a:t>
             </a:fld>
             <a:endParaRPr lang="en-US"/>
           </a:p>
@@ -814,7 +1052,7 @@
           <a:p>
             <a:fld id="{D7BDDC53-94E9-4C2F-ADFC-AF3EDE6B1DDE}" type="datetimeFigureOut">
               <a:rPr lang="en-US" smtClean="0"/>
-              <a:t>5/15/2026</a:t>
+              <a:t>5/22/2026</a:t>
             </a:fld>
             <a:endParaRPr lang="en-US"/>
           </a:p>
@@ -1022,7 +1260,7 @@
           <a:p>
             <a:fld id="{D7BDDC53-94E9-4C2F-ADFC-AF3EDE6B1DDE}" type="datetimeFigureOut">
               <a:rPr lang="en-US" smtClean="0"/>
-              <a:t>5/15/2026</a:t>
+              <a:t>5/22/2026</a:t>
             </a:fld>
             <a:endParaRPr lang="en-US"/>
           </a:p>
@@ -1220,7 +1458,7 @@
           <a:p>
             <a:fld id="{D7BDDC53-94E9-4C2F-ADFC-AF3EDE6B1DDE}" type="datetimeFigureOut">
               <a:rPr lang="en-US" smtClean="0"/>
-              <a:t>5/15/2026</a:t>
+              <a:t>5/22/2026</a:t>
             </a:fld>
             <a:endParaRPr lang="en-US"/>
           </a:p>
@@ -1495,7 +1733,7 @@
           <a:p>
             <a:fld id="{D7BDDC53-94E9-4C2F-ADFC-AF3EDE6B1DDE}" type="datetimeFigureOut">
               <a:rPr lang="en-US" smtClean="0"/>
-              <a:t>5/15/2026</a:t>
+              <a:t>5/22/2026</a:t>
             </a:fld>
             <a:endParaRPr lang="en-US"/>
           </a:p>
@@ -1760,7 +1998,7 @@
           <a:p>
             <a:fld id="{D7BDDC53-94E9-4C2F-ADFC-AF3EDE6B1DDE}" type="datetimeFigureOut">
               <a:rPr lang="en-US" smtClean="0"/>
-              <a:t>5/15/2026</a:t>
+              <a:t>5/22/2026</a:t>
             </a:fld>
             <a:endParaRPr lang="en-US"/>
           </a:p>
@@ -2172,7 +2410,7 @@
           <a:p>
             <a:fld id="{D7BDDC53-94E9-4C2F-ADFC-AF3EDE6B1DDE}" type="datetimeFigureOut">
               <a:rPr lang="en-US" smtClean="0"/>
-              <a:t>5/15/2026</a:t>
+              <a:t>5/22/2026</a:t>
             </a:fld>
             <a:endParaRPr lang="en-US"/>
           </a:p>
@@ -2313,7 +2551,7 @@
           <a:p>
             <a:fld id="{D7BDDC53-94E9-4C2F-ADFC-AF3EDE6B1DDE}" type="datetimeFigureOut">
               <a:rPr lang="en-US" smtClean="0"/>
-              <a:t>5/15/2026</a:t>
+              <a:t>5/22/2026</a:t>
             </a:fld>
             <a:endParaRPr lang="en-US"/>
           </a:p>
@@ -2426,7 +2664,7 @@
           <a:p>
             <a:fld id="{D7BDDC53-94E9-4C2F-ADFC-AF3EDE6B1DDE}" type="datetimeFigureOut">
               <a:rPr lang="en-US" smtClean="0"/>
-              <a:t>5/15/2026</a:t>
+              <a:t>5/22/2026</a:t>
             </a:fld>
             <a:endParaRPr lang="en-US"/>
           </a:p>
@@ -2737,7 +2975,7 @@
           <a:p>
             <a:fld id="{D7BDDC53-94E9-4C2F-ADFC-AF3EDE6B1DDE}" type="datetimeFigureOut">
               <a:rPr lang="en-US" smtClean="0"/>
-              <a:t>5/15/2026</a:t>
+              <a:t>5/22/2026</a:t>
             </a:fld>
             <a:endParaRPr lang="en-US"/>
           </a:p>
@@ -3025,7 +3263,7 @@
           <a:p>
             <a:fld id="{D7BDDC53-94E9-4C2F-ADFC-AF3EDE6B1DDE}" type="datetimeFigureOut">
               <a:rPr lang="en-US" smtClean="0"/>
-              <a:t>5/15/2026</a:t>
+              <a:t>5/22/2026</a:t>
             </a:fld>
             <a:endParaRPr lang="en-US"/>
           </a:p>
@@ -3266,7 +3504,7 @@
           <a:p>
             <a:fld id="{D7BDDC53-94E9-4C2F-ADFC-AF3EDE6B1DDE}" type="datetimeFigureOut">
               <a:rPr lang="en-US" smtClean="0"/>
-              <a:t>5/15/2026</a:t>
+              <a:t>5/22/2026</a:t>
             </a:fld>
             <a:endParaRPr lang="en-US"/>
           </a:p>
@@ -3688,888 +3926,6 @@
           <p:cNvPr id="5" name="Picture 4">
             <a:extLst>
               <a:ext uri="{FF2B5EF4-FFF2-40B4-BE49-F238E27FC236}">
-                <a16:creationId xmlns:a16="http://schemas.microsoft.com/office/drawing/2014/main" id="{AE8BFCDB-8BDF-E5FD-7CEE-3B77F6FA0F27}"/>
-              </a:ext>
-            </a:extLst>
-          </p:cNvPr>
-          <p:cNvPicPr>
-            <a:picLocks noChangeAspect="1"/>
-          </p:cNvPicPr>
-          <p:nvPr/>
-        </p:nvPicPr>
-        <p:blipFill>
-          <a:blip r:embed="rId2">
-            <a:extLst>
-              <a:ext uri="{28A0092B-C50C-407E-A947-70E740481C1C}">
-                <a14:useLocalDpi xmlns:a14="http://schemas.microsoft.com/office/drawing/2010/main" val="0"/>
-              </a:ext>
-            </a:extLst>
-          </a:blip>
-          <a:srcRect l="2016"/>
-          <a:stretch>
-            <a:fillRect/>
-          </a:stretch>
-        </p:blipFill>
-        <p:spPr>
-          <a:xfrm>
-            <a:off x="4298950" y="2532886"/>
-            <a:ext cx="2929786" cy="896114"/>
-          </a:xfrm>
-          <a:prstGeom prst="rect">
-            <a:avLst/>
-          </a:prstGeom>
-        </p:spPr>
-      </p:pic>
-      <p:cxnSp>
-        <p:nvCxnSpPr>
-          <p:cNvPr id="7" name="Straight Arrow Connector 6">
-            <a:extLst>
-              <a:ext uri="{FF2B5EF4-FFF2-40B4-BE49-F238E27FC236}">
-                <a16:creationId xmlns:a16="http://schemas.microsoft.com/office/drawing/2014/main" id="{C9731943-CCF6-746A-FB90-A028B784C0F4}"/>
-              </a:ext>
-            </a:extLst>
-          </p:cNvPr>
-          <p:cNvCxnSpPr>
-            <a:cxnSpLocks/>
-          </p:cNvCxnSpPr>
-          <p:nvPr/>
-        </p:nvCxnSpPr>
-        <p:spPr>
-          <a:xfrm flipH="1" flipV="1">
-            <a:off x="4462463" y="3045619"/>
-            <a:ext cx="383381" cy="126051"/>
-          </a:xfrm>
-          <a:prstGeom prst="straightConnector1">
-            <a:avLst/>
-          </a:prstGeom>
-          <a:ln w="9525">
-            <a:solidFill>
-              <a:schemeClr val="bg1"/>
-            </a:solidFill>
-            <a:tailEnd type="triangle"/>
-          </a:ln>
-        </p:spPr>
-        <p:style>
-          <a:lnRef idx="2">
-            <a:schemeClr val="accent1"/>
-          </a:lnRef>
-          <a:fillRef idx="0">
-            <a:schemeClr val="accent1"/>
-          </a:fillRef>
-          <a:effectRef idx="1">
-            <a:schemeClr val="accent1"/>
-          </a:effectRef>
-          <a:fontRef idx="minor">
-            <a:schemeClr val="tx1"/>
-          </a:fontRef>
-        </p:style>
-      </p:cxnSp>
-      <p:cxnSp>
-        <p:nvCxnSpPr>
-          <p:cNvPr id="8" name="Straight Arrow Connector 7">
-            <a:extLst>
-              <a:ext uri="{FF2B5EF4-FFF2-40B4-BE49-F238E27FC236}">
-                <a16:creationId xmlns:a16="http://schemas.microsoft.com/office/drawing/2014/main" id="{138FE7A0-0D96-E7C5-7242-61C80C5B816E}"/>
-              </a:ext>
-            </a:extLst>
-          </p:cNvPr>
-          <p:cNvCxnSpPr>
-            <a:cxnSpLocks/>
-          </p:cNvCxnSpPr>
-          <p:nvPr/>
-        </p:nvCxnSpPr>
-        <p:spPr>
-          <a:xfrm flipV="1">
-            <a:off x="4845844" y="3144508"/>
-            <a:ext cx="433387" cy="27162"/>
-          </a:xfrm>
-          <a:prstGeom prst="straightConnector1">
-            <a:avLst/>
-          </a:prstGeom>
-          <a:ln w="9525">
-            <a:solidFill>
-              <a:schemeClr val="bg1"/>
-            </a:solidFill>
-            <a:tailEnd type="triangle"/>
-          </a:ln>
-        </p:spPr>
-        <p:style>
-          <a:lnRef idx="2">
-            <a:schemeClr val="accent1"/>
-          </a:lnRef>
-          <a:fillRef idx="0">
-            <a:schemeClr val="accent1"/>
-          </a:fillRef>
-          <a:effectRef idx="1">
-            <a:schemeClr val="accent1"/>
-          </a:effectRef>
-          <a:fontRef idx="minor">
-            <a:schemeClr val="tx1"/>
-          </a:fontRef>
-        </p:style>
-      </p:cxnSp>
-      <p:sp>
-        <p:nvSpPr>
-          <p:cNvPr id="10" name="Right Brace 9">
-            <a:extLst>
-              <a:ext uri="{FF2B5EF4-FFF2-40B4-BE49-F238E27FC236}">
-                <a16:creationId xmlns:a16="http://schemas.microsoft.com/office/drawing/2014/main" id="{8618C7CB-B30B-949A-AA4F-6C1CE713FFCA}"/>
-              </a:ext>
-            </a:extLst>
-          </p:cNvPr>
-          <p:cNvSpPr/>
-          <p:nvPr/>
-        </p:nvSpPr>
-        <p:spPr>
-          <a:xfrm rot="5400000">
-            <a:off x="5248121" y="2693191"/>
-            <a:ext cx="65708" cy="784538"/>
-          </a:xfrm>
-          <a:prstGeom prst="rightBrace">
-            <a:avLst>
-              <a:gd name="adj1" fmla="val 62570"/>
-              <a:gd name="adj2" fmla="val 46738"/>
-            </a:avLst>
-          </a:prstGeom>
-          <a:ln w="9525">
-            <a:solidFill>
-              <a:schemeClr val="bg1"/>
-            </a:solidFill>
-          </a:ln>
-        </p:spPr>
-        <p:style>
-          <a:lnRef idx="2">
-            <a:schemeClr val="accent1"/>
-          </a:lnRef>
-          <a:fillRef idx="0">
-            <a:schemeClr val="accent1"/>
-          </a:fillRef>
-          <a:effectRef idx="1">
-            <a:schemeClr val="accent1"/>
-          </a:effectRef>
-          <a:fontRef idx="minor">
-            <a:schemeClr val="tx1"/>
-          </a:fontRef>
-        </p:style>
-        <p:txBody>
-          <a:bodyPr rtlCol="0" anchor="ctr"/>
-          <a:lstStyle/>
-          <a:p>
-            <a:pPr algn="ctr"/>
-            <a:endParaRPr lang="en-US"/>
-          </a:p>
-        </p:txBody>
-      </p:sp>
-      <p:sp>
-        <p:nvSpPr>
-          <p:cNvPr id="11" name="TextBox 10">
-            <a:extLst>
-              <a:ext uri="{FF2B5EF4-FFF2-40B4-BE49-F238E27FC236}">
-                <a16:creationId xmlns:a16="http://schemas.microsoft.com/office/drawing/2014/main" id="{B76C0F0F-EA28-FE99-B01C-051336B89243}"/>
-              </a:ext>
-            </a:extLst>
-          </p:cNvPr>
-          <p:cNvSpPr txBox="1"/>
-          <p:nvPr/>
-        </p:nvSpPr>
-        <p:spPr>
-          <a:xfrm>
-            <a:off x="5139528" y="2739871"/>
-            <a:ext cx="348172" cy="215444"/>
-          </a:xfrm>
-          <a:prstGeom prst="rect">
-            <a:avLst/>
-          </a:prstGeom>
-          <a:noFill/>
-        </p:spPr>
-        <p:txBody>
-          <a:bodyPr wrap="none" rtlCol="0">
-            <a:spAutoFit/>
-          </a:bodyPr>
-          <a:lstStyle/>
-          <a:p>
-            <a:r>
-              <a:rPr lang="en-US" sz="800" dirty="0">
-                <a:solidFill>
-                  <a:schemeClr val="bg1"/>
-                </a:solidFill>
-              </a:rPr>
-              <a:t>003</a:t>
-            </a:r>
-          </a:p>
-        </p:txBody>
-      </p:sp>
-      <p:sp>
-        <p:nvSpPr>
-          <p:cNvPr id="12" name="TextBox 11">
-            <a:extLst>
-              <a:ext uri="{FF2B5EF4-FFF2-40B4-BE49-F238E27FC236}">
-                <a16:creationId xmlns:a16="http://schemas.microsoft.com/office/drawing/2014/main" id="{A4088FB5-8429-9387-AE1B-16BB52B9B2E4}"/>
-              </a:ext>
-            </a:extLst>
-          </p:cNvPr>
-          <p:cNvSpPr txBox="1"/>
-          <p:nvPr/>
-        </p:nvSpPr>
-        <p:spPr>
-          <a:xfrm>
-            <a:off x="6250025" y="2765499"/>
-            <a:ext cx="348172" cy="215444"/>
-          </a:xfrm>
-          <a:prstGeom prst="rect">
-            <a:avLst/>
-          </a:prstGeom>
-          <a:noFill/>
-        </p:spPr>
-        <p:txBody>
-          <a:bodyPr wrap="none" rtlCol="0">
-            <a:spAutoFit/>
-          </a:bodyPr>
-          <a:lstStyle/>
-          <a:p>
-            <a:r>
-              <a:rPr lang="en-US" sz="800" dirty="0">
-                <a:solidFill>
-                  <a:schemeClr val="bg1"/>
-                </a:solidFill>
-              </a:rPr>
-              <a:t>006</a:t>
-            </a:r>
-          </a:p>
-        </p:txBody>
-      </p:sp>
-      <mc:AlternateContent xmlns:mc="http://schemas.openxmlformats.org/markup-compatibility/2006">
-        <mc:Choice xmlns:a14="http://schemas.microsoft.com/office/drawing/2010/main" Requires="a14">
-          <p:sp>
-            <p:nvSpPr>
-              <p:cNvPr id="16" name="TextBox 15">
-                <a:extLst>
-                  <a:ext uri="{FF2B5EF4-FFF2-40B4-BE49-F238E27FC236}">
-                    <a16:creationId xmlns:a16="http://schemas.microsoft.com/office/drawing/2014/main" id="{9B45FA36-06E6-AF3C-C424-DEDE05823927}"/>
-                  </a:ext>
-                </a:extLst>
-              </p:cNvPr>
-              <p:cNvSpPr txBox="1"/>
-              <p:nvPr/>
-            </p:nvSpPr>
-            <p:spPr>
-              <a:xfrm>
-                <a:off x="4654153" y="3133115"/>
-                <a:ext cx="360099" cy="217367"/>
-              </a:xfrm>
-              <a:prstGeom prst="rect">
-                <a:avLst/>
-              </a:prstGeom>
-              <a:noFill/>
-            </p:spPr>
-            <p:txBody>
-              <a:bodyPr wrap="none" rtlCol="0">
-                <a:spAutoFit/>
-              </a:bodyPr>
-              <a:lstStyle/>
-              <a:p>
-                <a:pPr/>
-                <a14:m>
-                  <m:oMathPara xmlns:m="http://schemas.openxmlformats.org/officeDocument/2006/math">
-                    <m:oMathParaPr>
-                      <m:jc m:val="centerGroup"/>
-                    </m:oMathParaPr>
-                    <m:oMath xmlns:m="http://schemas.openxmlformats.org/officeDocument/2006/math">
-                      <m:f>
-                        <m:fPr>
-                          <m:type m:val="skw"/>
-                          <m:ctrlPr>
-                            <a:rPr lang="en-US" sz="600" i="1" smtClean="0">
-                              <a:solidFill>
-                                <a:schemeClr val="bg1"/>
-                              </a:solidFill>
-                              <a:latin typeface="Cambria Math" panose="02040503050406030204" pitchFamily="18" charset="0"/>
-                            </a:rPr>
-                          </m:ctrlPr>
-                        </m:fPr>
-                        <m:num>
-                          <m:r>
-                            <m:rPr>
-                              <m:sty m:val="p"/>
-                            </m:rPr>
-                            <a:rPr lang="en-US" sz="600" b="0" i="0" smtClean="0">
-                              <a:solidFill>
-                                <a:schemeClr val="bg1"/>
-                              </a:solidFill>
-                              <a:latin typeface="Cambria Math" panose="02040503050406030204" pitchFamily="18" charset="0"/>
-                            </a:rPr>
-                            <m:t>Δ</m:t>
-                          </m:r>
-                          <m:r>
-                            <a:rPr lang="en-US" sz="600" b="0" i="1" smtClean="0">
-                              <a:solidFill>
-                                <a:schemeClr val="bg1"/>
-                              </a:solidFill>
-                              <a:latin typeface="Cambria Math" panose="02040503050406030204" pitchFamily="18" charset="0"/>
-                            </a:rPr>
-                            <m:t>𝜆</m:t>
-                          </m:r>
-                        </m:num>
-                        <m:den>
-                          <m:r>
-                            <a:rPr lang="en-US" sz="600" b="0" i="1" smtClean="0">
-                              <a:solidFill>
-                                <a:schemeClr val="bg1"/>
-                              </a:solidFill>
-                              <a:latin typeface="Cambria Math" panose="02040503050406030204" pitchFamily="18" charset="0"/>
-                            </a:rPr>
-                            <m:t>𝜆</m:t>
-                          </m:r>
-                        </m:den>
-                      </m:f>
-                    </m:oMath>
-                  </m:oMathPara>
-                </a14:m>
-                <a:endParaRPr lang="en-US" sz="600" dirty="0">
-                  <a:solidFill>
-                    <a:schemeClr val="bg1"/>
-                  </a:solidFill>
-                </a:endParaRPr>
-              </a:p>
-            </p:txBody>
-          </p:sp>
-        </mc:Choice>
-        <mc:Fallback>
-          <p:sp>
-            <p:nvSpPr>
-              <p:cNvPr id="16" name="TextBox 15">
-                <a:extLst>
-                  <a:ext uri="{FF2B5EF4-FFF2-40B4-BE49-F238E27FC236}">
-                    <a16:creationId xmlns:a16="http://schemas.microsoft.com/office/drawing/2014/main" id="{9B45FA36-06E6-AF3C-C424-DEDE05823927}"/>
-                  </a:ext>
-                </a:extLst>
-              </p:cNvPr>
-              <p:cNvSpPr txBox="1">
-                <a:spLocks noRot="1" noChangeAspect="1" noMove="1" noResize="1" noEditPoints="1" noAdjustHandles="1" noChangeArrowheads="1" noChangeShapeType="1" noTextEdit="1"/>
-              </p:cNvSpPr>
-              <p:nvPr/>
-            </p:nvSpPr>
-            <p:spPr>
-              <a:xfrm>
-                <a:off x="4654153" y="3133115"/>
-                <a:ext cx="360099" cy="217367"/>
-              </a:xfrm>
-              <a:prstGeom prst="rect">
-                <a:avLst/>
-              </a:prstGeom>
-              <a:blipFill>
-                <a:blip r:embed="rId3"/>
-                <a:stretch>
-                  <a:fillRect t="-72222" r="-48333" b="-122222"/>
-                </a:stretch>
-              </a:blipFill>
-            </p:spPr>
-            <p:txBody>
-              <a:bodyPr/>
-              <a:lstStyle/>
-              <a:p>
-                <a:r>
-                  <a:rPr lang="en-US">
-                    <a:noFill/>
-                  </a:rPr>
-                  <a:t> </a:t>
-                </a:r>
-              </a:p>
-            </p:txBody>
-          </p:sp>
-        </mc:Fallback>
-      </mc:AlternateContent>
-      <p:cxnSp>
-        <p:nvCxnSpPr>
-          <p:cNvPr id="28" name="Straight Arrow Connector 27">
-            <a:extLst>
-              <a:ext uri="{FF2B5EF4-FFF2-40B4-BE49-F238E27FC236}">
-                <a16:creationId xmlns:a16="http://schemas.microsoft.com/office/drawing/2014/main" id="{9596E84D-1919-1520-0210-2BB0B14D1C7F}"/>
-              </a:ext>
-            </a:extLst>
-          </p:cNvPr>
-          <p:cNvCxnSpPr>
-            <a:cxnSpLocks/>
-          </p:cNvCxnSpPr>
-          <p:nvPr/>
-        </p:nvCxnSpPr>
-        <p:spPr>
-          <a:xfrm>
-            <a:off x="4438650" y="3473452"/>
-            <a:ext cx="2790086" cy="0"/>
-          </a:xfrm>
-          <a:prstGeom prst="straightConnector1">
-            <a:avLst/>
-          </a:prstGeom>
-          <a:ln w="12700">
-            <a:solidFill>
-              <a:schemeClr val="tx1"/>
-            </a:solidFill>
-            <a:tailEnd type="triangle"/>
-          </a:ln>
-        </p:spPr>
-        <p:style>
-          <a:lnRef idx="2">
-            <a:schemeClr val="accent1"/>
-          </a:lnRef>
-          <a:fillRef idx="0">
-            <a:schemeClr val="accent1"/>
-          </a:fillRef>
-          <a:effectRef idx="1">
-            <a:schemeClr val="accent1"/>
-          </a:effectRef>
-          <a:fontRef idx="minor">
-            <a:schemeClr val="tx1"/>
-          </a:fontRef>
-        </p:style>
-      </p:cxnSp>
-      <mc:AlternateContent xmlns:mc="http://schemas.openxmlformats.org/markup-compatibility/2006">
-        <mc:Choice xmlns:a14="http://schemas.microsoft.com/office/drawing/2010/main" Requires="a14">
-          <p:sp>
-            <p:nvSpPr>
-              <p:cNvPr id="33" name="TextBox 32">
-                <a:extLst>
-                  <a:ext uri="{FF2B5EF4-FFF2-40B4-BE49-F238E27FC236}">
-                    <a16:creationId xmlns:a16="http://schemas.microsoft.com/office/drawing/2014/main" id="{0B6E10FB-2E56-5380-BBCE-0420BD769738}"/>
-                  </a:ext>
-                </a:extLst>
-              </p:cNvPr>
-              <p:cNvSpPr txBox="1"/>
-              <p:nvPr/>
-            </p:nvSpPr>
-            <p:spPr>
-              <a:xfrm>
-                <a:off x="4200109" y="3416520"/>
-                <a:ext cx="319959" cy="153888"/>
-              </a:xfrm>
-              <a:prstGeom prst="rect">
-                <a:avLst/>
-              </a:prstGeom>
-              <a:noFill/>
-            </p:spPr>
-            <p:txBody>
-              <a:bodyPr wrap="none" rtlCol="0">
-                <a:spAutoFit/>
-              </a:bodyPr>
-              <a:lstStyle/>
-              <a:p>
-                <a:pPr/>
-                <a14:m>
-                  <m:oMathPara xmlns:m="http://schemas.openxmlformats.org/officeDocument/2006/math">
-                    <m:oMathParaPr>
-                      <m:jc m:val="centerGroup"/>
-                    </m:oMathParaPr>
-                    <m:oMath xmlns:m="http://schemas.openxmlformats.org/officeDocument/2006/math">
-                      <m:r>
-                        <a:rPr lang="en-US" sz="400" b="0" i="1" smtClean="0">
-                          <a:latin typeface="Cambria Math" panose="02040503050406030204" pitchFamily="18" charset="0"/>
-                        </a:rPr>
-                        <m:t>𝐿</m:t>
-                      </m:r>
-                      <m:r>
-                        <a:rPr lang="en-US" sz="400" b="0" i="1" smtClean="0">
-                          <a:latin typeface="Cambria Math" panose="02040503050406030204" pitchFamily="18" charset="0"/>
-                        </a:rPr>
-                        <m:t>=0</m:t>
-                      </m:r>
-                    </m:oMath>
-                  </m:oMathPara>
-                </a14:m>
-                <a:endParaRPr lang="en-US" sz="400" dirty="0"/>
-              </a:p>
-            </p:txBody>
-          </p:sp>
-        </mc:Choice>
-        <mc:Fallback>
-          <p:sp>
-            <p:nvSpPr>
-              <p:cNvPr id="33" name="TextBox 32">
-                <a:extLst>
-                  <a:ext uri="{FF2B5EF4-FFF2-40B4-BE49-F238E27FC236}">
-                    <a16:creationId xmlns:a16="http://schemas.microsoft.com/office/drawing/2014/main" id="{0B6E10FB-2E56-5380-BBCE-0420BD769738}"/>
-                  </a:ext>
-                </a:extLst>
-              </p:cNvPr>
-              <p:cNvSpPr txBox="1">
-                <a:spLocks noRot="1" noChangeAspect="1" noMove="1" noResize="1" noEditPoints="1" noAdjustHandles="1" noChangeArrowheads="1" noChangeShapeType="1" noTextEdit="1"/>
-              </p:cNvSpPr>
-              <p:nvPr/>
-            </p:nvSpPr>
-            <p:spPr>
-              <a:xfrm>
-                <a:off x="4200109" y="3416520"/>
-                <a:ext cx="319959" cy="153888"/>
-              </a:xfrm>
-              <a:prstGeom prst="rect">
-                <a:avLst/>
-              </a:prstGeom>
-              <a:blipFill>
-                <a:blip r:embed="rId4"/>
-                <a:stretch>
-                  <a:fillRect/>
-                </a:stretch>
-              </a:blipFill>
-            </p:spPr>
-            <p:txBody>
-              <a:bodyPr/>
-              <a:lstStyle/>
-              <a:p>
-                <a:r>
-                  <a:rPr lang="en-US">
-                    <a:noFill/>
-                  </a:rPr>
-                  <a:t> </a:t>
-                </a:r>
-              </a:p>
-            </p:txBody>
-          </p:sp>
-        </mc:Fallback>
-      </mc:AlternateContent>
-      <p:cxnSp>
-        <p:nvCxnSpPr>
-          <p:cNvPr id="44" name="Straight Connector 43">
-            <a:extLst>
-              <a:ext uri="{FF2B5EF4-FFF2-40B4-BE49-F238E27FC236}">
-                <a16:creationId xmlns:a16="http://schemas.microsoft.com/office/drawing/2014/main" id="{2A8D7ABE-F464-4002-B020-74B5BA89BF6F}"/>
-              </a:ext>
-            </a:extLst>
-          </p:cNvPr>
-          <p:cNvCxnSpPr>
-            <a:cxnSpLocks/>
-          </p:cNvCxnSpPr>
-          <p:nvPr/>
-        </p:nvCxnSpPr>
-        <p:spPr>
-          <a:xfrm>
-            <a:off x="4239823" y="2819755"/>
-            <a:ext cx="0" cy="0"/>
-          </a:xfrm>
-          <a:prstGeom prst="line">
-            <a:avLst/>
-          </a:prstGeom>
-        </p:spPr>
-        <p:style>
-          <a:lnRef idx="2">
-            <a:schemeClr val="accent1"/>
-          </a:lnRef>
-          <a:fillRef idx="0">
-            <a:schemeClr val="accent1"/>
-          </a:fillRef>
-          <a:effectRef idx="1">
-            <a:schemeClr val="accent1"/>
-          </a:effectRef>
-          <a:fontRef idx="minor">
-            <a:schemeClr val="tx1"/>
-          </a:fontRef>
-        </p:style>
-      </p:cxnSp>
-      <p:cxnSp>
-        <p:nvCxnSpPr>
-          <p:cNvPr id="47" name="Straight Connector 46">
-            <a:extLst>
-              <a:ext uri="{FF2B5EF4-FFF2-40B4-BE49-F238E27FC236}">
-                <a16:creationId xmlns:a16="http://schemas.microsoft.com/office/drawing/2014/main" id="{C3C29276-9F90-DB1E-78F6-E0BD2A605DF5}"/>
-              </a:ext>
-            </a:extLst>
-          </p:cNvPr>
-          <p:cNvCxnSpPr>
-            <a:cxnSpLocks/>
-          </p:cNvCxnSpPr>
-          <p:nvPr/>
-        </p:nvCxnSpPr>
-        <p:spPr>
-          <a:xfrm>
-            <a:off x="4276725" y="2992294"/>
-            <a:ext cx="130969" cy="0"/>
-          </a:xfrm>
-          <a:prstGeom prst="line">
-            <a:avLst/>
-          </a:prstGeom>
-          <a:ln w="9525">
-            <a:prstDash val="sysDot"/>
-          </a:ln>
-        </p:spPr>
-        <p:style>
-          <a:lnRef idx="2">
-            <a:schemeClr val="dk1"/>
-          </a:lnRef>
-          <a:fillRef idx="0">
-            <a:schemeClr val="dk1"/>
-          </a:fillRef>
-          <a:effectRef idx="1">
-            <a:schemeClr val="dk1"/>
-          </a:effectRef>
-          <a:fontRef idx="minor">
-            <a:schemeClr val="tx1"/>
-          </a:fontRef>
-        </p:style>
-      </p:cxnSp>
-      <p:cxnSp>
-        <p:nvCxnSpPr>
-          <p:cNvPr id="74" name="Straight Connector 73">
-            <a:extLst>
-              <a:ext uri="{FF2B5EF4-FFF2-40B4-BE49-F238E27FC236}">
-                <a16:creationId xmlns:a16="http://schemas.microsoft.com/office/drawing/2014/main" id="{4B13C3A9-BC74-0F07-D1D8-32F93984EC56}"/>
-              </a:ext>
-            </a:extLst>
-          </p:cNvPr>
-          <p:cNvCxnSpPr>
-            <a:cxnSpLocks/>
-          </p:cNvCxnSpPr>
-          <p:nvPr/>
-        </p:nvCxnSpPr>
-        <p:spPr>
-          <a:xfrm>
-            <a:off x="4307681" y="3410820"/>
-            <a:ext cx="0" cy="53899"/>
-          </a:xfrm>
-          <a:prstGeom prst="line">
-            <a:avLst/>
-          </a:prstGeom>
-          <a:ln w="9525">
-            <a:prstDash val="sysDot"/>
-          </a:ln>
-        </p:spPr>
-        <p:style>
-          <a:lnRef idx="2">
-            <a:schemeClr val="dk1"/>
-          </a:lnRef>
-          <a:fillRef idx="0">
-            <a:schemeClr val="dk1"/>
-          </a:fillRef>
-          <a:effectRef idx="1">
-            <a:schemeClr val="dk1"/>
-          </a:effectRef>
-          <a:fontRef idx="minor">
-            <a:schemeClr val="tx1"/>
-          </a:fontRef>
-        </p:style>
-      </p:cxnSp>
-      <mc:AlternateContent xmlns:mc="http://schemas.openxmlformats.org/markup-compatibility/2006">
-        <mc:Choice xmlns:a14="http://schemas.microsoft.com/office/drawing/2010/main" Requires="a14">
-          <p:sp>
-            <p:nvSpPr>
-              <p:cNvPr id="2" name="TextBox 1">
-                <a:extLst>
-                  <a:ext uri="{FF2B5EF4-FFF2-40B4-BE49-F238E27FC236}">
-                    <a16:creationId xmlns:a16="http://schemas.microsoft.com/office/drawing/2014/main" id="{837BD0EC-45C4-CF78-7655-8569945B6392}"/>
-                  </a:ext>
-                </a:extLst>
-              </p:cNvPr>
-              <p:cNvSpPr txBox="1"/>
-              <p:nvPr/>
-            </p:nvSpPr>
-            <p:spPr>
-              <a:xfrm rot="16200000">
-                <a:off x="4071306" y="2917676"/>
-                <a:ext cx="368781" cy="153888"/>
-              </a:xfrm>
-              <a:prstGeom prst="rect">
-                <a:avLst/>
-              </a:prstGeom>
-              <a:noFill/>
-            </p:spPr>
-            <p:txBody>
-              <a:bodyPr wrap="square" rtlCol="0">
-                <a:spAutoFit/>
-              </a:bodyPr>
-              <a:lstStyle/>
-              <a:p>
-                <a:pPr/>
-                <a14:m>
-                  <m:oMathPara xmlns:m="http://schemas.openxmlformats.org/officeDocument/2006/math">
-                    <m:oMathParaPr>
-                      <m:jc m:val="centerGroup"/>
-                    </m:oMathParaPr>
-                    <m:oMath xmlns:m="http://schemas.openxmlformats.org/officeDocument/2006/math">
-                      <m:r>
-                        <a:rPr lang="en-US" sz="400" b="0" i="1" smtClean="0">
-                          <a:latin typeface="Cambria Math" panose="02040503050406030204" pitchFamily="18" charset="0"/>
-                        </a:rPr>
-                        <m:t>𝑚</m:t>
-                      </m:r>
-                      <m:r>
-                        <a:rPr lang="en-US" sz="400" b="0" i="1" smtClean="0">
-                          <a:latin typeface="Cambria Math" panose="02040503050406030204" pitchFamily="18" charset="0"/>
-                        </a:rPr>
-                        <m:t>=0</m:t>
-                      </m:r>
-                    </m:oMath>
-                  </m:oMathPara>
-                </a14:m>
-                <a:endParaRPr lang="en-US" sz="400" dirty="0"/>
-              </a:p>
-            </p:txBody>
-          </p:sp>
-        </mc:Choice>
-        <mc:Fallback>
-          <p:sp>
-            <p:nvSpPr>
-              <p:cNvPr id="2" name="TextBox 1">
-                <a:extLst>
-                  <a:ext uri="{FF2B5EF4-FFF2-40B4-BE49-F238E27FC236}">
-                    <a16:creationId xmlns:a16="http://schemas.microsoft.com/office/drawing/2014/main" id="{837BD0EC-45C4-CF78-7655-8569945B6392}"/>
-                  </a:ext>
-                </a:extLst>
-              </p:cNvPr>
-              <p:cNvSpPr txBox="1">
-                <a:spLocks noRot="1" noChangeAspect="1" noMove="1" noResize="1" noEditPoints="1" noAdjustHandles="1" noChangeArrowheads="1" noChangeShapeType="1" noTextEdit="1"/>
-              </p:cNvSpPr>
-              <p:nvPr/>
-            </p:nvSpPr>
-            <p:spPr>
-              <a:xfrm rot="16200000">
-                <a:off x="4071306" y="2917676"/>
-                <a:ext cx="368781" cy="153888"/>
-              </a:xfrm>
-              <a:prstGeom prst="rect">
-                <a:avLst/>
-              </a:prstGeom>
-              <a:blipFill>
-                <a:blip r:embed="rId5"/>
-                <a:stretch>
-                  <a:fillRect/>
-                </a:stretch>
-              </a:blipFill>
-            </p:spPr>
-            <p:txBody>
-              <a:bodyPr/>
-              <a:lstStyle/>
-              <a:p>
-                <a:r>
-                  <a:rPr lang="en-US">
-                    <a:noFill/>
-                  </a:rPr>
-                  <a:t> </a:t>
-                </a:r>
-              </a:p>
-            </p:txBody>
-          </p:sp>
-        </mc:Fallback>
-      </mc:AlternateContent>
-      <p:cxnSp>
-        <p:nvCxnSpPr>
-          <p:cNvPr id="3" name="Straight Arrow Connector 2">
-            <a:extLst>
-              <a:ext uri="{FF2B5EF4-FFF2-40B4-BE49-F238E27FC236}">
-                <a16:creationId xmlns:a16="http://schemas.microsoft.com/office/drawing/2014/main" id="{E6EA08B8-9557-85A5-7CB2-8B53B766AF89}"/>
-              </a:ext>
-            </a:extLst>
-          </p:cNvPr>
-          <p:cNvCxnSpPr>
-            <a:cxnSpLocks/>
-          </p:cNvCxnSpPr>
-          <p:nvPr/>
-        </p:nvCxnSpPr>
-        <p:spPr>
-          <a:xfrm>
-            <a:off x="4256399" y="3100388"/>
-            <a:ext cx="0" cy="326231"/>
-          </a:xfrm>
-          <a:prstGeom prst="straightConnector1">
-            <a:avLst/>
-          </a:prstGeom>
-          <a:ln w="12700">
-            <a:solidFill>
-              <a:schemeClr val="tx1"/>
-            </a:solidFill>
-            <a:tailEnd type="triangle"/>
-          </a:ln>
-        </p:spPr>
-        <p:style>
-          <a:lnRef idx="2">
-            <a:schemeClr val="accent1"/>
-          </a:lnRef>
-          <a:fillRef idx="0">
-            <a:schemeClr val="accent1"/>
-          </a:fillRef>
-          <a:effectRef idx="1">
-            <a:schemeClr val="accent1"/>
-          </a:effectRef>
-          <a:fontRef idx="minor">
-            <a:schemeClr val="tx1"/>
-          </a:fontRef>
-        </p:style>
-      </p:cxnSp>
-      <p:cxnSp>
-        <p:nvCxnSpPr>
-          <p:cNvPr id="13" name="Straight Arrow Connector 12">
-            <a:extLst>
-              <a:ext uri="{FF2B5EF4-FFF2-40B4-BE49-F238E27FC236}">
-                <a16:creationId xmlns:a16="http://schemas.microsoft.com/office/drawing/2014/main" id="{64AA8985-AF08-05D6-F26F-9981B60D3DDE}"/>
-              </a:ext>
-            </a:extLst>
-          </p:cNvPr>
-          <p:cNvCxnSpPr>
-            <a:cxnSpLocks/>
-          </p:cNvCxnSpPr>
-          <p:nvPr/>
-        </p:nvCxnSpPr>
-        <p:spPr>
-          <a:xfrm flipV="1">
-            <a:off x="4256399" y="2532886"/>
-            <a:ext cx="0" cy="374620"/>
-          </a:xfrm>
-          <a:prstGeom prst="straightConnector1">
-            <a:avLst/>
-          </a:prstGeom>
-          <a:ln w="12700">
-            <a:solidFill>
-              <a:schemeClr val="tx1"/>
-            </a:solidFill>
-            <a:tailEnd type="triangle"/>
-          </a:ln>
-        </p:spPr>
-        <p:style>
-          <a:lnRef idx="2">
-            <a:schemeClr val="accent1"/>
-          </a:lnRef>
-          <a:fillRef idx="0">
-            <a:schemeClr val="accent1"/>
-          </a:fillRef>
-          <a:effectRef idx="1">
-            <a:schemeClr val="accent1"/>
-          </a:effectRef>
-          <a:fontRef idx="minor">
-            <a:schemeClr val="tx1"/>
-          </a:fontRef>
-        </p:style>
-      </p:cxnSp>
-    </p:spTree>
-    <p:extLst>
-      <p:ext uri="{BB962C8B-B14F-4D97-AF65-F5344CB8AC3E}">
-        <p14:creationId xmlns:p14="http://schemas.microsoft.com/office/powerpoint/2010/main" val="2316372449"/>
-      </p:ext>
-    </p:extLst>
-  </p:cSld>
-  <p:clrMapOvr>
-    <a:masterClrMapping/>
-  </p:clrMapOvr>
-</p:sld>
-</file>
-
-<file path=ppt/slides/slide2.xml><?xml version="1.0" encoding="utf-8"?>
-<p:sld xmlns:a="http://schemas.openxmlformats.org/drawingml/2006/main" xmlns:r="http://schemas.openxmlformats.org/officeDocument/2006/relationships" xmlns:p="http://schemas.openxmlformats.org/presentationml/2006/main">
-  <p:cSld>
-    <p:spTree>
-      <p:nvGrpSpPr>
-        <p:cNvPr id="1" name=""/>
-        <p:cNvGrpSpPr/>
-        <p:nvPr/>
-      </p:nvGrpSpPr>
-      <p:grpSpPr>
-        <a:xfrm>
-          <a:off x="0" y="0"/>
-          <a:ext cx="0" cy="0"/>
-          <a:chOff x="0" y="0"/>
-          <a:chExt cx="0" cy="0"/>
-        </a:xfrm>
-      </p:grpSpPr>
-      <p:pic>
-        <p:nvPicPr>
-          <p:cNvPr id="5" name="Picture 4">
-            <a:extLst>
-              <a:ext uri="{FF2B5EF4-FFF2-40B4-BE49-F238E27FC236}">
                 <a16:creationId xmlns:a16="http://schemas.microsoft.com/office/drawing/2014/main" id="{649CBBC7-4B62-6664-7F06-CE2B66D6E535}"/>
               </a:ext>
             </a:extLst>
@@ -4601,117 +3957,60 @@
           </a:prstGeom>
         </p:spPr>
       </p:pic>
-      <p:grpSp>
-        <p:nvGrpSpPr>
-          <p:cNvPr id="16" name="Group 15">
-            <a:extLst>
-              <a:ext uri="{FF2B5EF4-FFF2-40B4-BE49-F238E27FC236}">
-                <a16:creationId xmlns:a16="http://schemas.microsoft.com/office/drawing/2014/main" id="{E0C9380D-0E01-195E-9440-9F0DFCE6F64F}"/>
-              </a:ext>
-            </a:extLst>
-          </p:cNvPr>
-          <p:cNvGrpSpPr/>
+      <p:sp>
+        <p:nvSpPr>
+          <p:cNvPr id="8" name="Rectangle 7">
+            <a:extLst>
+              <a:ext uri="{FF2B5EF4-FFF2-40B4-BE49-F238E27FC236}">
+                <a16:creationId xmlns:a16="http://schemas.microsoft.com/office/drawing/2014/main" id="{8D252627-EFFF-2191-2497-7F94E37DF607}"/>
+              </a:ext>
+            </a:extLst>
+          </p:cNvPr>
+          <p:cNvSpPr/>
           <p:nvPr/>
-        </p:nvGrpSpPr>
-        <p:grpSpPr>
+        </p:nvSpPr>
+        <p:spPr>
           <a:xfrm>
-            <a:off x="2661396" y="838524"/>
-            <a:ext cx="6869208" cy="2516684"/>
-            <a:chOff x="1197428" y="912316"/>
-            <a:chExt cx="6869208" cy="2516684"/>
+            <a:off x="2724896" y="941166"/>
+            <a:ext cx="6742208" cy="2311400"/>
           </a:xfrm>
-        </p:grpSpPr>
-        <p:sp>
-          <p:nvSpPr>
-            <p:cNvPr id="8" name="Rectangle 7">
-              <a:extLst>
-                <a:ext uri="{FF2B5EF4-FFF2-40B4-BE49-F238E27FC236}">
-                  <a16:creationId xmlns:a16="http://schemas.microsoft.com/office/drawing/2014/main" id="{8D252627-EFFF-2191-2497-7F94E37DF607}"/>
-                </a:ext>
-              </a:extLst>
-            </p:cNvPr>
-            <p:cNvSpPr/>
-            <p:nvPr/>
-          </p:nvSpPr>
-          <p:spPr>
-            <a:xfrm>
-              <a:off x="1260928" y="1014958"/>
-              <a:ext cx="6742208" cy="2311400"/>
-            </a:xfrm>
-            <a:prstGeom prst="rect">
-              <a:avLst/>
-            </a:prstGeom>
+          <a:prstGeom prst="rect">
+            <a:avLst/>
+          </a:prstGeom>
+          <a:solidFill>
+            <a:schemeClr val="bg1"/>
+          </a:solidFill>
+          <a:ln>
             <a:solidFill>
               <a:schemeClr val="bg1"/>
             </a:solidFill>
-            <a:ln>
-              <a:solidFill>
-                <a:schemeClr val="bg1"/>
-              </a:solidFill>
-            </a:ln>
-          </p:spPr>
-          <p:style>
-            <a:lnRef idx="2">
-              <a:schemeClr val="accent1">
-                <a:shade val="15000"/>
-              </a:schemeClr>
-            </a:lnRef>
-            <a:fillRef idx="1">
-              <a:schemeClr val="accent1"/>
-            </a:fillRef>
-            <a:effectRef idx="0">
-              <a:schemeClr val="accent1"/>
-            </a:effectRef>
-            <a:fontRef idx="minor">
-              <a:schemeClr val="lt1"/>
-            </a:fontRef>
-          </p:style>
-          <p:txBody>
-            <a:bodyPr rtlCol="0" anchor="ctr"/>
-            <a:lstStyle/>
-            <a:p>
-              <a:pPr algn="ctr"/>
-              <a:endParaRPr lang="en-US"/>
-            </a:p>
-          </p:txBody>
-        </p:sp>
-        <p:pic>
-          <p:nvPicPr>
-            <p:cNvPr id="7" name="Picture 6">
-              <a:extLst>
-                <a:ext uri="{FF2B5EF4-FFF2-40B4-BE49-F238E27FC236}">
-                  <a16:creationId xmlns:a16="http://schemas.microsoft.com/office/drawing/2014/main" id="{858B602E-9B5F-403E-C961-E66D4BB1345B}"/>
-                </a:ext>
-              </a:extLst>
-            </p:cNvPr>
-            <p:cNvPicPr>
-              <a:picLocks noChangeAspect="1"/>
-            </p:cNvPicPr>
-            <p:nvPr/>
-          </p:nvPicPr>
-          <p:blipFill>
-            <a:blip r:embed="rId3">
-              <a:extLst>
-                <a:ext uri="{28A0092B-C50C-407E-A947-70E740481C1C}">
-                  <a14:useLocalDpi xmlns:a14="http://schemas.microsoft.com/office/drawing/2010/main" val="0"/>
-                </a:ext>
-              </a:extLst>
-            </a:blip>
-            <a:stretch>
-              <a:fillRect/>
-            </a:stretch>
-          </p:blipFill>
-          <p:spPr>
-            <a:xfrm>
-              <a:off x="1197428" y="912316"/>
-              <a:ext cx="6869208" cy="2516684"/>
-            </a:xfrm>
-            <a:prstGeom prst="rect">
-              <a:avLst/>
-            </a:prstGeom>
-          </p:spPr>
-        </p:pic>
-      </p:grpSp>
+          </a:ln>
+        </p:spPr>
+        <p:style>
+          <a:lnRef idx="2">
+            <a:schemeClr val="accent1">
+              <a:shade val="15000"/>
+            </a:schemeClr>
+          </a:lnRef>
+          <a:fillRef idx="1">
+            <a:schemeClr val="accent1"/>
+          </a:fillRef>
+          <a:effectRef idx="0">
+            <a:schemeClr val="accent1"/>
+          </a:effectRef>
+          <a:fontRef idx="minor">
+            <a:schemeClr val="lt1"/>
+          </a:fontRef>
+        </p:style>
+        <p:txBody>
+          <a:bodyPr rtlCol="0" anchor="ctr"/>
+          <a:lstStyle/>
+          <a:p>
+            <a:pPr algn="ctr"/>
+            <a:endParaRPr lang="en-US"/>
+          </a:p>
+        </p:txBody>
+      </p:sp>
       <p:sp>
         <p:nvSpPr>
           <p:cNvPr id="9" name="Rectangle 8">
@@ -4855,12 +4154,179 @@
           </a:fontRef>
         </p:style>
       </p:cxnSp>
+      <p:pic>
+        <p:nvPicPr>
+          <p:cNvPr id="49" name="Picture 48">
+            <a:extLst>
+              <a:ext uri="{FF2B5EF4-FFF2-40B4-BE49-F238E27FC236}">
+                <a16:creationId xmlns:a16="http://schemas.microsoft.com/office/drawing/2014/main" id="{4ABD46B1-8DEC-6BEA-8FFF-8596BBF1EE6C}"/>
+              </a:ext>
+            </a:extLst>
+          </p:cNvPr>
+          <p:cNvPicPr>
+            <a:picLocks noChangeAspect="1"/>
+          </p:cNvPicPr>
+          <p:nvPr/>
+        </p:nvPicPr>
+        <p:blipFill>
+          <a:blip r:embed="rId3">
+            <a:extLst>
+              <a:ext uri="{28A0092B-C50C-407E-A947-70E740481C1C}">
+                <a14:useLocalDpi xmlns:a14="http://schemas.microsoft.com/office/drawing/2010/main" val="0"/>
+              </a:ext>
+            </a:extLst>
+          </a:blip>
+          <a:srcRect l="2016"/>
+          <a:stretch>
+            <a:fillRect/>
+          </a:stretch>
+        </p:blipFill>
+        <p:spPr>
+          <a:xfrm>
+            <a:off x="2985603" y="1079753"/>
+            <a:ext cx="6354685" cy="1943664"/>
+          </a:xfrm>
+          <a:prstGeom prst="rect">
+            <a:avLst/>
+          </a:prstGeom>
+        </p:spPr>
+      </p:pic>
+      <p:sp>
+        <p:nvSpPr>
+          <p:cNvPr id="50" name="Right Brace 49">
+            <a:extLst>
+              <a:ext uri="{FF2B5EF4-FFF2-40B4-BE49-F238E27FC236}">
+                <a16:creationId xmlns:a16="http://schemas.microsoft.com/office/drawing/2014/main" id="{1FF5C6C6-7FF3-5C0D-EAED-F5606B2DEE5D}"/>
+              </a:ext>
+            </a:extLst>
+          </p:cNvPr>
+          <p:cNvSpPr/>
+          <p:nvPr/>
+        </p:nvSpPr>
+        <p:spPr>
+          <a:xfrm rot="5400000">
+            <a:off x="5044348" y="1427453"/>
+            <a:ext cx="142520" cy="1701657"/>
+          </a:xfrm>
+          <a:prstGeom prst="rightBrace">
+            <a:avLst>
+              <a:gd name="adj1" fmla="val 62570"/>
+              <a:gd name="adj2" fmla="val 46738"/>
+            </a:avLst>
+          </a:prstGeom>
+          <a:ln w="38100">
+            <a:solidFill>
+              <a:schemeClr val="bg1"/>
+            </a:solidFill>
+          </a:ln>
+        </p:spPr>
+        <p:style>
+          <a:lnRef idx="2">
+            <a:schemeClr val="accent1"/>
+          </a:lnRef>
+          <a:fillRef idx="0">
+            <a:schemeClr val="accent1"/>
+          </a:fillRef>
+          <a:effectRef idx="1">
+            <a:schemeClr val="accent1"/>
+          </a:effectRef>
+          <a:fontRef idx="minor">
+            <a:schemeClr val="tx1"/>
+          </a:fontRef>
+        </p:style>
+        <p:txBody>
+          <a:bodyPr rtlCol="0" anchor="ctr"/>
+          <a:lstStyle/>
+          <a:p>
+            <a:pPr algn="ctr"/>
+            <a:endParaRPr lang="en-US"/>
+          </a:p>
+        </p:txBody>
+      </p:sp>
+      <p:sp>
+        <p:nvSpPr>
+          <p:cNvPr id="51" name="TextBox 50">
+            <a:extLst>
+              <a:ext uri="{FF2B5EF4-FFF2-40B4-BE49-F238E27FC236}">
+                <a16:creationId xmlns:a16="http://schemas.microsoft.com/office/drawing/2014/main" id="{63303539-9FF0-38F2-21A0-D29965DBB502}"/>
+              </a:ext>
+            </a:extLst>
+          </p:cNvPr>
+          <p:cNvSpPr txBox="1"/>
+          <p:nvPr/>
+        </p:nvSpPr>
+        <p:spPr>
+          <a:xfrm>
+            <a:off x="4989084" y="2379884"/>
+            <a:ext cx="425116" cy="277000"/>
+          </a:xfrm>
+          <a:prstGeom prst="rect">
+            <a:avLst/>
+          </a:prstGeom>
+          <a:noFill/>
+        </p:spPr>
+        <p:txBody>
+          <a:bodyPr wrap="none" rtlCol="0">
+            <a:spAutoFit/>
+          </a:bodyPr>
+          <a:lstStyle/>
+          <a:p>
+            <a:r>
+              <a:rPr lang="en-US" sz="1200" dirty="0">
+                <a:solidFill>
+                  <a:schemeClr val="bg1"/>
+                </a:solidFill>
+              </a:rPr>
+              <a:t>L=3</a:t>
+            </a:r>
+          </a:p>
+        </p:txBody>
+      </p:sp>
+      <p:sp>
+        <p:nvSpPr>
+          <p:cNvPr id="52" name="TextBox 51">
+            <a:extLst>
+              <a:ext uri="{FF2B5EF4-FFF2-40B4-BE49-F238E27FC236}">
+                <a16:creationId xmlns:a16="http://schemas.microsoft.com/office/drawing/2014/main" id="{31154761-C0EC-B8CE-49BF-DB3BBC00AA20}"/>
+              </a:ext>
+            </a:extLst>
+          </p:cNvPr>
+          <p:cNvSpPr txBox="1"/>
+          <p:nvPr/>
+        </p:nvSpPr>
+        <p:spPr>
+          <a:xfrm>
+            <a:off x="7402551" y="1128685"/>
+            <a:ext cx="425116" cy="277000"/>
+          </a:xfrm>
+          <a:prstGeom prst="rect">
+            <a:avLst/>
+          </a:prstGeom>
+          <a:noFill/>
+        </p:spPr>
+        <p:txBody>
+          <a:bodyPr wrap="none" rtlCol="0">
+            <a:spAutoFit/>
+          </a:bodyPr>
+          <a:lstStyle/>
+          <a:p>
+            <a:r>
+              <a:rPr lang="en-US" sz="1200" dirty="0">
+                <a:solidFill>
+                  <a:schemeClr val="bg1"/>
+                </a:solidFill>
+              </a:rPr>
+              <a:t>L=6</a:t>
+            </a:r>
+          </a:p>
+        </p:txBody>
+      </p:sp>
       <p:cxnSp>
         <p:nvCxnSpPr>
-          <p:cNvPr id="20" name="Straight Arrow Connector 19">
-            <a:extLst>
-              <a:ext uri="{FF2B5EF4-FFF2-40B4-BE49-F238E27FC236}">
-                <a16:creationId xmlns:a16="http://schemas.microsoft.com/office/drawing/2014/main" id="{843DBBF2-6050-6B72-040B-B4E9197DF06B}"/>
+          <p:cNvPr id="53" name="Straight Arrow Connector 52">
+            <a:extLst>
+              <a:ext uri="{FF2B5EF4-FFF2-40B4-BE49-F238E27FC236}">
+                <a16:creationId xmlns:a16="http://schemas.microsoft.com/office/drawing/2014/main" id="{648CC883-0AD7-9ED3-D116-807E348CCB0F}"/>
               </a:ext>
             </a:extLst>
           </p:cNvPr>
@@ -4871,8 +4337,503 @@
         </p:nvCxnSpPr>
         <p:spPr>
           <a:xfrm>
-            <a:off x="3904343" y="5504571"/>
-            <a:ext cx="2016331" cy="483058"/>
+            <a:off x="3288611" y="3119833"/>
+            <a:ext cx="6051677" cy="0"/>
+          </a:xfrm>
+          <a:prstGeom prst="straightConnector1">
+            <a:avLst/>
+          </a:prstGeom>
+          <a:ln w="28575">
+            <a:solidFill>
+              <a:schemeClr val="tx1"/>
+            </a:solidFill>
+            <a:tailEnd type="triangle"/>
+          </a:ln>
+        </p:spPr>
+        <p:style>
+          <a:lnRef idx="2">
+            <a:schemeClr val="accent1"/>
+          </a:lnRef>
+          <a:fillRef idx="0">
+            <a:schemeClr val="accent1"/>
+          </a:fillRef>
+          <a:effectRef idx="1">
+            <a:schemeClr val="accent1"/>
+          </a:effectRef>
+          <a:fontRef idx="minor">
+            <a:schemeClr val="tx1"/>
+          </a:fontRef>
+        </p:style>
+      </p:cxnSp>
+      <mc:AlternateContent xmlns:mc="http://schemas.openxmlformats.org/markup-compatibility/2006">
+        <mc:Choice xmlns:a14="http://schemas.microsoft.com/office/drawing/2010/main" Requires="a14">
+          <p:sp>
+            <p:nvSpPr>
+              <p:cNvPr id="54" name="TextBox 53">
+                <a:extLst>
+                  <a:ext uri="{FF2B5EF4-FFF2-40B4-BE49-F238E27FC236}">
+                    <a16:creationId xmlns:a16="http://schemas.microsoft.com/office/drawing/2014/main" id="{25228D84-3A0B-851E-A60E-55F766BFB156}"/>
+                  </a:ext>
+                </a:extLst>
+              </p:cNvPr>
+              <p:cNvSpPr txBox="1"/>
+              <p:nvPr/>
+            </p:nvSpPr>
+            <p:spPr>
+              <a:xfrm>
+                <a:off x="2790354" y="3010469"/>
+                <a:ext cx="452111" cy="215444"/>
+              </a:xfrm>
+              <a:prstGeom prst="rect">
+                <a:avLst/>
+              </a:prstGeom>
+              <a:noFill/>
+            </p:spPr>
+            <p:txBody>
+              <a:bodyPr wrap="none" rtlCol="0">
+                <a:spAutoFit/>
+              </a:bodyPr>
+              <a:lstStyle/>
+              <a:p>
+                <a:pPr/>
+                <a14:m>
+                  <m:oMathPara xmlns:m="http://schemas.openxmlformats.org/officeDocument/2006/math">
+                    <m:oMathParaPr>
+                      <m:jc m:val="centerGroup"/>
+                    </m:oMathParaPr>
+                    <m:oMath xmlns:m="http://schemas.openxmlformats.org/officeDocument/2006/math">
+                      <m:r>
+                        <a:rPr lang="en-US" sz="800" b="0" i="1" smtClean="0">
+                          <a:latin typeface="Cambria Math" panose="02040503050406030204" pitchFamily="18" charset="0"/>
+                        </a:rPr>
+                        <m:t>𝐿</m:t>
+                      </m:r>
+                      <m:r>
+                        <a:rPr lang="en-US" sz="800" b="0" i="1" smtClean="0">
+                          <a:latin typeface="Cambria Math" panose="02040503050406030204" pitchFamily="18" charset="0"/>
+                        </a:rPr>
+                        <m:t>=0</m:t>
+                      </m:r>
+                    </m:oMath>
+                  </m:oMathPara>
+                </a14:m>
+                <a:endParaRPr lang="en-US" sz="800" dirty="0"/>
+              </a:p>
+            </p:txBody>
+          </p:sp>
+        </mc:Choice>
+        <mc:Fallback>
+          <p:sp>
+            <p:nvSpPr>
+              <p:cNvPr id="54" name="TextBox 53">
+                <a:extLst>
+                  <a:ext uri="{FF2B5EF4-FFF2-40B4-BE49-F238E27FC236}">
+                    <a16:creationId xmlns:a16="http://schemas.microsoft.com/office/drawing/2014/main" id="{25228D84-3A0B-851E-A60E-55F766BFB156}"/>
+                  </a:ext>
+                </a:extLst>
+              </p:cNvPr>
+              <p:cNvSpPr txBox="1">
+                <a:spLocks noRot="1" noChangeAspect="1" noMove="1" noResize="1" noEditPoints="1" noAdjustHandles="1" noChangeArrowheads="1" noChangeShapeType="1" noTextEdit="1"/>
+              </p:cNvSpPr>
+              <p:nvPr/>
+            </p:nvSpPr>
+            <p:spPr>
+              <a:xfrm>
+                <a:off x="2790354" y="3010469"/>
+                <a:ext cx="452111" cy="215444"/>
+              </a:xfrm>
+              <a:prstGeom prst="rect">
+                <a:avLst/>
+              </a:prstGeom>
+              <a:blipFill>
+                <a:blip r:embed="rId4"/>
+                <a:stretch>
+                  <a:fillRect/>
+                </a:stretch>
+              </a:blipFill>
+            </p:spPr>
+            <p:txBody>
+              <a:bodyPr/>
+              <a:lstStyle/>
+              <a:p>
+                <a:r>
+                  <a:rPr lang="en-US">
+                    <a:noFill/>
+                  </a:rPr>
+                  <a:t> </a:t>
+                </a:r>
+              </a:p>
+            </p:txBody>
+          </p:sp>
+        </mc:Fallback>
+      </mc:AlternateContent>
+      <p:cxnSp>
+        <p:nvCxnSpPr>
+          <p:cNvPr id="55" name="Straight Connector 54">
+            <a:extLst>
+              <a:ext uri="{FF2B5EF4-FFF2-40B4-BE49-F238E27FC236}">
+                <a16:creationId xmlns:a16="http://schemas.microsoft.com/office/drawing/2014/main" id="{16ED2587-8252-F0AF-B653-7C16CD545C1D}"/>
+              </a:ext>
+            </a:extLst>
+          </p:cNvPr>
+          <p:cNvCxnSpPr>
+            <a:cxnSpLocks/>
+          </p:cNvCxnSpPr>
+          <p:nvPr/>
+        </p:nvCxnSpPr>
+        <p:spPr>
+          <a:xfrm>
+            <a:off x="2857357" y="1701970"/>
+            <a:ext cx="0" cy="0"/>
+          </a:xfrm>
+          <a:prstGeom prst="line">
+            <a:avLst/>
+          </a:prstGeom>
+        </p:spPr>
+        <p:style>
+          <a:lnRef idx="2">
+            <a:schemeClr val="accent1"/>
+          </a:lnRef>
+          <a:fillRef idx="0">
+            <a:schemeClr val="accent1"/>
+          </a:fillRef>
+          <a:effectRef idx="1">
+            <a:schemeClr val="accent1"/>
+          </a:effectRef>
+          <a:fontRef idx="minor">
+            <a:schemeClr val="tx1"/>
+          </a:fontRef>
+        </p:style>
+      </p:cxnSp>
+      <p:cxnSp>
+        <p:nvCxnSpPr>
+          <p:cNvPr id="56" name="Straight Connector 55">
+            <a:extLst>
+              <a:ext uri="{FF2B5EF4-FFF2-40B4-BE49-F238E27FC236}">
+                <a16:creationId xmlns:a16="http://schemas.microsoft.com/office/drawing/2014/main" id="{7A624D92-6CBA-D6EE-4AF2-C9E86A66854B}"/>
+              </a:ext>
+            </a:extLst>
+          </p:cNvPr>
+          <p:cNvCxnSpPr>
+            <a:cxnSpLocks/>
+          </p:cNvCxnSpPr>
+          <p:nvPr/>
+        </p:nvCxnSpPr>
+        <p:spPr>
+          <a:xfrm>
+            <a:off x="2937397" y="2076205"/>
+            <a:ext cx="284071" cy="0"/>
+          </a:xfrm>
+          <a:prstGeom prst="line">
+            <a:avLst/>
+          </a:prstGeom>
+          <a:ln w="19050">
+            <a:prstDash val="sysDot"/>
+          </a:ln>
+        </p:spPr>
+        <p:style>
+          <a:lnRef idx="2">
+            <a:schemeClr val="dk1"/>
+          </a:lnRef>
+          <a:fillRef idx="0">
+            <a:schemeClr val="dk1"/>
+          </a:fillRef>
+          <a:effectRef idx="1">
+            <a:schemeClr val="dk1"/>
+          </a:effectRef>
+          <a:fontRef idx="minor">
+            <a:schemeClr val="tx1"/>
+          </a:fontRef>
+        </p:style>
+      </p:cxnSp>
+      <p:cxnSp>
+        <p:nvCxnSpPr>
+          <p:cNvPr id="57" name="Straight Connector 56">
+            <a:extLst>
+              <a:ext uri="{FF2B5EF4-FFF2-40B4-BE49-F238E27FC236}">
+                <a16:creationId xmlns:a16="http://schemas.microsoft.com/office/drawing/2014/main" id="{C4500A6C-7D53-8E69-2EB7-64AD2E81FAB2}"/>
+              </a:ext>
+            </a:extLst>
+          </p:cNvPr>
+          <p:cNvCxnSpPr>
+            <a:cxnSpLocks/>
+          </p:cNvCxnSpPr>
+          <p:nvPr/>
+        </p:nvCxnSpPr>
+        <p:spPr>
+          <a:xfrm>
+            <a:off x="3004540" y="2983985"/>
+            <a:ext cx="0" cy="116907"/>
+          </a:xfrm>
+          <a:prstGeom prst="line">
+            <a:avLst/>
+          </a:prstGeom>
+          <a:ln w="9525">
+            <a:prstDash val="sysDot"/>
+          </a:ln>
+        </p:spPr>
+        <p:style>
+          <a:lnRef idx="2">
+            <a:schemeClr val="dk1"/>
+          </a:lnRef>
+          <a:fillRef idx="0">
+            <a:schemeClr val="dk1"/>
+          </a:fillRef>
+          <a:effectRef idx="1">
+            <a:schemeClr val="dk1"/>
+          </a:effectRef>
+          <a:fontRef idx="minor">
+            <a:schemeClr val="tx1"/>
+          </a:fontRef>
+        </p:style>
+      </p:cxnSp>
+      <mc:AlternateContent xmlns:mc="http://schemas.openxmlformats.org/markup-compatibility/2006">
+        <mc:Choice xmlns:a14="http://schemas.microsoft.com/office/drawing/2010/main" Requires="a14">
+          <p:sp>
+            <p:nvSpPr>
+              <p:cNvPr id="58" name="TextBox 57">
+                <a:extLst>
+                  <a:ext uri="{FF2B5EF4-FFF2-40B4-BE49-F238E27FC236}">
+                    <a16:creationId xmlns:a16="http://schemas.microsoft.com/office/drawing/2014/main" id="{5BBD1742-D2FD-DF2D-AEEB-B877EC725E02}"/>
+                  </a:ext>
+                </a:extLst>
+              </p:cNvPr>
+              <p:cNvSpPr txBox="1"/>
+              <p:nvPr/>
+            </p:nvSpPr>
+            <p:spPr>
+              <a:xfrm rot="16200000">
+                <a:off x="2491845" y="1973311"/>
+                <a:ext cx="799883" cy="261611"/>
+              </a:xfrm>
+              <a:prstGeom prst="rect">
+                <a:avLst/>
+              </a:prstGeom>
+              <a:noFill/>
+            </p:spPr>
+            <p:txBody>
+              <a:bodyPr wrap="square" rtlCol="0">
+                <a:spAutoFit/>
+              </a:bodyPr>
+              <a:lstStyle/>
+              <a:p>
+                <a:pPr/>
+                <a14:m>
+                  <m:oMathPara xmlns:m="http://schemas.openxmlformats.org/officeDocument/2006/math">
+                    <m:oMathParaPr>
+                      <m:jc m:val="centerGroup"/>
+                    </m:oMathParaPr>
+                    <m:oMath xmlns:m="http://schemas.openxmlformats.org/officeDocument/2006/math">
+                      <m:r>
+                        <a:rPr lang="en-US" sz="1050" b="0" i="1" smtClean="0">
+                          <a:latin typeface="Cambria Math" panose="02040503050406030204" pitchFamily="18" charset="0"/>
+                        </a:rPr>
+                        <m:t>𝑚</m:t>
+                      </m:r>
+                      <m:r>
+                        <a:rPr lang="en-US" sz="1050" b="0" i="1" smtClean="0">
+                          <a:latin typeface="Cambria Math" panose="02040503050406030204" pitchFamily="18" charset="0"/>
+                        </a:rPr>
+                        <m:t>=0</m:t>
+                      </m:r>
+                    </m:oMath>
+                  </m:oMathPara>
+                </a14:m>
+                <a:endParaRPr lang="en-US" sz="1050" dirty="0"/>
+              </a:p>
+            </p:txBody>
+          </p:sp>
+        </mc:Choice>
+        <mc:Fallback>
+          <p:sp>
+            <p:nvSpPr>
+              <p:cNvPr id="58" name="TextBox 57">
+                <a:extLst>
+                  <a:ext uri="{FF2B5EF4-FFF2-40B4-BE49-F238E27FC236}">
+                    <a16:creationId xmlns:a16="http://schemas.microsoft.com/office/drawing/2014/main" id="{5BBD1742-D2FD-DF2D-AEEB-B877EC725E02}"/>
+                  </a:ext>
+                </a:extLst>
+              </p:cNvPr>
+              <p:cNvSpPr txBox="1">
+                <a:spLocks noRot="1" noChangeAspect="1" noMove="1" noResize="1" noEditPoints="1" noAdjustHandles="1" noChangeArrowheads="1" noChangeShapeType="1" noTextEdit="1"/>
+              </p:cNvSpPr>
+              <p:nvPr/>
+            </p:nvSpPr>
+            <p:spPr>
+              <a:xfrm rot="16200000">
+                <a:off x="2491845" y="1973311"/>
+                <a:ext cx="799883" cy="261611"/>
+              </a:xfrm>
+              <a:prstGeom prst="rect">
+                <a:avLst/>
+              </a:prstGeom>
+              <a:blipFill>
+                <a:blip r:embed="rId5"/>
+                <a:stretch>
+                  <a:fillRect/>
+                </a:stretch>
+              </a:blipFill>
+            </p:spPr>
+            <p:txBody>
+              <a:bodyPr/>
+              <a:lstStyle/>
+              <a:p>
+                <a:r>
+                  <a:rPr lang="en-US">
+                    <a:noFill/>
+                  </a:rPr>
+                  <a:t> </a:t>
+                </a:r>
+              </a:p>
+            </p:txBody>
+          </p:sp>
+        </mc:Fallback>
+      </mc:AlternateContent>
+      <p:cxnSp>
+        <p:nvCxnSpPr>
+          <p:cNvPr id="59" name="Straight Arrow Connector 58">
+            <a:extLst>
+              <a:ext uri="{FF2B5EF4-FFF2-40B4-BE49-F238E27FC236}">
+                <a16:creationId xmlns:a16="http://schemas.microsoft.com/office/drawing/2014/main" id="{DD6BBAB8-EC1A-94CA-62EF-A6F1AA4A3B89}"/>
+              </a:ext>
+            </a:extLst>
+          </p:cNvPr>
+          <p:cNvCxnSpPr>
+            <a:cxnSpLocks/>
+          </p:cNvCxnSpPr>
+          <p:nvPr/>
+        </p:nvCxnSpPr>
+        <p:spPr>
+          <a:xfrm>
+            <a:off x="2893310" y="2310660"/>
+            <a:ext cx="0" cy="707592"/>
+          </a:xfrm>
+          <a:prstGeom prst="straightConnector1">
+            <a:avLst/>
+          </a:prstGeom>
+          <a:ln w="28575">
+            <a:solidFill>
+              <a:schemeClr val="tx1"/>
+            </a:solidFill>
+            <a:tailEnd type="triangle"/>
+          </a:ln>
+        </p:spPr>
+        <p:style>
+          <a:lnRef idx="2">
+            <a:schemeClr val="accent1"/>
+          </a:lnRef>
+          <a:fillRef idx="0">
+            <a:schemeClr val="accent1"/>
+          </a:fillRef>
+          <a:effectRef idx="1">
+            <a:schemeClr val="accent1"/>
+          </a:effectRef>
+          <a:fontRef idx="minor">
+            <a:schemeClr val="tx1"/>
+          </a:fontRef>
+        </p:style>
+      </p:cxnSp>
+      <p:cxnSp>
+        <p:nvCxnSpPr>
+          <p:cNvPr id="60" name="Straight Arrow Connector 59">
+            <a:extLst>
+              <a:ext uri="{FF2B5EF4-FFF2-40B4-BE49-F238E27FC236}">
+                <a16:creationId xmlns:a16="http://schemas.microsoft.com/office/drawing/2014/main" id="{D06DB336-B349-6C47-809D-34EF8DEDCBA9}"/>
+              </a:ext>
+            </a:extLst>
+          </p:cNvPr>
+          <p:cNvCxnSpPr>
+            <a:cxnSpLocks/>
+          </p:cNvCxnSpPr>
+          <p:nvPr/>
+        </p:nvCxnSpPr>
+        <p:spPr>
+          <a:xfrm flipV="1">
+            <a:off x="2893310" y="1079753"/>
+            <a:ext cx="0" cy="812548"/>
+          </a:xfrm>
+          <a:prstGeom prst="straightConnector1">
+            <a:avLst/>
+          </a:prstGeom>
+          <a:ln w="28575">
+            <a:solidFill>
+              <a:schemeClr val="tx1"/>
+            </a:solidFill>
+            <a:tailEnd type="triangle"/>
+          </a:ln>
+        </p:spPr>
+        <p:style>
+          <a:lnRef idx="2">
+            <a:schemeClr val="accent1"/>
+          </a:lnRef>
+          <a:fillRef idx="0">
+            <a:schemeClr val="accent1"/>
+          </a:fillRef>
+          <a:effectRef idx="1">
+            <a:schemeClr val="accent1"/>
+          </a:effectRef>
+          <a:fontRef idx="minor">
+            <a:schemeClr val="tx1"/>
+          </a:fontRef>
+        </p:style>
+      </p:cxnSp>
+      <p:sp>
+        <p:nvSpPr>
+          <p:cNvPr id="61" name="TextBox 60">
+            <a:extLst>
+              <a:ext uri="{FF2B5EF4-FFF2-40B4-BE49-F238E27FC236}">
+                <a16:creationId xmlns:a16="http://schemas.microsoft.com/office/drawing/2014/main" id="{31DEB88D-1B15-FB24-CC53-B3A13E53E073}"/>
+              </a:ext>
+            </a:extLst>
+          </p:cNvPr>
+          <p:cNvSpPr txBox="1"/>
+          <p:nvPr/>
+        </p:nvSpPr>
+        <p:spPr>
+          <a:xfrm>
+            <a:off x="3034856" y="1179049"/>
+            <a:ext cx="425116" cy="277000"/>
+          </a:xfrm>
+          <a:prstGeom prst="rect">
+            <a:avLst/>
+          </a:prstGeom>
+          <a:noFill/>
+        </p:spPr>
+        <p:txBody>
+          <a:bodyPr wrap="none" rtlCol="0">
+            <a:spAutoFit/>
+          </a:bodyPr>
+          <a:lstStyle/>
+          <a:p>
+            <a:r>
+              <a:rPr lang="en-US" sz="1200" dirty="0">
+                <a:solidFill>
+                  <a:schemeClr val="bg1"/>
+                </a:solidFill>
+              </a:rPr>
+              <a:t>L=0</a:t>
+            </a:r>
+          </a:p>
+        </p:txBody>
+      </p:sp>
+      <p:cxnSp>
+        <p:nvCxnSpPr>
+          <p:cNvPr id="62" name="Straight Arrow Connector 61">
+            <a:extLst>
+              <a:ext uri="{FF2B5EF4-FFF2-40B4-BE49-F238E27FC236}">
+                <a16:creationId xmlns:a16="http://schemas.microsoft.com/office/drawing/2014/main" id="{6A9113A7-7851-D6C0-B1C4-9EB7E9EC158F}"/>
+              </a:ext>
+            </a:extLst>
+          </p:cNvPr>
+          <p:cNvCxnSpPr>
+            <a:cxnSpLocks/>
+          </p:cNvCxnSpPr>
+          <p:nvPr/>
+        </p:nvCxnSpPr>
+        <p:spPr>
+          <a:xfrm>
+            <a:off x="3197214" y="1430568"/>
+            <a:ext cx="0" cy="279722"/>
           </a:xfrm>
           <a:prstGeom prst="straightConnector1">
             <a:avLst/>
@@ -4899,755 +4860,54 @@
           </a:fontRef>
         </p:style>
       </p:cxnSp>
-      <p:sp>
-        <p:nvSpPr>
-          <p:cNvPr id="21" name="TextBox 20">
-            <a:extLst>
-              <a:ext uri="{FF2B5EF4-FFF2-40B4-BE49-F238E27FC236}">
-                <a16:creationId xmlns:a16="http://schemas.microsoft.com/office/drawing/2014/main" id="{EFF3E8ED-2FD2-ED54-B1CD-DD81B1515211}"/>
-              </a:ext>
-            </a:extLst>
-          </p:cNvPr>
-          <p:cNvSpPr txBox="1"/>
+      <p:cxnSp>
+        <p:nvCxnSpPr>
+          <p:cNvPr id="63" name="Straight Arrow Connector 62">
+            <a:extLst>
+              <a:ext uri="{FF2B5EF4-FFF2-40B4-BE49-F238E27FC236}">
+                <a16:creationId xmlns:a16="http://schemas.microsoft.com/office/drawing/2014/main" id="{67A9D898-7517-56A5-58AE-9279C2BBF57D}"/>
+              </a:ext>
+            </a:extLst>
+          </p:cNvPr>
+          <p:cNvCxnSpPr>
+            <a:cxnSpLocks/>
+          </p:cNvCxnSpPr>
           <p:nvPr/>
-        </p:nvSpPr>
+        </p:nvCxnSpPr>
         <p:spPr>
           <a:xfrm>
-            <a:off x="2619695" y="5135239"/>
-            <a:ext cx="1494768" cy="369332"/>
+            <a:off x="7570926" y="1357833"/>
+            <a:ext cx="0" cy="279722"/>
           </a:xfrm>
-          <a:prstGeom prst="rect">
+          <a:prstGeom prst="straightConnector1">
             <a:avLst/>
           </a:prstGeom>
-          <a:noFill/>
+          <a:ln w="38100">
+            <a:solidFill>
+              <a:schemeClr val="bg1"/>
+            </a:solidFill>
+            <a:tailEnd type="triangle"/>
+          </a:ln>
         </p:spPr>
-        <p:txBody>
-          <a:bodyPr wrap="none" rtlCol="0">
-            <a:spAutoFit/>
-          </a:bodyPr>
-          <a:lstStyle/>
-          <a:p>
-            <a:r>
-              <a:rPr lang="en-US" dirty="0">
-                <a:solidFill>
-                  <a:schemeClr val="bg1"/>
-                </a:solidFill>
-              </a:rPr>
-              <a:t>Beam Center</a:t>
-            </a:r>
-          </a:p>
-        </p:txBody>
-      </p:sp>
+        <p:style>
+          <a:lnRef idx="2">
+            <a:schemeClr val="accent1"/>
+          </a:lnRef>
+          <a:fillRef idx="0">
+            <a:schemeClr val="accent1"/>
+          </a:fillRef>
+          <a:effectRef idx="1">
+            <a:schemeClr val="accent1"/>
+          </a:effectRef>
+          <a:fontRef idx="minor">
+            <a:schemeClr val="tx1"/>
+          </a:fontRef>
+        </p:style>
+      </p:cxnSp>
     </p:spTree>
     <p:extLst>
       <p:ext uri="{BB962C8B-B14F-4D97-AF65-F5344CB8AC3E}">
         <p14:creationId xmlns:p14="http://schemas.microsoft.com/office/powerpoint/2010/main" val="1470611967"/>
-      </p:ext>
-    </p:extLst>
-  </p:cSld>
-  <p:clrMapOvr>
-    <a:masterClrMapping/>
-  </p:clrMapOvr>
-</p:sld>
-</file>
-
-<file path=ppt/slides/slide3.xml><?xml version="1.0" encoding="utf-8"?>
-<p:sld xmlns:a="http://schemas.openxmlformats.org/drawingml/2006/main" xmlns:r="http://schemas.openxmlformats.org/officeDocument/2006/relationships" xmlns:p="http://schemas.openxmlformats.org/presentationml/2006/main">
-  <p:cSld>
-    <p:spTree>
-      <p:nvGrpSpPr>
-        <p:cNvPr id="1" name=""/>
-        <p:cNvGrpSpPr/>
-        <p:nvPr/>
-      </p:nvGrpSpPr>
-      <p:grpSpPr>
-        <a:xfrm>
-          <a:off x="0" y="0"/>
-          <a:ext cx="0" cy="0"/>
-          <a:chOff x="0" y="0"/>
-          <a:chExt cx="0" cy="0"/>
-        </a:xfrm>
-      </p:grpSpPr>
-      <p:pic>
-        <p:nvPicPr>
-          <p:cNvPr id="5" name="Picture 4">
-            <a:extLst>
-              <a:ext uri="{FF2B5EF4-FFF2-40B4-BE49-F238E27FC236}">
-                <a16:creationId xmlns:a16="http://schemas.microsoft.com/office/drawing/2014/main" id="{195A7A65-4328-F6EB-91E5-1708D8CB540F}"/>
-              </a:ext>
-            </a:extLst>
-          </p:cNvPr>
-          <p:cNvPicPr>
-            <a:picLocks noChangeAspect="1"/>
-          </p:cNvPicPr>
-          <p:nvPr/>
-        </p:nvPicPr>
-        <p:blipFill>
-          <a:blip r:embed="rId2">
-            <a:extLst>
-              <a:ext uri="{28A0092B-C50C-407E-A947-70E740481C1C}">
-                <a14:useLocalDpi xmlns:a14="http://schemas.microsoft.com/office/drawing/2010/main" val="0"/>
-              </a:ext>
-            </a:extLst>
-          </a:blip>
-          <a:srcRect l="4233" t="5630"/>
-          <a:stretch>
-            <a:fillRect/>
-          </a:stretch>
-        </p:blipFill>
-        <p:spPr>
-          <a:xfrm>
-            <a:off x="3286125" y="704850"/>
-            <a:ext cx="5879646" cy="5793921"/>
-          </a:xfrm>
-          <a:prstGeom prst="rect">
-            <a:avLst/>
-          </a:prstGeom>
-        </p:spPr>
-      </p:pic>
-      <p:pic>
-        <p:nvPicPr>
-          <p:cNvPr id="11" name="Picture 10">
-            <a:extLst>
-              <a:ext uri="{FF2B5EF4-FFF2-40B4-BE49-F238E27FC236}">
-                <a16:creationId xmlns:a16="http://schemas.microsoft.com/office/drawing/2014/main" id="{AD8D15DD-01E6-5EEE-81DA-415EAB3C27B5}"/>
-              </a:ext>
-            </a:extLst>
-          </p:cNvPr>
-          <p:cNvPicPr>
-            <a:picLocks noChangeAspect="1"/>
-          </p:cNvPicPr>
-          <p:nvPr/>
-        </p:nvPicPr>
-        <p:blipFill>
-          <a:blip r:embed="rId3"/>
-          <a:stretch>
-            <a:fillRect/>
-          </a:stretch>
-        </p:blipFill>
-        <p:spPr>
-          <a:xfrm>
-            <a:off x="3733460" y="811239"/>
-            <a:ext cx="1912960" cy="1629005"/>
-          </a:xfrm>
-          <a:prstGeom prst="rect">
-            <a:avLst/>
-          </a:prstGeom>
-        </p:spPr>
-      </p:pic>
-      <mc:AlternateContent xmlns:mc="http://schemas.openxmlformats.org/markup-compatibility/2006">
-        <mc:Choice xmlns:a14="http://schemas.microsoft.com/office/drawing/2010/main" Requires="a14">
-          <p:sp>
-            <p:nvSpPr>
-              <p:cNvPr id="12" name="TextBox 11">
-                <a:extLst>
-                  <a:ext uri="{FF2B5EF4-FFF2-40B4-BE49-F238E27FC236}">
-                    <a16:creationId xmlns:a16="http://schemas.microsoft.com/office/drawing/2014/main" id="{10BBAC0C-2515-E1A2-15B6-A8D750FBA93E}"/>
-                  </a:ext>
-                </a:extLst>
-              </p:cNvPr>
-              <p:cNvSpPr txBox="1"/>
-              <p:nvPr/>
-            </p:nvSpPr>
-            <p:spPr>
-              <a:xfrm>
-                <a:off x="4105275" y="600075"/>
-                <a:ext cx="444289" cy="369332"/>
-              </a:xfrm>
-              <a:prstGeom prst="rect">
-                <a:avLst/>
-              </a:prstGeom>
-              <a:noFill/>
-            </p:spPr>
-            <p:txBody>
-              <a:bodyPr wrap="none" rtlCol="0">
-                <a:spAutoFit/>
-              </a:bodyPr>
-              <a:lstStyle/>
-              <a:p>
-                <a14:m>
-                  <m:oMathPara xmlns:m="http://schemas.openxmlformats.org/officeDocument/2006/math">
-                    <m:oMathParaPr>
-                      <m:jc m:val="centerGroup"/>
-                    </m:oMathParaPr>
-                    <m:oMath xmlns:m="http://schemas.openxmlformats.org/officeDocument/2006/math">
-                      <m:sSup>
-                        <m:sSupPr>
-                          <m:ctrlPr>
-                            <a:rPr lang="en-US" b="0" i="1" smtClean="0">
-                              <a:latin typeface="Cambria Math" panose="02040503050406030204" pitchFamily="18" charset="0"/>
-                            </a:rPr>
-                          </m:ctrlPr>
-                        </m:sSupPr>
-                        <m:e>
-                          <m:r>
-                            <a:rPr lang="en-US" b="0" i="1" smtClean="0">
-                              <a:latin typeface="Cambria Math" panose="02040503050406030204" pitchFamily="18" charset="0"/>
-                            </a:rPr>
-                            <m:t>5</m:t>
-                          </m:r>
-                        </m:e>
-                        <m:sup>
-                          <m:r>
-                            <a:rPr lang="en-US" b="0" i="1" smtClean="0">
-                              <a:latin typeface="Cambria Math" panose="02040503050406030204" pitchFamily="18" charset="0"/>
-                            </a:rPr>
-                            <m:t>∘</m:t>
-                          </m:r>
-                        </m:sup>
-                      </m:sSup>
-                    </m:oMath>
-                  </m:oMathPara>
-                </a14:m>
-                <a:endParaRPr lang="en-US" dirty="0"/>
-              </a:p>
-            </p:txBody>
-          </p:sp>
-        </mc:Choice>
-        <mc:Fallback>
-          <p:sp>
-            <p:nvSpPr>
-              <p:cNvPr id="12" name="TextBox 11">
-                <a:extLst>
-                  <a:ext uri="{FF2B5EF4-FFF2-40B4-BE49-F238E27FC236}">
-                    <a16:creationId xmlns:a16="http://schemas.microsoft.com/office/drawing/2014/main" id="{10BBAC0C-2515-E1A2-15B6-A8D750FBA93E}"/>
-                  </a:ext>
-                </a:extLst>
-              </p:cNvPr>
-              <p:cNvSpPr txBox="1">
-                <a:spLocks noRot="1" noChangeAspect="1" noMove="1" noResize="1" noEditPoints="1" noAdjustHandles="1" noChangeArrowheads="1" noChangeShapeType="1" noTextEdit="1"/>
-              </p:cNvSpPr>
-              <p:nvPr/>
-            </p:nvSpPr>
-            <p:spPr>
-              <a:xfrm>
-                <a:off x="4105275" y="600075"/>
-                <a:ext cx="444289" cy="369332"/>
-              </a:xfrm>
-              <a:prstGeom prst="rect">
-                <a:avLst/>
-              </a:prstGeom>
-              <a:blipFill>
-                <a:blip r:embed="rId4"/>
-                <a:stretch>
-                  <a:fillRect/>
-                </a:stretch>
-              </a:blipFill>
-            </p:spPr>
-            <p:txBody>
-              <a:bodyPr/>
-              <a:lstStyle/>
-              <a:p>
-                <a:r>
-                  <a:rPr lang="en-US">
-                    <a:noFill/>
-                  </a:rPr>
-                  <a:t> </a:t>
-                </a:r>
-              </a:p>
-            </p:txBody>
-          </p:sp>
-        </mc:Fallback>
-      </mc:AlternateContent>
-      <mc:AlternateContent xmlns:mc="http://schemas.openxmlformats.org/markup-compatibility/2006">
-        <mc:Choice xmlns:a14="http://schemas.microsoft.com/office/drawing/2010/main" Requires="a14">
-          <p:sp>
-            <p:nvSpPr>
-              <p:cNvPr id="13" name="TextBox 12">
-                <a:extLst>
-                  <a:ext uri="{FF2B5EF4-FFF2-40B4-BE49-F238E27FC236}">
-                    <a16:creationId xmlns:a16="http://schemas.microsoft.com/office/drawing/2014/main" id="{AC60D419-119A-74FF-CFE7-155DBA94AE96}"/>
-                  </a:ext>
-                </a:extLst>
-              </p:cNvPr>
-              <p:cNvSpPr txBox="1"/>
-              <p:nvPr/>
-            </p:nvSpPr>
-            <p:spPr>
-              <a:xfrm>
-                <a:off x="5871610" y="520184"/>
-                <a:ext cx="572529" cy="369332"/>
-              </a:xfrm>
-              <a:prstGeom prst="rect">
-                <a:avLst/>
-              </a:prstGeom>
-              <a:noFill/>
-            </p:spPr>
-            <p:txBody>
-              <a:bodyPr wrap="none" rtlCol="0">
-                <a:spAutoFit/>
-              </a:bodyPr>
-              <a:lstStyle/>
-              <a:p>
-                <a14:m>
-                  <m:oMathPara xmlns:m="http://schemas.openxmlformats.org/officeDocument/2006/math">
-                    <m:oMathParaPr>
-                      <m:jc m:val="centerGroup"/>
-                    </m:oMathParaPr>
-                    <m:oMath xmlns:m="http://schemas.openxmlformats.org/officeDocument/2006/math">
-                      <m:sSup>
-                        <m:sSupPr>
-                          <m:ctrlPr>
-                            <a:rPr lang="en-US" b="0" i="1" smtClean="0">
-                              <a:latin typeface="Cambria Math" panose="02040503050406030204" pitchFamily="18" charset="0"/>
-                            </a:rPr>
-                          </m:ctrlPr>
-                        </m:sSupPr>
-                        <m:e>
-                          <m:r>
-                            <a:rPr lang="en-US" b="0" i="1" smtClean="0">
-                              <a:latin typeface="Cambria Math" panose="02040503050406030204" pitchFamily="18" charset="0"/>
-                            </a:rPr>
-                            <m:t>10</m:t>
-                          </m:r>
-                        </m:e>
-                        <m:sup>
-                          <m:r>
-                            <a:rPr lang="en-US" b="0" i="1" smtClean="0">
-                              <a:latin typeface="Cambria Math" panose="02040503050406030204" pitchFamily="18" charset="0"/>
-                            </a:rPr>
-                            <m:t>∘</m:t>
-                          </m:r>
-                        </m:sup>
-                      </m:sSup>
-                    </m:oMath>
-                  </m:oMathPara>
-                </a14:m>
-                <a:endParaRPr lang="en-US" dirty="0"/>
-              </a:p>
-            </p:txBody>
-          </p:sp>
-        </mc:Choice>
-        <mc:Fallback>
-          <p:sp>
-            <p:nvSpPr>
-              <p:cNvPr id="13" name="TextBox 12">
-                <a:extLst>
-                  <a:ext uri="{FF2B5EF4-FFF2-40B4-BE49-F238E27FC236}">
-                    <a16:creationId xmlns:a16="http://schemas.microsoft.com/office/drawing/2014/main" id="{AC60D419-119A-74FF-CFE7-155DBA94AE96}"/>
-                  </a:ext>
-                </a:extLst>
-              </p:cNvPr>
-              <p:cNvSpPr txBox="1">
-                <a:spLocks noRot="1" noChangeAspect="1" noMove="1" noResize="1" noEditPoints="1" noAdjustHandles="1" noChangeArrowheads="1" noChangeShapeType="1" noTextEdit="1"/>
-              </p:cNvSpPr>
-              <p:nvPr/>
-            </p:nvSpPr>
-            <p:spPr>
-              <a:xfrm>
-                <a:off x="5871610" y="520184"/>
-                <a:ext cx="572529" cy="369332"/>
-              </a:xfrm>
-              <a:prstGeom prst="rect">
-                <a:avLst/>
-              </a:prstGeom>
-              <a:blipFill>
-                <a:blip r:embed="rId5"/>
-                <a:stretch>
-                  <a:fillRect/>
-                </a:stretch>
-              </a:blipFill>
-            </p:spPr>
-            <p:txBody>
-              <a:bodyPr/>
-              <a:lstStyle/>
-              <a:p>
-                <a:r>
-                  <a:rPr lang="en-US">
-                    <a:noFill/>
-                  </a:rPr>
-                  <a:t> </a:t>
-                </a:r>
-              </a:p>
-            </p:txBody>
-          </p:sp>
-        </mc:Fallback>
-      </mc:AlternateContent>
-      <mc:AlternateContent xmlns:mc="http://schemas.openxmlformats.org/markup-compatibility/2006">
-        <mc:Choice xmlns:a14="http://schemas.microsoft.com/office/drawing/2010/main" Requires="a14">
-          <p:sp>
-            <p:nvSpPr>
-              <p:cNvPr id="14" name="TextBox 13">
-                <a:extLst>
-                  <a:ext uri="{FF2B5EF4-FFF2-40B4-BE49-F238E27FC236}">
-                    <a16:creationId xmlns:a16="http://schemas.microsoft.com/office/drawing/2014/main" id="{8B85F688-41B1-C91F-2241-15C2D25AE7D1}"/>
-                  </a:ext>
-                </a:extLst>
-              </p:cNvPr>
-              <p:cNvSpPr txBox="1"/>
-              <p:nvPr/>
-            </p:nvSpPr>
-            <p:spPr>
-              <a:xfrm>
-                <a:off x="7579424" y="520184"/>
-                <a:ext cx="572529" cy="369332"/>
-              </a:xfrm>
-              <a:prstGeom prst="rect">
-                <a:avLst/>
-              </a:prstGeom>
-              <a:noFill/>
-            </p:spPr>
-            <p:txBody>
-              <a:bodyPr wrap="none" rtlCol="0">
-                <a:spAutoFit/>
-              </a:bodyPr>
-              <a:lstStyle/>
-              <a:p>
-                <a14:m>
-                  <m:oMathPara xmlns:m="http://schemas.openxmlformats.org/officeDocument/2006/math">
-                    <m:oMathParaPr>
-                      <m:jc m:val="centerGroup"/>
-                    </m:oMathParaPr>
-                    <m:oMath xmlns:m="http://schemas.openxmlformats.org/officeDocument/2006/math">
-                      <m:sSup>
-                        <m:sSupPr>
-                          <m:ctrlPr>
-                            <a:rPr lang="en-US" b="0" i="1" smtClean="0">
-                              <a:latin typeface="Cambria Math" panose="02040503050406030204" pitchFamily="18" charset="0"/>
-                            </a:rPr>
-                          </m:ctrlPr>
-                        </m:sSupPr>
-                        <m:e>
-                          <m:r>
-                            <a:rPr lang="en-US" b="0" i="1" smtClean="0">
-                              <a:latin typeface="Cambria Math" panose="02040503050406030204" pitchFamily="18" charset="0"/>
-                            </a:rPr>
-                            <m:t>15</m:t>
-                          </m:r>
-                        </m:e>
-                        <m:sup>
-                          <m:r>
-                            <a:rPr lang="en-US" b="0" i="1" smtClean="0">
-                              <a:latin typeface="Cambria Math" panose="02040503050406030204" pitchFamily="18" charset="0"/>
-                            </a:rPr>
-                            <m:t>∘</m:t>
-                          </m:r>
-                        </m:sup>
-                      </m:sSup>
-                    </m:oMath>
-                  </m:oMathPara>
-                </a14:m>
-                <a:endParaRPr lang="en-US" dirty="0"/>
-              </a:p>
-            </p:txBody>
-          </p:sp>
-        </mc:Choice>
-        <mc:Fallback>
-          <p:sp>
-            <p:nvSpPr>
-              <p:cNvPr id="14" name="TextBox 13">
-                <a:extLst>
-                  <a:ext uri="{FF2B5EF4-FFF2-40B4-BE49-F238E27FC236}">
-                    <a16:creationId xmlns:a16="http://schemas.microsoft.com/office/drawing/2014/main" id="{8B85F688-41B1-C91F-2241-15C2D25AE7D1}"/>
-                  </a:ext>
-                </a:extLst>
-              </p:cNvPr>
-              <p:cNvSpPr txBox="1">
-                <a:spLocks noRot="1" noChangeAspect="1" noMove="1" noResize="1" noEditPoints="1" noAdjustHandles="1" noChangeArrowheads="1" noChangeShapeType="1" noTextEdit="1"/>
-              </p:cNvSpPr>
-              <p:nvPr/>
-            </p:nvSpPr>
-            <p:spPr>
-              <a:xfrm>
-                <a:off x="7579424" y="520184"/>
-                <a:ext cx="572529" cy="369332"/>
-              </a:xfrm>
-              <a:prstGeom prst="rect">
-                <a:avLst/>
-              </a:prstGeom>
-              <a:blipFill>
-                <a:blip r:embed="rId6"/>
-                <a:stretch>
-                  <a:fillRect/>
-                </a:stretch>
-              </a:blipFill>
-            </p:spPr>
-            <p:txBody>
-              <a:bodyPr/>
-              <a:lstStyle/>
-              <a:p>
-                <a:r>
-                  <a:rPr lang="en-US">
-                    <a:noFill/>
-                  </a:rPr>
-                  <a:t> </a:t>
-                </a:r>
-              </a:p>
-            </p:txBody>
-          </p:sp>
-        </mc:Fallback>
-      </mc:AlternateContent>
-      <p:sp>
-        <p:nvSpPr>
-          <p:cNvPr id="15" name="TextBox 14">
-            <a:extLst>
-              <a:ext uri="{FF2B5EF4-FFF2-40B4-BE49-F238E27FC236}">
-                <a16:creationId xmlns:a16="http://schemas.microsoft.com/office/drawing/2014/main" id="{56106F5D-3BBF-2E3A-66BF-7E315900FCB2}"/>
-              </a:ext>
-            </a:extLst>
-          </p:cNvPr>
-          <p:cNvSpPr txBox="1"/>
-          <p:nvPr/>
-        </p:nvSpPr>
-        <p:spPr>
-          <a:xfrm>
-            <a:off x="3186515" y="1625741"/>
-            <a:ext cx="546945" cy="369332"/>
-          </a:xfrm>
-          <a:prstGeom prst="rect">
-            <a:avLst/>
-          </a:prstGeom>
-          <a:noFill/>
-        </p:spPr>
-        <p:txBody>
-          <a:bodyPr wrap="none" rtlCol="0">
-            <a:spAutoFit/>
-          </a:bodyPr>
-          <a:lstStyle/>
-          <a:p>
-            <a:r>
-              <a:rPr lang="en-US" dirty="0"/>
-              <a:t>L=3</a:t>
-            </a:r>
-          </a:p>
-        </p:txBody>
-      </p:sp>
-      <p:sp>
-        <p:nvSpPr>
-          <p:cNvPr id="16" name="TextBox 15">
-            <a:extLst>
-              <a:ext uri="{FF2B5EF4-FFF2-40B4-BE49-F238E27FC236}">
-                <a16:creationId xmlns:a16="http://schemas.microsoft.com/office/drawing/2014/main" id="{413C3997-E886-F5DE-0CB7-11C8F52C7989}"/>
-              </a:ext>
-            </a:extLst>
-          </p:cNvPr>
-          <p:cNvSpPr txBox="1"/>
-          <p:nvPr/>
-        </p:nvSpPr>
-        <p:spPr>
-          <a:xfrm>
-            <a:off x="3160352" y="3349766"/>
-            <a:ext cx="546945" cy="369332"/>
-          </a:xfrm>
-          <a:prstGeom prst="rect">
-            <a:avLst/>
-          </a:prstGeom>
-          <a:noFill/>
-        </p:spPr>
-        <p:txBody>
-          <a:bodyPr wrap="none" rtlCol="0">
-            <a:spAutoFit/>
-          </a:bodyPr>
-          <a:lstStyle/>
-          <a:p>
-            <a:r>
-              <a:rPr lang="en-US" dirty="0"/>
-              <a:t>L=6</a:t>
-            </a:r>
-          </a:p>
-        </p:txBody>
-      </p:sp>
-      <p:sp>
-        <p:nvSpPr>
-          <p:cNvPr id="17" name="TextBox 16">
-            <a:extLst>
-              <a:ext uri="{FF2B5EF4-FFF2-40B4-BE49-F238E27FC236}">
-                <a16:creationId xmlns:a16="http://schemas.microsoft.com/office/drawing/2014/main" id="{1111174F-6AFB-1679-9190-B3B73D0B517C}"/>
-              </a:ext>
-            </a:extLst>
-          </p:cNvPr>
-          <p:cNvSpPr txBox="1"/>
-          <p:nvPr/>
-        </p:nvSpPr>
-        <p:spPr>
-          <a:xfrm>
-            <a:off x="3140962" y="5350016"/>
-            <a:ext cx="546945" cy="369332"/>
-          </a:xfrm>
-          <a:prstGeom prst="rect">
-            <a:avLst/>
-          </a:prstGeom>
-          <a:noFill/>
-        </p:spPr>
-        <p:txBody>
-          <a:bodyPr wrap="none" rtlCol="0">
-            <a:spAutoFit/>
-          </a:bodyPr>
-          <a:lstStyle/>
-          <a:p>
-            <a:r>
-              <a:rPr lang="en-US" dirty="0"/>
-              <a:t>L=9</a:t>
-            </a:r>
-          </a:p>
-        </p:txBody>
-      </p:sp>
-      <mc:AlternateContent xmlns:mc="http://schemas.openxmlformats.org/markup-compatibility/2006">
-        <mc:Choice xmlns:a14="http://schemas.microsoft.com/office/drawing/2010/main" Requires="a14">
-          <p:sp>
-            <p:nvSpPr>
-              <p:cNvPr id="18" name="TextBox 17">
-                <a:extLst>
-                  <a:ext uri="{FF2B5EF4-FFF2-40B4-BE49-F238E27FC236}">
-                    <a16:creationId xmlns:a16="http://schemas.microsoft.com/office/drawing/2014/main" id="{2641EE65-D261-4425-E893-18FDAE1BCD06}"/>
-                  </a:ext>
-                </a:extLst>
-              </p:cNvPr>
-              <p:cNvSpPr txBox="1"/>
-              <p:nvPr/>
-            </p:nvSpPr>
-            <p:spPr>
-              <a:xfrm>
-                <a:off x="4900719" y="204047"/>
-                <a:ext cx="2505429" cy="369332"/>
-              </a:xfrm>
-              <a:prstGeom prst="rect">
-                <a:avLst/>
-              </a:prstGeom>
-              <a:noFill/>
-            </p:spPr>
-            <p:txBody>
-              <a:bodyPr wrap="none" rtlCol="0">
-                <a:spAutoFit/>
-              </a:bodyPr>
-              <a:lstStyle/>
-              <a:p>
-                <a:r>
-                  <a:rPr lang="en-US" dirty="0"/>
-                  <a:t>Angle of Incidence </a:t>
-                </a:r>
-                <a14:m>
-                  <m:oMath xmlns:m="http://schemas.openxmlformats.org/officeDocument/2006/math">
-                    <m:d>
-                      <m:dPr>
-                        <m:ctrlPr>
-                          <a:rPr lang="en-US" b="0" i="1" smtClean="0">
-                            <a:latin typeface="Cambria Math" panose="02040503050406030204" pitchFamily="18" charset="0"/>
-                          </a:rPr>
-                        </m:ctrlPr>
-                      </m:dPr>
-                      <m:e>
-                        <m:sSub>
-                          <m:sSubPr>
-                            <m:ctrlPr>
-                              <a:rPr lang="en-US" b="0" i="1" smtClean="0">
-                                <a:latin typeface="Cambria Math" panose="02040503050406030204" pitchFamily="18" charset="0"/>
-                              </a:rPr>
-                            </m:ctrlPr>
-                          </m:sSubPr>
-                          <m:e>
-                            <m:r>
-                              <a:rPr lang="en-US" b="0" i="1" smtClean="0">
-                                <a:latin typeface="Cambria Math" panose="02040503050406030204" pitchFamily="18" charset="0"/>
-                              </a:rPr>
-                              <m:t>𝜃</m:t>
-                            </m:r>
-                          </m:e>
-                          <m:sub>
-                            <m:r>
-                              <a:rPr lang="en-US" b="0" i="1" smtClean="0">
-                                <a:latin typeface="Cambria Math" panose="02040503050406030204" pitchFamily="18" charset="0"/>
-                              </a:rPr>
-                              <m:t>𝑖</m:t>
-                            </m:r>
-                          </m:sub>
-                        </m:sSub>
-                      </m:e>
-                    </m:d>
-                  </m:oMath>
-                </a14:m>
-                <a:r>
-                  <a:rPr lang="en-US" dirty="0"/>
-                  <a:t> </a:t>
-                </a:r>
-              </a:p>
-            </p:txBody>
-          </p:sp>
-        </mc:Choice>
-        <mc:Fallback>
-          <p:sp>
-            <p:nvSpPr>
-              <p:cNvPr id="18" name="TextBox 17">
-                <a:extLst>
-                  <a:ext uri="{FF2B5EF4-FFF2-40B4-BE49-F238E27FC236}">
-                    <a16:creationId xmlns:a16="http://schemas.microsoft.com/office/drawing/2014/main" id="{2641EE65-D261-4425-E893-18FDAE1BCD06}"/>
-                  </a:ext>
-                </a:extLst>
-              </p:cNvPr>
-              <p:cNvSpPr txBox="1">
-                <a:spLocks noRot="1" noChangeAspect="1" noMove="1" noResize="1" noEditPoints="1" noAdjustHandles="1" noChangeArrowheads="1" noChangeShapeType="1" noTextEdit="1"/>
-              </p:cNvSpPr>
-              <p:nvPr/>
-            </p:nvSpPr>
-            <p:spPr>
-              <a:xfrm>
-                <a:off x="4900719" y="204047"/>
-                <a:ext cx="2505429" cy="369332"/>
-              </a:xfrm>
-              <a:prstGeom prst="rect">
-                <a:avLst/>
-              </a:prstGeom>
-              <a:blipFill>
-                <a:blip r:embed="rId7"/>
-                <a:stretch>
-                  <a:fillRect l="-2190" t="-6557" b="-26230"/>
-                </a:stretch>
-              </a:blipFill>
-            </p:spPr>
-            <p:txBody>
-              <a:bodyPr/>
-              <a:lstStyle/>
-              <a:p>
-                <a:r>
-                  <a:rPr lang="en-US">
-                    <a:noFill/>
-                  </a:rPr>
-                  <a:t> </a:t>
-                </a:r>
-              </a:p>
-            </p:txBody>
-          </p:sp>
-        </mc:Fallback>
-      </mc:AlternateContent>
-      <p:sp>
-        <p:nvSpPr>
-          <p:cNvPr id="20" name="TextBox 19">
-            <a:extLst>
-              <a:ext uri="{FF2B5EF4-FFF2-40B4-BE49-F238E27FC236}">
-                <a16:creationId xmlns:a16="http://schemas.microsoft.com/office/drawing/2014/main" id="{28681DF7-8CAD-8125-257A-5D3A37E06F37}"/>
-              </a:ext>
-            </a:extLst>
-          </p:cNvPr>
-          <p:cNvSpPr txBox="1"/>
-          <p:nvPr/>
-        </p:nvSpPr>
-        <p:spPr>
-          <a:xfrm rot="16200000">
-            <a:off x="2535348" y="3417143"/>
-            <a:ext cx="841897" cy="369332"/>
-          </a:xfrm>
-          <a:prstGeom prst="rect">
-            <a:avLst/>
-          </a:prstGeom>
-          <a:noFill/>
-        </p:spPr>
-        <p:txBody>
-          <a:bodyPr wrap="none" rtlCol="0">
-            <a:spAutoFit/>
-          </a:bodyPr>
-          <a:lstStyle/>
-          <a:p>
-            <a:r>
-              <a:rPr lang="en-US" dirty="0"/>
-              <a:t>M=0, L</a:t>
-            </a:r>
-          </a:p>
-        </p:txBody>
-      </p:sp>
-    </p:spTree>
-    <p:extLst>
-      <p:ext uri="{BB962C8B-B14F-4D97-AF65-F5344CB8AC3E}">
-        <p14:creationId xmlns:p14="http://schemas.microsoft.com/office/powerpoint/2010/main" val="4122454811"/>
       </p:ext>
     </p:extLst>
   </p:cSld>
